--- a/03-relatorio-qmd/template-referencia.pptx
+++ b/03-relatorio-qmd/template-referencia.pptx
@@ -688,6 +688,14 @@
 <file path=ppt/slideLayouts/slideLayout1.xml><?xml version="1.0" encoding="utf-8"?>
 <p:sldLayout xmlns:a="http://schemas.openxmlformats.org/drawingml/2006/main" xmlns:r="http://schemas.openxmlformats.org/officeDocument/2006/relationships" xmlns:p="http://schemas.openxmlformats.org/presentationml/2006/main" type="title" preserve="1">
   <p:cSld name="Title Slide">
+    <p:bg>
+      <p:bgPr>
+        <a:solidFill>
+          <a:srgbClr val="0C2440"/>
+        </a:solidFill>
+        <a:effectLst/>
+      </p:bgPr>
+    </p:bg>
     <p:spTree>
       <p:nvGrpSpPr>
         <p:cNvPr id="1" name=""/>
@@ -704,6 +712,49 @@
       </p:grpSpPr>
       <p:sp>
         <p:nvSpPr>
+          <p:cNvPr id="105" name="Rectangle 1"/>
+          <p:cNvSpPr/>
+          <p:nvPr/>
+        </p:nvSpPr>
+        <p:spPr>
+          <a:xfrm>
+            <a:off x="0" y="0"/>
+            <a:ext cx="164592" cy="5143500"/>
+          </a:xfrm>
+          <a:prstGeom prst="rect">
+            <a:avLst/>
+          </a:prstGeom>
+          <a:solidFill>
+            <a:srgbClr val="49A9DF"/>
+          </a:solidFill>
+          <a:ln>
+            <a:noFill/>
+          </a:ln>
+        </p:spPr>
+        <p:style>
+          <a:lnRef idx="1">
+            <a:schemeClr val="accent1"/>
+          </a:lnRef>
+          <a:fillRef idx="3">
+            <a:schemeClr val="accent1"/>
+          </a:fillRef>
+          <a:effectRef idx="2">
+            <a:schemeClr val="accent1"/>
+          </a:effectRef>
+          <a:fontRef idx="minor">
+            <a:schemeClr val="lt1"/>
+          </a:fontRef>
+        </p:style>
+        <p:txBody>
+          <a:bodyPr rtlCol="0" anchor="ctr"/>
+          <a:lstStyle/>
+          <a:p>
+            <a:pPr algn="ctr"/>
+          </a:p>
+        </p:txBody>
+      </p:sp>
+      <p:sp>
+        <p:nvSpPr>
           <p:cNvPr id="2" name="Title 1"/>
           <p:cNvSpPr>
             <a:spLocks noGrp="1"/>
@@ -722,6 +773,14 @@
           <a:bodyPr/>
           <a:lstStyle/>
           <a:p>
+            <a:pPr>
+              <a:defRPr sz="4700" b="1">
+                <a:solidFill>
+                  <a:srgbClr val="FFFFFF"/>
+                </a:solidFill>
+                <a:latin typeface="Aptos Display"/>
+              </a:defRPr>
+            </a:pPr>
             <a:r>
               <a:rPr lang="en-US"/>
               <a:t>Click to edit Master title style</a:t>
@@ -840,6 +899,14 @@
             </a:lvl9pPr>
           </a:lstStyle>
           <a:p>
+            <a:pPr>
+              <a:defRPr sz="4700" b="1">
+                <a:solidFill>
+                  <a:srgbClr val="FFFFFF"/>
+                </a:solidFill>
+                <a:latin typeface="Aptos Display"/>
+              </a:defRPr>
+            </a:pPr>
             <a:r>
               <a:rPr lang="en-US"/>
               <a:t>Click to edit Master subtitle style</a:t>
@@ -862,6 +929,14 @@
           <a:bodyPr/>
           <a:lstStyle/>
           <a:p>
+            <a:pPr>
+              <a:defRPr sz="900" b="0">
+                <a:solidFill>
+                  <a:srgbClr val="CBE8F9"/>
+                </a:solidFill>
+                <a:latin typeface="Aptos"/>
+              </a:defRPr>
+            </a:pPr>
             <a:fld id="{241EB5C9-1307-BA42-ABA2-0BC069CD8E7F}" type="datetimeFigureOut">
               <a:rPr lang="en-US" smtClean="0"/>
               <a:t>1/2/22</a:t>
@@ -885,6 +960,14 @@
           <a:bodyPr/>
           <a:lstStyle/>
           <a:p>
+            <a:pPr>
+              <a:defRPr sz="900" b="0">
+                <a:solidFill>
+                  <a:srgbClr val="CBE8F9"/>
+                </a:solidFill>
+                <a:latin typeface="Aptos"/>
+              </a:defRPr>
+            </a:pPr>
             <a:endParaRPr lang="en-US"/>
           </a:p>
         </p:txBody>
@@ -904,6 +987,14 @@
           <a:bodyPr/>
           <a:lstStyle/>
           <a:p>
+            <a:pPr>
+              <a:defRPr sz="900" b="0">
+                <a:solidFill>
+                  <a:srgbClr val="CBE8F9"/>
+                </a:solidFill>
+                <a:latin typeface="Aptos"/>
+              </a:defRPr>
+            </a:pPr>
             <a:fld id="{C5EF2332-01BF-834F-8236-50238282D533}" type="slidenum">
               <a:rPr lang="en-US" smtClean="0"/>
               <a:t>‹#›</a:t>
@@ -928,6 +1019,14 @@
 <file path=ppt/slideLayouts/slideLayout10.xml><?xml version="1.0" encoding="utf-8"?>
 <p:sldLayout xmlns:a="http://schemas.openxmlformats.org/drawingml/2006/main" xmlns:r="http://schemas.openxmlformats.org/officeDocument/2006/relationships" xmlns:p="http://schemas.openxmlformats.org/presentationml/2006/main" type="vertTx" preserve="1">
   <p:cSld name="Title and Vertical Text">
+    <p:bg>
+      <p:bgPr>
+        <a:solidFill>
+          <a:srgbClr val="FFFFFF"/>
+        </a:solidFill>
+        <a:effectLst/>
+      </p:bgPr>
+    </p:bg>
     <p:spTree>
       <p:nvGrpSpPr>
         <p:cNvPr id="1" name=""/>
@@ -944,6 +1043,49 @@
       </p:grpSpPr>
       <p:sp>
         <p:nvSpPr>
+          <p:cNvPr id="105" name="Rectangle 1"/>
+          <p:cNvSpPr/>
+          <p:nvPr/>
+        </p:nvSpPr>
+        <p:spPr>
+          <a:xfrm>
+            <a:off x="457200" y="1024128"/>
+            <a:ext cx="8229600" cy="50292"/>
+          </a:xfrm>
+          <a:prstGeom prst="rect">
+            <a:avLst/>
+          </a:prstGeom>
+          <a:solidFill>
+            <a:srgbClr val="49A9DF"/>
+          </a:solidFill>
+          <a:ln>
+            <a:noFill/>
+          </a:ln>
+        </p:spPr>
+        <p:style>
+          <a:lnRef idx="1">
+            <a:schemeClr val="accent1"/>
+          </a:lnRef>
+          <a:fillRef idx="3">
+            <a:schemeClr val="accent1"/>
+          </a:fillRef>
+          <a:effectRef idx="2">
+            <a:schemeClr val="accent1"/>
+          </a:effectRef>
+          <a:fontRef idx="minor">
+            <a:schemeClr val="lt1"/>
+          </a:fontRef>
+        </p:style>
+        <p:txBody>
+          <a:bodyPr rtlCol="0" anchor="ctr"/>
+          <a:lstStyle/>
+          <a:p>
+            <a:pPr algn="ctr"/>
+          </a:p>
+        </p:txBody>
+      </p:sp>
+      <p:sp>
+        <p:nvSpPr>
           <p:cNvPr id="2" name="Title 1"/>
           <p:cNvSpPr>
             <a:spLocks noGrp="1"/>
@@ -957,6 +1099,14 @@
           <a:bodyPr/>
           <a:lstStyle/>
           <a:p>
+            <a:pPr>
+              <a:defRPr sz="3100" b="1">
+                <a:solidFill>
+                  <a:srgbClr val="0C2440"/>
+                </a:solidFill>
+                <a:latin typeface="Aptos Display"/>
+              </a:defRPr>
+            </a:pPr>
             <a:r>
               <a:rPr lang="en-US"/>
               <a:t>Click to edit Master title style</a:t>
@@ -979,7 +1129,14 @@
           <a:bodyPr vert="eaVert"/>
           <a:lstStyle/>
           <a:p>
-            <a:pPr lvl="0"/>
+            <a:pPr lvl="0">
+              <a:defRPr sz="1900" b="0">
+                <a:solidFill>
+                  <a:srgbClr val="243A50"/>
+                </a:solidFill>
+                <a:latin typeface="Aptos"/>
+              </a:defRPr>
+            </a:pPr>
             <a:r>
               <a:rPr lang="en-US"/>
               <a:t>Click to edit Master text styles</a:t>
@@ -1030,6 +1187,14 @@
           <a:bodyPr/>
           <a:lstStyle/>
           <a:p>
+            <a:pPr>
+              <a:defRPr sz="900" b="0">
+                <a:solidFill>
+                  <a:srgbClr val="637D94"/>
+                </a:solidFill>
+                <a:latin typeface="Aptos"/>
+              </a:defRPr>
+            </a:pPr>
             <a:fld id="{241EB5C9-1307-BA42-ABA2-0BC069CD8E7F}" type="datetimeFigureOut">
               <a:rPr lang="en-US" smtClean="0"/>
               <a:t>1/2/22</a:t>
@@ -1053,6 +1218,14 @@
           <a:bodyPr/>
           <a:lstStyle/>
           <a:p>
+            <a:pPr>
+              <a:defRPr sz="900" b="0">
+                <a:solidFill>
+                  <a:srgbClr val="637D94"/>
+                </a:solidFill>
+                <a:latin typeface="Aptos"/>
+              </a:defRPr>
+            </a:pPr>
             <a:endParaRPr lang="en-US"/>
           </a:p>
         </p:txBody>
@@ -1072,6 +1245,14 @@
           <a:bodyPr/>
           <a:lstStyle/>
           <a:p>
+            <a:pPr>
+              <a:defRPr sz="900" b="0">
+                <a:solidFill>
+                  <a:srgbClr val="637D94"/>
+                </a:solidFill>
+                <a:latin typeface="Aptos"/>
+              </a:defRPr>
+            </a:pPr>
             <a:fld id="{C5EF2332-01BF-834F-8236-50238282D533}" type="slidenum">
               <a:rPr lang="en-US" smtClean="0"/>
               <a:t>‹#›</a:t>
@@ -1096,6 +1277,14 @@
 <file path=ppt/slideLayouts/slideLayout11.xml><?xml version="1.0" encoding="utf-8"?>
 <p:sldLayout xmlns:a="http://schemas.openxmlformats.org/drawingml/2006/main" xmlns:r="http://schemas.openxmlformats.org/officeDocument/2006/relationships" xmlns:p="http://schemas.openxmlformats.org/presentationml/2006/main" type="vertTitleAndTx" preserve="1">
   <p:cSld name="Vertical Title and Text">
+    <p:bg>
+      <p:bgPr>
+        <a:solidFill>
+          <a:srgbClr val="FFFFFF"/>
+        </a:solidFill>
+        <a:effectLst/>
+      </p:bgPr>
+    </p:bg>
     <p:spTree>
       <p:nvGrpSpPr>
         <p:cNvPr id="1" name=""/>
@@ -1112,6 +1301,49 @@
       </p:grpSpPr>
       <p:sp>
         <p:nvSpPr>
+          <p:cNvPr id="105" name="Rectangle 1"/>
+          <p:cNvSpPr/>
+          <p:nvPr/>
+        </p:nvSpPr>
+        <p:spPr>
+          <a:xfrm>
+            <a:off x="457200" y="1024128"/>
+            <a:ext cx="8229600" cy="50292"/>
+          </a:xfrm>
+          <a:prstGeom prst="rect">
+            <a:avLst/>
+          </a:prstGeom>
+          <a:solidFill>
+            <a:srgbClr val="49A9DF"/>
+          </a:solidFill>
+          <a:ln>
+            <a:noFill/>
+          </a:ln>
+        </p:spPr>
+        <p:style>
+          <a:lnRef idx="1">
+            <a:schemeClr val="accent1"/>
+          </a:lnRef>
+          <a:fillRef idx="3">
+            <a:schemeClr val="accent1"/>
+          </a:fillRef>
+          <a:effectRef idx="2">
+            <a:schemeClr val="accent1"/>
+          </a:effectRef>
+          <a:fontRef idx="minor">
+            <a:schemeClr val="lt1"/>
+          </a:fontRef>
+        </p:style>
+        <p:txBody>
+          <a:bodyPr rtlCol="0" anchor="ctr"/>
+          <a:lstStyle/>
+          <a:p>
+            <a:pPr algn="ctr"/>
+          </a:p>
+        </p:txBody>
+      </p:sp>
+      <p:sp>
+        <p:nvSpPr>
           <p:cNvPr id="2" name="Vertical Title 1"/>
           <p:cNvSpPr>
             <a:spLocks noGrp="1"/>
@@ -1130,6 +1362,14 @@
           <a:bodyPr vert="eaVert"/>
           <a:lstStyle/>
           <a:p>
+            <a:pPr>
+              <a:defRPr sz="3100" b="1">
+                <a:solidFill>
+                  <a:srgbClr val="0C2440"/>
+                </a:solidFill>
+                <a:latin typeface="Aptos Display"/>
+              </a:defRPr>
+            </a:pPr>
             <a:r>
               <a:rPr lang="en-US"/>
               <a:t>Click to edit Master title style</a:t>
@@ -1157,7 +1397,14 @@
           <a:bodyPr vert="eaVert"/>
           <a:lstStyle/>
           <a:p>
-            <a:pPr lvl="0"/>
+            <a:pPr lvl="0">
+              <a:defRPr sz="1900" b="0">
+                <a:solidFill>
+                  <a:srgbClr val="243A50"/>
+                </a:solidFill>
+                <a:latin typeface="Aptos"/>
+              </a:defRPr>
+            </a:pPr>
             <a:r>
               <a:rPr lang="en-US"/>
               <a:t>Click to edit Master text styles</a:t>
@@ -1208,6 +1455,14 @@
           <a:bodyPr/>
           <a:lstStyle/>
           <a:p>
+            <a:pPr>
+              <a:defRPr sz="900" b="0">
+                <a:solidFill>
+                  <a:srgbClr val="637D94"/>
+                </a:solidFill>
+                <a:latin typeface="Aptos"/>
+              </a:defRPr>
+            </a:pPr>
             <a:fld id="{241EB5C9-1307-BA42-ABA2-0BC069CD8E7F}" type="datetimeFigureOut">
               <a:rPr lang="en-US" smtClean="0"/>
               <a:t>1/2/22</a:t>
@@ -1231,6 +1486,14 @@
           <a:bodyPr/>
           <a:lstStyle/>
           <a:p>
+            <a:pPr>
+              <a:defRPr sz="900" b="0">
+                <a:solidFill>
+                  <a:srgbClr val="637D94"/>
+                </a:solidFill>
+                <a:latin typeface="Aptos"/>
+              </a:defRPr>
+            </a:pPr>
             <a:endParaRPr lang="en-US"/>
           </a:p>
         </p:txBody>
@@ -1250,6 +1513,14 @@
           <a:bodyPr/>
           <a:lstStyle/>
           <a:p>
+            <a:pPr>
+              <a:defRPr sz="900" b="0">
+                <a:solidFill>
+                  <a:srgbClr val="637D94"/>
+                </a:solidFill>
+                <a:latin typeface="Aptos"/>
+              </a:defRPr>
+            </a:pPr>
             <a:fld id="{C5EF2332-01BF-834F-8236-50238282D533}" type="slidenum">
               <a:rPr lang="en-US" smtClean="0"/>
               <a:t>‹#›</a:t>
@@ -1274,6 +1545,14 @@
 <file path=ppt/slideLayouts/slideLayout2.xml><?xml version="1.0" encoding="utf-8"?>
 <p:sldLayout xmlns:a="http://schemas.openxmlformats.org/drawingml/2006/main" xmlns:r="http://schemas.openxmlformats.org/officeDocument/2006/relationships" xmlns:p="http://schemas.openxmlformats.org/presentationml/2006/main" type="obj" preserve="1">
   <p:cSld name="Title and Content">
+    <p:bg>
+      <p:bgPr>
+        <a:solidFill>
+          <a:srgbClr val="FFFFFF"/>
+        </a:solidFill>
+        <a:effectLst/>
+      </p:bgPr>
+    </p:bg>
     <p:spTree>
       <p:nvGrpSpPr>
         <p:cNvPr id="1" name=""/>
@@ -1290,6 +1569,49 @@
       </p:grpSpPr>
       <p:sp>
         <p:nvSpPr>
+          <p:cNvPr id="105" name="Rectangle 1"/>
+          <p:cNvSpPr/>
+          <p:nvPr/>
+        </p:nvSpPr>
+        <p:spPr>
+          <a:xfrm>
+            <a:off x="457200" y="1024128"/>
+            <a:ext cx="8229600" cy="50292"/>
+          </a:xfrm>
+          <a:prstGeom prst="rect">
+            <a:avLst/>
+          </a:prstGeom>
+          <a:solidFill>
+            <a:srgbClr val="49A9DF"/>
+          </a:solidFill>
+          <a:ln>
+            <a:noFill/>
+          </a:ln>
+        </p:spPr>
+        <p:style>
+          <a:lnRef idx="1">
+            <a:schemeClr val="accent1"/>
+          </a:lnRef>
+          <a:fillRef idx="3">
+            <a:schemeClr val="accent1"/>
+          </a:fillRef>
+          <a:effectRef idx="2">
+            <a:schemeClr val="accent1"/>
+          </a:effectRef>
+          <a:fontRef idx="minor">
+            <a:schemeClr val="lt1"/>
+          </a:fontRef>
+        </p:style>
+        <p:txBody>
+          <a:bodyPr rtlCol="0" anchor="ctr"/>
+          <a:lstStyle/>
+          <a:p>
+            <a:pPr algn="ctr"/>
+          </a:p>
+        </p:txBody>
+      </p:sp>
+      <p:sp>
+        <p:nvSpPr>
           <p:cNvPr id="2" name="Title 1"/>
           <p:cNvSpPr>
             <a:spLocks noGrp="1"/>
@@ -1303,6 +1625,14 @@
           <a:bodyPr/>
           <a:lstStyle/>
           <a:p>
+            <a:pPr>
+              <a:defRPr sz="3100" b="1">
+                <a:solidFill>
+                  <a:srgbClr val="0C2440"/>
+                </a:solidFill>
+                <a:latin typeface="Aptos Display"/>
+              </a:defRPr>
+            </a:pPr>
             <a:r>
               <a:rPr lang="en-US"/>
               <a:t>Click to edit Master title style</a:t>
@@ -1325,7 +1655,14 @@
           <a:bodyPr/>
           <a:lstStyle/>
           <a:p>
-            <a:pPr lvl="0"/>
+            <a:pPr lvl="0">
+              <a:defRPr sz="1900" b="0">
+                <a:solidFill>
+                  <a:srgbClr val="243A50"/>
+                </a:solidFill>
+                <a:latin typeface="Aptos"/>
+              </a:defRPr>
+            </a:pPr>
             <a:r>
               <a:rPr lang="en-US"/>
               <a:t>Click to edit Master text styles</a:t>
@@ -1376,6 +1713,14 @@
           <a:bodyPr/>
           <a:lstStyle/>
           <a:p>
+            <a:pPr>
+              <a:defRPr sz="900" b="0">
+                <a:solidFill>
+                  <a:srgbClr val="637D94"/>
+                </a:solidFill>
+                <a:latin typeface="Aptos"/>
+              </a:defRPr>
+            </a:pPr>
             <a:fld id="{241EB5C9-1307-BA42-ABA2-0BC069CD8E7F}" type="datetimeFigureOut">
               <a:rPr lang="en-US" smtClean="0"/>
               <a:t>1/2/22</a:t>
@@ -1399,6 +1744,14 @@
           <a:bodyPr/>
           <a:lstStyle/>
           <a:p>
+            <a:pPr>
+              <a:defRPr sz="900" b="0">
+                <a:solidFill>
+                  <a:srgbClr val="637D94"/>
+                </a:solidFill>
+                <a:latin typeface="Aptos"/>
+              </a:defRPr>
+            </a:pPr>
             <a:endParaRPr lang="en-US"/>
           </a:p>
         </p:txBody>
@@ -1418,6 +1771,14 @@
           <a:bodyPr/>
           <a:lstStyle/>
           <a:p>
+            <a:pPr>
+              <a:defRPr sz="900" b="0">
+                <a:solidFill>
+                  <a:srgbClr val="637D94"/>
+                </a:solidFill>
+                <a:latin typeface="Aptos"/>
+              </a:defRPr>
+            </a:pPr>
             <a:fld id="{C5EF2332-01BF-834F-8236-50238282D533}" type="slidenum">
               <a:rPr lang="en-US" smtClean="0"/>
               <a:t>‹#›</a:t>
@@ -1442,6 +1803,14 @@
 <file path=ppt/slideLayouts/slideLayout3.xml><?xml version="1.0" encoding="utf-8"?>
 <p:sldLayout xmlns:a="http://schemas.openxmlformats.org/drawingml/2006/main" xmlns:r="http://schemas.openxmlformats.org/officeDocument/2006/relationships" xmlns:p="http://schemas.openxmlformats.org/presentationml/2006/main" type="secHead" preserve="1">
   <p:cSld name="Section Header">
+    <p:bg>
+      <p:bgPr>
+        <a:solidFill>
+          <a:srgbClr val="FFFFFF"/>
+        </a:solidFill>
+        <a:effectLst/>
+      </p:bgPr>
+    </p:bg>
     <p:spTree>
       <p:nvGrpSpPr>
         <p:cNvPr id="1" name=""/>
@@ -1458,6 +1827,49 @@
       </p:grpSpPr>
       <p:sp>
         <p:nvSpPr>
+          <p:cNvPr id="105" name="Rectangle 1"/>
+          <p:cNvSpPr/>
+          <p:nvPr/>
+        </p:nvSpPr>
+        <p:spPr>
+          <a:xfrm>
+            <a:off x="457200" y="1024128"/>
+            <a:ext cx="8229600" cy="50292"/>
+          </a:xfrm>
+          <a:prstGeom prst="rect">
+            <a:avLst/>
+          </a:prstGeom>
+          <a:solidFill>
+            <a:srgbClr val="49A9DF"/>
+          </a:solidFill>
+          <a:ln>
+            <a:noFill/>
+          </a:ln>
+        </p:spPr>
+        <p:style>
+          <a:lnRef idx="1">
+            <a:schemeClr val="accent1"/>
+          </a:lnRef>
+          <a:fillRef idx="3">
+            <a:schemeClr val="accent1"/>
+          </a:fillRef>
+          <a:effectRef idx="2">
+            <a:schemeClr val="accent1"/>
+          </a:effectRef>
+          <a:fontRef idx="minor">
+            <a:schemeClr val="lt1"/>
+          </a:fontRef>
+        </p:style>
+        <p:txBody>
+          <a:bodyPr rtlCol="0" anchor="ctr"/>
+          <a:lstStyle/>
+          <a:p>
+            <a:pPr algn="ctr"/>
+          </a:p>
+        </p:txBody>
+      </p:sp>
+      <p:sp>
+        <p:nvSpPr>
           <p:cNvPr id="2" name="Title 1"/>
           <p:cNvSpPr>
             <a:spLocks noGrp="1"/>
@@ -1480,6 +1892,14 @@
             </a:lvl1pPr>
           </a:lstStyle>
           <a:p>
+            <a:pPr>
+              <a:defRPr sz="3100" b="1">
+                <a:solidFill>
+                  <a:srgbClr val="0C2440"/>
+                </a:solidFill>
+                <a:latin typeface="Aptos Display"/>
+              </a:defRPr>
+            </a:pPr>
             <a:r>
               <a:rPr lang="en-US"/>
               <a:t>Click to edit Master title style</a:t>
@@ -1598,7 +2018,14 @@
             </a:lvl9pPr>
           </a:lstStyle>
           <a:p>
-            <a:pPr lvl="0"/>
+            <a:pPr lvl="0">
+              <a:defRPr sz="1900" b="0">
+                <a:solidFill>
+                  <a:srgbClr val="243A50"/>
+                </a:solidFill>
+                <a:latin typeface="Aptos"/>
+              </a:defRPr>
+            </a:pPr>
             <a:r>
               <a:rPr lang="en-US"/>
               <a:t>Click to edit Master text styles</a:t>
@@ -1621,6 +2048,14 @@
           <a:bodyPr/>
           <a:lstStyle/>
           <a:p>
+            <a:pPr>
+              <a:defRPr sz="900" b="0">
+                <a:solidFill>
+                  <a:srgbClr val="637D94"/>
+                </a:solidFill>
+                <a:latin typeface="Aptos"/>
+              </a:defRPr>
+            </a:pPr>
             <a:fld id="{241EB5C9-1307-BA42-ABA2-0BC069CD8E7F}" type="datetimeFigureOut">
               <a:rPr lang="en-US" smtClean="0"/>
               <a:t>1/2/22</a:t>
@@ -1644,6 +2079,14 @@
           <a:bodyPr/>
           <a:lstStyle/>
           <a:p>
+            <a:pPr>
+              <a:defRPr sz="900" b="0">
+                <a:solidFill>
+                  <a:srgbClr val="637D94"/>
+                </a:solidFill>
+                <a:latin typeface="Aptos"/>
+              </a:defRPr>
+            </a:pPr>
             <a:endParaRPr lang="en-US"/>
           </a:p>
         </p:txBody>
@@ -1663,6 +2106,14 @@
           <a:bodyPr/>
           <a:lstStyle/>
           <a:p>
+            <a:pPr>
+              <a:defRPr sz="900" b="0">
+                <a:solidFill>
+                  <a:srgbClr val="637D94"/>
+                </a:solidFill>
+                <a:latin typeface="Aptos"/>
+              </a:defRPr>
+            </a:pPr>
             <a:fld id="{C5EF2332-01BF-834F-8236-50238282D533}" type="slidenum">
               <a:rPr lang="en-US" smtClean="0"/>
               <a:t>‹#›</a:t>
@@ -1687,6 +2138,14 @@
 <file path=ppt/slideLayouts/slideLayout4.xml><?xml version="1.0" encoding="utf-8"?>
 <p:sldLayout xmlns:a="http://schemas.openxmlformats.org/drawingml/2006/main" xmlns:r="http://schemas.openxmlformats.org/officeDocument/2006/relationships" xmlns:p="http://schemas.openxmlformats.org/presentationml/2006/main" type="twoObj" preserve="1">
   <p:cSld name="Two Content">
+    <p:bg>
+      <p:bgPr>
+        <a:solidFill>
+          <a:srgbClr val="FFFFFF"/>
+        </a:solidFill>
+        <a:effectLst/>
+      </p:bgPr>
+    </p:bg>
     <p:spTree>
       <p:nvGrpSpPr>
         <p:cNvPr id="1" name=""/>
@@ -1703,6 +2162,49 @@
       </p:grpSpPr>
       <p:sp>
         <p:nvSpPr>
+          <p:cNvPr id="106" name="Rectangle 1"/>
+          <p:cNvSpPr/>
+          <p:nvPr/>
+        </p:nvSpPr>
+        <p:spPr>
+          <a:xfrm>
+            <a:off x="457200" y="1024128"/>
+            <a:ext cx="8229600" cy="50292"/>
+          </a:xfrm>
+          <a:prstGeom prst="rect">
+            <a:avLst/>
+          </a:prstGeom>
+          <a:solidFill>
+            <a:srgbClr val="49A9DF"/>
+          </a:solidFill>
+          <a:ln>
+            <a:noFill/>
+          </a:ln>
+        </p:spPr>
+        <p:style>
+          <a:lnRef idx="1">
+            <a:schemeClr val="accent1"/>
+          </a:lnRef>
+          <a:fillRef idx="3">
+            <a:schemeClr val="accent1"/>
+          </a:fillRef>
+          <a:effectRef idx="2">
+            <a:schemeClr val="accent1"/>
+          </a:effectRef>
+          <a:fontRef idx="minor">
+            <a:schemeClr val="lt1"/>
+          </a:fontRef>
+        </p:style>
+        <p:txBody>
+          <a:bodyPr rtlCol="0" anchor="ctr"/>
+          <a:lstStyle/>
+          <a:p>
+            <a:pPr algn="ctr"/>
+          </a:p>
+        </p:txBody>
+      </p:sp>
+      <p:sp>
+        <p:nvSpPr>
           <p:cNvPr id="2" name="Title 1"/>
           <p:cNvSpPr>
             <a:spLocks noGrp="1"/>
@@ -1716,6 +2218,14 @@
           <a:bodyPr/>
           <a:lstStyle/>
           <a:p>
+            <a:pPr>
+              <a:defRPr sz="3100" b="1">
+                <a:solidFill>
+                  <a:srgbClr val="0C2440"/>
+                </a:solidFill>
+                <a:latin typeface="Aptos Display"/>
+              </a:defRPr>
+            </a:pPr>
             <a:r>
               <a:rPr lang="en-US"/>
               <a:t>Click to edit Master title style</a:t>
@@ -1771,7 +2281,14 @@
             </a:lvl9pPr>
           </a:lstStyle>
           <a:p>
-            <a:pPr lvl="0"/>
+            <a:pPr lvl="0">
+              <a:defRPr sz="1900" b="0">
+                <a:solidFill>
+                  <a:srgbClr val="243A50"/>
+                </a:solidFill>
+                <a:latin typeface="Aptos"/>
+              </a:defRPr>
+            </a:pPr>
             <a:r>
               <a:rPr lang="en-US"/>
               <a:t>Click to edit Master text styles</a:t>
@@ -1855,7 +2372,14 @@
             </a:lvl9pPr>
           </a:lstStyle>
           <a:p>
-            <a:pPr lvl="0"/>
+            <a:pPr lvl="0">
+              <a:defRPr sz="1900" b="0">
+                <a:solidFill>
+                  <a:srgbClr val="243A50"/>
+                </a:solidFill>
+                <a:latin typeface="Aptos"/>
+              </a:defRPr>
+            </a:pPr>
             <a:r>
               <a:rPr lang="en-US"/>
               <a:t>Click to edit Master text styles</a:t>
@@ -1906,6 +2430,14 @@
           <a:bodyPr/>
           <a:lstStyle/>
           <a:p>
+            <a:pPr>
+              <a:defRPr sz="900" b="0">
+                <a:solidFill>
+                  <a:srgbClr val="637D94"/>
+                </a:solidFill>
+                <a:latin typeface="Aptos"/>
+              </a:defRPr>
+            </a:pPr>
             <a:fld id="{241EB5C9-1307-BA42-ABA2-0BC069CD8E7F}" type="datetimeFigureOut">
               <a:rPr lang="en-US" smtClean="0"/>
               <a:t>1/2/22</a:t>
@@ -1929,6 +2461,14 @@
           <a:bodyPr/>
           <a:lstStyle/>
           <a:p>
+            <a:pPr>
+              <a:defRPr sz="900" b="0">
+                <a:solidFill>
+                  <a:srgbClr val="637D94"/>
+                </a:solidFill>
+                <a:latin typeface="Aptos"/>
+              </a:defRPr>
+            </a:pPr>
             <a:endParaRPr lang="en-US"/>
           </a:p>
         </p:txBody>
@@ -1948,6 +2488,14 @@
           <a:bodyPr/>
           <a:lstStyle/>
           <a:p>
+            <a:pPr>
+              <a:defRPr sz="900" b="0">
+                <a:solidFill>
+                  <a:srgbClr val="637D94"/>
+                </a:solidFill>
+                <a:latin typeface="Aptos"/>
+              </a:defRPr>
+            </a:pPr>
             <a:fld id="{C5EF2332-01BF-834F-8236-50238282D533}" type="slidenum">
               <a:rPr lang="en-US" smtClean="0"/>
               <a:t>‹#›</a:t>
@@ -1972,6 +2520,14 @@
 <file path=ppt/slideLayouts/slideLayout5.xml><?xml version="1.0" encoding="utf-8"?>
 <p:sldLayout xmlns:a="http://schemas.openxmlformats.org/drawingml/2006/main" xmlns:r="http://schemas.openxmlformats.org/officeDocument/2006/relationships" xmlns:p="http://schemas.openxmlformats.org/presentationml/2006/main" type="twoTxTwoObj" preserve="1">
   <p:cSld name="Comparison">
+    <p:bg>
+      <p:bgPr>
+        <a:solidFill>
+          <a:srgbClr val="FFFFFF"/>
+        </a:solidFill>
+        <a:effectLst/>
+      </p:bgPr>
+    </p:bg>
     <p:spTree>
       <p:nvGrpSpPr>
         <p:cNvPr id="1" name=""/>
@@ -1988,6 +2544,49 @@
       </p:grpSpPr>
       <p:sp>
         <p:nvSpPr>
+          <p:cNvPr id="108" name="Rectangle 1"/>
+          <p:cNvSpPr/>
+          <p:nvPr/>
+        </p:nvSpPr>
+        <p:spPr>
+          <a:xfrm>
+            <a:off x="457200" y="1024128"/>
+            <a:ext cx="8229600" cy="50292"/>
+          </a:xfrm>
+          <a:prstGeom prst="rect">
+            <a:avLst/>
+          </a:prstGeom>
+          <a:solidFill>
+            <a:srgbClr val="49A9DF"/>
+          </a:solidFill>
+          <a:ln>
+            <a:noFill/>
+          </a:ln>
+        </p:spPr>
+        <p:style>
+          <a:lnRef idx="1">
+            <a:schemeClr val="accent1"/>
+          </a:lnRef>
+          <a:fillRef idx="3">
+            <a:schemeClr val="accent1"/>
+          </a:fillRef>
+          <a:effectRef idx="2">
+            <a:schemeClr val="accent1"/>
+          </a:effectRef>
+          <a:fontRef idx="minor">
+            <a:schemeClr val="lt1"/>
+          </a:fontRef>
+        </p:style>
+        <p:txBody>
+          <a:bodyPr rtlCol="0" anchor="ctr"/>
+          <a:lstStyle/>
+          <a:p>
+            <a:pPr algn="ctr"/>
+          </a:p>
+        </p:txBody>
+      </p:sp>
+      <p:sp>
+        <p:nvSpPr>
           <p:cNvPr id="2" name="Title 1"/>
           <p:cNvSpPr>
             <a:spLocks noGrp="1"/>
@@ -2005,6 +2604,14 @@
             </a:lvl1pPr>
           </a:lstStyle>
           <a:p>
+            <a:pPr>
+              <a:defRPr sz="3100" b="1">
+                <a:solidFill>
+                  <a:srgbClr val="0C2440"/>
+                </a:solidFill>
+                <a:latin typeface="Aptos Display"/>
+              </a:defRPr>
+            </a:pPr>
             <a:r>
               <a:rPr lang="en-US"/>
               <a:t>Click to edit Master title style</a:t>
@@ -2069,7 +2676,14 @@
             </a:lvl9pPr>
           </a:lstStyle>
           <a:p>
-            <a:pPr lvl="0"/>
+            <a:pPr lvl="0">
+              <a:defRPr sz="1900" b="0">
+                <a:solidFill>
+                  <a:srgbClr val="243A50"/>
+                </a:solidFill>
+                <a:latin typeface="Aptos"/>
+              </a:defRPr>
+            </a:pPr>
             <a:r>
               <a:rPr lang="en-US"/>
               <a:t>Click to edit Master text styles</a:t>
@@ -2125,7 +2739,14 @@
             </a:lvl9pPr>
           </a:lstStyle>
           <a:p>
-            <a:pPr lvl="0"/>
+            <a:pPr lvl="0">
+              <a:defRPr sz="1900" b="0">
+                <a:solidFill>
+                  <a:srgbClr val="243A50"/>
+                </a:solidFill>
+                <a:latin typeface="Aptos"/>
+              </a:defRPr>
+            </a:pPr>
             <a:r>
               <a:rPr lang="en-US"/>
               <a:t>Click to edit Master text styles</a:t>
@@ -2218,7 +2839,14 @@
             </a:lvl9pPr>
           </a:lstStyle>
           <a:p>
-            <a:pPr lvl="0"/>
+            <a:pPr lvl="0">
+              <a:defRPr sz="1900" b="0">
+                <a:solidFill>
+                  <a:srgbClr val="243A50"/>
+                </a:solidFill>
+                <a:latin typeface="Aptos"/>
+              </a:defRPr>
+            </a:pPr>
             <a:r>
               <a:rPr lang="en-US"/>
               <a:t>Click to edit Master text styles</a:t>
@@ -2274,7 +2902,14 @@
             </a:lvl9pPr>
           </a:lstStyle>
           <a:p>
-            <a:pPr lvl="0"/>
+            <a:pPr lvl="0">
+              <a:defRPr sz="1900" b="0">
+                <a:solidFill>
+                  <a:srgbClr val="243A50"/>
+                </a:solidFill>
+                <a:latin typeface="Aptos"/>
+              </a:defRPr>
+            </a:pPr>
             <a:r>
               <a:rPr lang="en-US"/>
               <a:t>Click to edit Master text styles</a:t>
@@ -2325,6 +2960,14 @@
           <a:bodyPr/>
           <a:lstStyle/>
           <a:p>
+            <a:pPr>
+              <a:defRPr sz="900" b="0">
+                <a:solidFill>
+                  <a:srgbClr val="637D94"/>
+                </a:solidFill>
+                <a:latin typeface="Aptos"/>
+              </a:defRPr>
+            </a:pPr>
             <a:fld id="{241EB5C9-1307-BA42-ABA2-0BC069CD8E7F}" type="datetimeFigureOut">
               <a:rPr lang="en-US" smtClean="0"/>
               <a:t>1/2/22</a:t>
@@ -2348,6 +2991,14 @@
           <a:bodyPr/>
           <a:lstStyle/>
           <a:p>
+            <a:pPr>
+              <a:defRPr sz="900" b="0">
+                <a:solidFill>
+                  <a:srgbClr val="637D94"/>
+                </a:solidFill>
+                <a:latin typeface="Aptos"/>
+              </a:defRPr>
+            </a:pPr>
             <a:endParaRPr lang="en-US"/>
           </a:p>
         </p:txBody>
@@ -2367,6 +3018,14 @@
           <a:bodyPr/>
           <a:lstStyle/>
           <a:p>
+            <a:pPr>
+              <a:defRPr sz="900" b="0">
+                <a:solidFill>
+                  <a:srgbClr val="637D94"/>
+                </a:solidFill>
+                <a:latin typeface="Aptos"/>
+              </a:defRPr>
+            </a:pPr>
             <a:fld id="{C5EF2332-01BF-834F-8236-50238282D533}" type="slidenum">
               <a:rPr lang="en-US" smtClean="0"/>
               <a:t>‹#›</a:t>
@@ -2391,6 +3050,14 @@
 <file path=ppt/slideLayouts/slideLayout6.xml><?xml version="1.0" encoding="utf-8"?>
 <p:sldLayout xmlns:a="http://schemas.openxmlformats.org/drawingml/2006/main" xmlns:r="http://schemas.openxmlformats.org/officeDocument/2006/relationships" xmlns:p="http://schemas.openxmlformats.org/presentationml/2006/main" type="titleOnly" preserve="1">
   <p:cSld name="Title Only">
+    <p:bg>
+      <p:bgPr>
+        <a:solidFill>
+          <a:srgbClr val="FFFFFF"/>
+        </a:solidFill>
+        <a:effectLst/>
+      </p:bgPr>
+    </p:bg>
     <p:spTree>
       <p:nvGrpSpPr>
         <p:cNvPr id="1" name=""/>
@@ -2407,6 +3074,49 @@
       </p:grpSpPr>
       <p:sp>
         <p:nvSpPr>
+          <p:cNvPr id="104" name="Rectangle 1"/>
+          <p:cNvSpPr/>
+          <p:nvPr/>
+        </p:nvSpPr>
+        <p:spPr>
+          <a:xfrm>
+            <a:off x="457200" y="1024128"/>
+            <a:ext cx="8229600" cy="50292"/>
+          </a:xfrm>
+          <a:prstGeom prst="rect">
+            <a:avLst/>
+          </a:prstGeom>
+          <a:solidFill>
+            <a:srgbClr val="49A9DF"/>
+          </a:solidFill>
+          <a:ln>
+            <a:noFill/>
+          </a:ln>
+        </p:spPr>
+        <p:style>
+          <a:lnRef idx="1">
+            <a:schemeClr val="accent1"/>
+          </a:lnRef>
+          <a:fillRef idx="3">
+            <a:schemeClr val="accent1"/>
+          </a:fillRef>
+          <a:effectRef idx="2">
+            <a:schemeClr val="accent1"/>
+          </a:effectRef>
+          <a:fontRef idx="minor">
+            <a:schemeClr val="lt1"/>
+          </a:fontRef>
+        </p:style>
+        <p:txBody>
+          <a:bodyPr rtlCol="0" anchor="ctr"/>
+          <a:lstStyle/>
+          <a:p>
+            <a:pPr algn="ctr"/>
+          </a:p>
+        </p:txBody>
+      </p:sp>
+      <p:sp>
+        <p:nvSpPr>
           <p:cNvPr id="2" name="Title 1"/>
           <p:cNvSpPr>
             <a:spLocks noGrp="1"/>
@@ -2420,6 +3130,14 @@
           <a:bodyPr/>
           <a:lstStyle/>
           <a:p>
+            <a:pPr>
+              <a:defRPr sz="3100" b="1">
+                <a:solidFill>
+                  <a:srgbClr val="0C2440"/>
+                </a:solidFill>
+                <a:latin typeface="Aptos Display"/>
+              </a:defRPr>
+            </a:pPr>
             <a:r>
               <a:rPr lang="en-US"/>
               <a:t>Click to edit Master title style</a:t>
@@ -2442,6 +3160,14 @@
           <a:bodyPr/>
           <a:lstStyle/>
           <a:p>
+            <a:pPr>
+              <a:defRPr sz="900" b="0">
+                <a:solidFill>
+                  <a:srgbClr val="637D94"/>
+                </a:solidFill>
+                <a:latin typeface="Aptos"/>
+              </a:defRPr>
+            </a:pPr>
             <a:fld id="{241EB5C9-1307-BA42-ABA2-0BC069CD8E7F}" type="datetimeFigureOut">
               <a:rPr lang="en-US" smtClean="0"/>
               <a:t>1/2/22</a:t>
@@ -2465,6 +3191,14 @@
           <a:bodyPr/>
           <a:lstStyle/>
           <a:p>
+            <a:pPr>
+              <a:defRPr sz="900" b="0">
+                <a:solidFill>
+                  <a:srgbClr val="637D94"/>
+                </a:solidFill>
+                <a:latin typeface="Aptos"/>
+              </a:defRPr>
+            </a:pPr>
             <a:endParaRPr lang="en-US"/>
           </a:p>
         </p:txBody>
@@ -2484,6 +3218,14 @@
           <a:bodyPr/>
           <a:lstStyle/>
           <a:p>
+            <a:pPr>
+              <a:defRPr sz="900" b="0">
+                <a:solidFill>
+                  <a:srgbClr val="637D94"/>
+                </a:solidFill>
+                <a:latin typeface="Aptos"/>
+              </a:defRPr>
+            </a:pPr>
             <a:fld id="{C5EF2332-01BF-834F-8236-50238282D533}" type="slidenum">
               <a:rPr lang="en-US" smtClean="0"/>
               <a:t>‹#›</a:t>
@@ -2508,6 +3250,14 @@
 <file path=ppt/slideLayouts/slideLayout7.xml><?xml version="1.0" encoding="utf-8"?>
 <p:sldLayout xmlns:a="http://schemas.openxmlformats.org/drawingml/2006/main" xmlns:r="http://schemas.openxmlformats.org/officeDocument/2006/relationships" xmlns:p="http://schemas.openxmlformats.org/presentationml/2006/main" type="blank" preserve="1">
   <p:cSld name="Blank">
+    <p:bg>
+      <p:bgPr>
+        <a:solidFill>
+          <a:srgbClr val="FFFFFF"/>
+        </a:solidFill>
+        <a:effectLst/>
+      </p:bgPr>
+    </p:bg>
     <p:spTree>
       <p:nvGrpSpPr>
         <p:cNvPr id="1" name=""/>
@@ -2524,6 +3274,49 @@
       </p:grpSpPr>
       <p:sp>
         <p:nvSpPr>
+          <p:cNvPr id="103" name="Rectangle 1"/>
+          <p:cNvSpPr/>
+          <p:nvPr/>
+        </p:nvSpPr>
+        <p:spPr>
+          <a:xfrm>
+            <a:off x="457200" y="1024128"/>
+            <a:ext cx="8229600" cy="50292"/>
+          </a:xfrm>
+          <a:prstGeom prst="rect">
+            <a:avLst/>
+          </a:prstGeom>
+          <a:solidFill>
+            <a:srgbClr val="49A9DF"/>
+          </a:solidFill>
+          <a:ln>
+            <a:noFill/>
+          </a:ln>
+        </p:spPr>
+        <p:style>
+          <a:lnRef idx="1">
+            <a:schemeClr val="accent1"/>
+          </a:lnRef>
+          <a:fillRef idx="3">
+            <a:schemeClr val="accent1"/>
+          </a:fillRef>
+          <a:effectRef idx="2">
+            <a:schemeClr val="accent1"/>
+          </a:effectRef>
+          <a:fontRef idx="minor">
+            <a:schemeClr val="lt1"/>
+          </a:fontRef>
+        </p:style>
+        <p:txBody>
+          <a:bodyPr rtlCol="0" anchor="ctr"/>
+          <a:lstStyle/>
+          <a:p>
+            <a:pPr algn="ctr"/>
+          </a:p>
+        </p:txBody>
+      </p:sp>
+      <p:sp>
+        <p:nvSpPr>
           <p:cNvPr id="2" name="Date Placeholder 1"/>
           <p:cNvSpPr>
             <a:spLocks noGrp="1"/>
@@ -2537,6 +3330,14 @@
           <a:bodyPr/>
           <a:lstStyle/>
           <a:p>
+            <a:pPr>
+              <a:defRPr sz="900" b="0">
+                <a:solidFill>
+                  <a:srgbClr val="637D94"/>
+                </a:solidFill>
+                <a:latin typeface="Aptos"/>
+              </a:defRPr>
+            </a:pPr>
             <a:fld id="{241EB5C9-1307-BA42-ABA2-0BC069CD8E7F}" type="datetimeFigureOut">
               <a:rPr lang="en-US" smtClean="0"/>
               <a:t>1/2/22</a:t>
@@ -2560,6 +3361,14 @@
           <a:bodyPr/>
           <a:lstStyle/>
           <a:p>
+            <a:pPr>
+              <a:defRPr sz="900" b="0">
+                <a:solidFill>
+                  <a:srgbClr val="637D94"/>
+                </a:solidFill>
+                <a:latin typeface="Aptos"/>
+              </a:defRPr>
+            </a:pPr>
             <a:endParaRPr lang="en-US"/>
           </a:p>
         </p:txBody>
@@ -2579,6 +3388,14 @@
           <a:bodyPr/>
           <a:lstStyle/>
           <a:p>
+            <a:pPr>
+              <a:defRPr sz="900" b="0">
+                <a:solidFill>
+                  <a:srgbClr val="637D94"/>
+                </a:solidFill>
+                <a:latin typeface="Aptos"/>
+              </a:defRPr>
+            </a:pPr>
             <a:fld id="{C5EF2332-01BF-834F-8236-50238282D533}" type="slidenum">
               <a:rPr lang="en-US" smtClean="0"/>
               <a:t>‹#›</a:t>
@@ -2603,6 +3420,14 @@
 <file path=ppt/slideLayouts/slideLayout8.xml><?xml version="1.0" encoding="utf-8"?>
 <p:sldLayout xmlns:a="http://schemas.openxmlformats.org/drawingml/2006/main" xmlns:r="http://schemas.openxmlformats.org/officeDocument/2006/relationships" xmlns:p="http://schemas.openxmlformats.org/presentationml/2006/main" type="objTx" preserve="1">
   <p:cSld name="Content with Caption">
+    <p:bg>
+      <p:bgPr>
+        <a:solidFill>
+          <a:srgbClr val="FFFFFF"/>
+        </a:solidFill>
+        <a:effectLst/>
+      </p:bgPr>
+    </p:bg>
     <p:spTree>
       <p:nvGrpSpPr>
         <p:cNvPr id="1" name=""/>
@@ -2619,6 +3444,49 @@
       </p:grpSpPr>
       <p:sp>
         <p:nvSpPr>
+          <p:cNvPr id="106" name="Rectangle 1"/>
+          <p:cNvSpPr/>
+          <p:nvPr/>
+        </p:nvSpPr>
+        <p:spPr>
+          <a:xfrm>
+            <a:off x="457200" y="1024128"/>
+            <a:ext cx="8229600" cy="50292"/>
+          </a:xfrm>
+          <a:prstGeom prst="rect">
+            <a:avLst/>
+          </a:prstGeom>
+          <a:solidFill>
+            <a:srgbClr val="49A9DF"/>
+          </a:solidFill>
+          <a:ln>
+            <a:noFill/>
+          </a:ln>
+        </p:spPr>
+        <p:style>
+          <a:lnRef idx="1">
+            <a:schemeClr val="accent1"/>
+          </a:lnRef>
+          <a:fillRef idx="3">
+            <a:schemeClr val="accent1"/>
+          </a:fillRef>
+          <a:effectRef idx="2">
+            <a:schemeClr val="accent1"/>
+          </a:effectRef>
+          <a:fontRef idx="minor">
+            <a:schemeClr val="lt1"/>
+          </a:fontRef>
+        </p:style>
+        <p:txBody>
+          <a:bodyPr rtlCol="0" anchor="ctr"/>
+          <a:lstStyle/>
+          <a:p>
+            <a:pPr algn="ctr"/>
+          </a:p>
+        </p:txBody>
+      </p:sp>
+      <p:sp>
+        <p:nvSpPr>
           <p:cNvPr id="2" name="Title 1"/>
           <p:cNvSpPr>
             <a:spLocks noGrp="1"/>
@@ -2641,6 +3509,14 @@
             </a:lvl1pPr>
           </a:lstStyle>
           <a:p>
+            <a:pPr>
+              <a:defRPr sz="3100" b="1">
+                <a:solidFill>
+                  <a:srgbClr val="0C2440"/>
+                </a:solidFill>
+                <a:latin typeface="Aptos Display"/>
+              </a:defRPr>
+            </a:pPr>
             <a:r>
               <a:rPr lang="en-US"/>
               <a:t>Click to edit Master title style</a:t>
@@ -2696,7 +3572,14 @@
             </a:lvl9pPr>
           </a:lstStyle>
           <a:p>
-            <a:pPr lvl="0"/>
+            <a:pPr lvl="0">
+              <a:defRPr sz="1900" b="0">
+                <a:solidFill>
+                  <a:srgbClr val="243A50"/>
+                </a:solidFill>
+                <a:latin typeface="Aptos"/>
+              </a:defRPr>
+            </a:pPr>
             <a:r>
               <a:rPr lang="en-US"/>
               <a:t>Click to edit Master text styles</a:t>
@@ -2789,7 +3672,14 @@
             </a:lvl9pPr>
           </a:lstStyle>
           <a:p>
-            <a:pPr lvl="0"/>
+            <a:pPr lvl="0">
+              <a:defRPr sz="1900" b="0">
+                <a:solidFill>
+                  <a:srgbClr val="243A50"/>
+                </a:solidFill>
+                <a:latin typeface="Aptos"/>
+              </a:defRPr>
+            </a:pPr>
             <a:r>
               <a:rPr lang="en-US"/>
               <a:t>Click to edit Master text styles</a:t>
@@ -2812,6 +3702,14 @@
           <a:bodyPr/>
           <a:lstStyle/>
           <a:p>
+            <a:pPr>
+              <a:defRPr sz="900" b="0">
+                <a:solidFill>
+                  <a:srgbClr val="637D94"/>
+                </a:solidFill>
+                <a:latin typeface="Aptos"/>
+              </a:defRPr>
+            </a:pPr>
             <a:fld id="{241EB5C9-1307-BA42-ABA2-0BC069CD8E7F}" type="datetimeFigureOut">
               <a:rPr lang="en-US" smtClean="0"/>
               <a:t>1/2/22</a:t>
@@ -2835,6 +3733,14 @@
           <a:bodyPr/>
           <a:lstStyle/>
           <a:p>
+            <a:pPr>
+              <a:defRPr sz="900" b="0">
+                <a:solidFill>
+                  <a:srgbClr val="637D94"/>
+                </a:solidFill>
+                <a:latin typeface="Aptos"/>
+              </a:defRPr>
+            </a:pPr>
             <a:endParaRPr lang="en-US"/>
           </a:p>
         </p:txBody>
@@ -2854,6 +3760,14 @@
           <a:bodyPr/>
           <a:lstStyle/>
           <a:p>
+            <a:pPr>
+              <a:defRPr sz="900" b="0">
+                <a:solidFill>
+                  <a:srgbClr val="637D94"/>
+                </a:solidFill>
+                <a:latin typeface="Aptos"/>
+              </a:defRPr>
+            </a:pPr>
             <a:fld id="{C5EF2332-01BF-834F-8236-50238282D533}" type="slidenum">
               <a:rPr lang="en-US" smtClean="0"/>
               <a:t>‹#›</a:t>
@@ -2878,6 +3792,14 @@
 <file path=ppt/slideLayouts/slideLayout9.xml><?xml version="1.0" encoding="utf-8"?>
 <p:sldLayout xmlns:a="http://schemas.openxmlformats.org/drawingml/2006/main" xmlns:r="http://schemas.openxmlformats.org/officeDocument/2006/relationships" xmlns:p="http://schemas.openxmlformats.org/presentationml/2006/main" type="picTx" preserve="1">
   <p:cSld name="Picture with Caption">
+    <p:bg>
+      <p:bgPr>
+        <a:solidFill>
+          <a:srgbClr val="FFFFFF"/>
+        </a:solidFill>
+        <a:effectLst/>
+      </p:bgPr>
+    </p:bg>
     <p:spTree>
       <p:nvGrpSpPr>
         <p:cNvPr id="1" name=""/>
@@ -2894,6 +3816,49 @@
       </p:grpSpPr>
       <p:sp>
         <p:nvSpPr>
+          <p:cNvPr id="106" name="Rectangle 1"/>
+          <p:cNvSpPr/>
+          <p:nvPr/>
+        </p:nvSpPr>
+        <p:spPr>
+          <a:xfrm>
+            <a:off x="457200" y="1024128"/>
+            <a:ext cx="8229600" cy="50292"/>
+          </a:xfrm>
+          <a:prstGeom prst="rect">
+            <a:avLst/>
+          </a:prstGeom>
+          <a:solidFill>
+            <a:srgbClr val="49A9DF"/>
+          </a:solidFill>
+          <a:ln>
+            <a:noFill/>
+          </a:ln>
+        </p:spPr>
+        <p:style>
+          <a:lnRef idx="1">
+            <a:schemeClr val="accent1"/>
+          </a:lnRef>
+          <a:fillRef idx="3">
+            <a:schemeClr val="accent1"/>
+          </a:fillRef>
+          <a:effectRef idx="2">
+            <a:schemeClr val="accent1"/>
+          </a:effectRef>
+          <a:fontRef idx="minor">
+            <a:schemeClr val="lt1"/>
+          </a:fontRef>
+        </p:style>
+        <p:txBody>
+          <a:bodyPr rtlCol="0" anchor="ctr"/>
+          <a:lstStyle/>
+          <a:p>
+            <a:pPr algn="ctr"/>
+          </a:p>
+        </p:txBody>
+      </p:sp>
+      <p:sp>
+        <p:nvSpPr>
           <p:cNvPr id="2" name="Title 1"/>
           <p:cNvSpPr>
             <a:spLocks noGrp="1"/>
@@ -2916,6 +3881,14 @@
             </a:lvl1pPr>
           </a:lstStyle>
           <a:p>
+            <a:pPr>
+              <a:defRPr sz="3100" b="1">
+                <a:solidFill>
+                  <a:srgbClr val="0C2440"/>
+                </a:solidFill>
+                <a:latin typeface="Aptos Display"/>
+              </a:defRPr>
+            </a:pPr>
             <a:r>
               <a:rPr lang="en-US"/>
               <a:t>Click to edit Master title style</a:t>
@@ -2980,6 +3953,14 @@
             </a:lvl9pPr>
           </a:lstStyle>
           <a:p>
+            <a:pPr>
+              <a:defRPr sz="1900" b="0">
+                <a:solidFill>
+                  <a:srgbClr val="243A50"/>
+                </a:solidFill>
+                <a:latin typeface="Aptos"/>
+              </a:defRPr>
+            </a:pPr>
             <a:endParaRPr lang="en-US"/>
           </a:p>
         </p:txBody>
@@ -3041,7 +4022,14 @@
             </a:lvl9pPr>
           </a:lstStyle>
           <a:p>
-            <a:pPr lvl="0"/>
+            <a:pPr lvl="0">
+              <a:defRPr sz="1900" b="0">
+                <a:solidFill>
+                  <a:srgbClr val="243A50"/>
+                </a:solidFill>
+                <a:latin typeface="Aptos"/>
+              </a:defRPr>
+            </a:pPr>
             <a:r>
               <a:rPr lang="en-US"/>
               <a:t>Click to edit Master text styles</a:t>
@@ -3064,6 +4052,14 @@
           <a:bodyPr/>
           <a:lstStyle/>
           <a:p>
+            <a:pPr>
+              <a:defRPr sz="900" b="0">
+                <a:solidFill>
+                  <a:srgbClr val="637D94"/>
+                </a:solidFill>
+                <a:latin typeface="Aptos"/>
+              </a:defRPr>
+            </a:pPr>
             <a:fld id="{241EB5C9-1307-BA42-ABA2-0BC069CD8E7F}" type="datetimeFigureOut">
               <a:rPr lang="en-US" smtClean="0"/>
               <a:t>1/2/22</a:t>
@@ -3087,6 +4083,14 @@
           <a:bodyPr/>
           <a:lstStyle/>
           <a:p>
+            <a:pPr>
+              <a:defRPr sz="900" b="0">
+                <a:solidFill>
+                  <a:srgbClr val="637D94"/>
+                </a:solidFill>
+                <a:latin typeface="Aptos"/>
+              </a:defRPr>
+            </a:pPr>
             <a:endParaRPr lang="en-US"/>
           </a:p>
         </p:txBody>
@@ -3106,6 +4110,14 @@
           <a:bodyPr/>
           <a:lstStyle/>
           <a:p>
+            <a:pPr>
+              <a:defRPr sz="900" b="0">
+                <a:solidFill>
+                  <a:srgbClr val="637D94"/>
+                </a:solidFill>
+                <a:latin typeface="Aptos"/>
+              </a:defRPr>
+            </a:pPr>
             <a:fld id="{C5EF2332-01BF-834F-8236-50238282D533}" type="slidenum">
               <a:rPr lang="en-US" smtClean="0"/>
               <a:t>‹#›</a:t>
@@ -3964,42 +4976,42 @@
 <file path=ppt/theme/theme1.xml><?xml version="1.0" encoding="utf-8"?>
 <ns0:theme xmlns:ns0="http://schemas.openxmlformats.org/drawingml/2006/main" name="Office Theme">
   <ns0:themeElements>
-    <ns0:clrScheme name="SlateIndigoSky">
+    <ns0:clrScheme name="AzulRelatorio2026">
       <ns0:dk1>
-        <ns0:sysClr val="windowText" lastClr="1E293B"/>
+        <ns0:sysClr val="windowText" lastClr="0C2440"/>
       </ns0:dk1>
       <ns0:lt1>
-        <ns0:sysClr val="window" lastClr="F8FAFC"/>
+        <ns0:sysClr val="window" lastClr="FFFFFF"/>
       </ns0:lt1>
       <ns0:dk2>
-        <ns0:srgbClr val="334155"/>
+        <ns0:srgbClr val="243A50"/>
       </ns0:dk2>
       <ns0:lt2>
-        <ns0:srgbClr val="E2E8F0"/>
+        <ns0:srgbClr val="EAF4FB"/>
       </ns0:lt2>
       <ns0:accent1>
-        <ns0:srgbClr val="4F46E5"/>
+        <ns0:srgbClr val="176FC1"/>
       </ns0:accent1>
       <ns0:accent2>
-        <ns0:srgbClr val="0EA5E9"/>
+        <ns0:srgbClr val="49A9DF"/>
       </ns0:accent2>
       <ns0:accent3>
-        <ns0:srgbClr val="6366F1"/>
+        <ns0:srgbClr val="119DA4"/>
       </ns0:accent3>
       <ns0:accent4>
-        <ns0:srgbClr val="0284C7"/>
+        <ns0:srgbClr val="8CA9C0"/>
       </ns0:accent4>
       <ns0:accent5>
-        <ns0:srgbClr val="64748B"/>
+        <ns0:srgbClr val="637D94"/>
       </ns0:accent5>
       <ns0:accent6>
-        <ns0:srgbClr val="38BDF8"/>
+        <ns0:srgbClr val="CBE8F9"/>
       </ns0:accent6>
       <ns0:hlink>
-        <ns0:srgbClr val="4F46E5"/>
+        <ns0:srgbClr val="176FC1"/>
       </ns0:hlink>
       <ns0:folHlink>
-        <ns0:srgbClr val="0284C7"/>
+        <ns0:srgbClr val="135D9B"/>
       </ns0:folHlink>
     </ns0:clrScheme>
     <ns0:fontScheme name="Office">
@@ -4284,42 +5296,42 @@
 <file path=ppt/theme/theme2.xml><?xml version="1.0" encoding="utf-8"?>
 <ns0:theme xmlns:ns0="http://schemas.openxmlformats.org/drawingml/2006/main" xmlns:ns1="http://schemas.microsoft.com/office/thememl/2012/main" name="Office Theme">
   <ns0:themeElements>
-    <ns0:clrScheme name="SlateIndigoSky">
+    <ns0:clrScheme name="AzulRelatorio2026">
       <ns0:dk1>
-        <ns0:sysClr val="windowText" lastClr="1E293B"/>
+        <ns0:sysClr val="windowText" lastClr="0C2440"/>
       </ns0:dk1>
       <ns0:lt1>
-        <ns0:sysClr val="window" lastClr="F8FAFC"/>
+        <ns0:sysClr val="window" lastClr="FFFFFF"/>
       </ns0:lt1>
       <ns0:dk2>
-        <ns0:srgbClr val="334155"/>
+        <ns0:srgbClr val="243A50"/>
       </ns0:dk2>
       <ns0:lt2>
-        <ns0:srgbClr val="E2E8F0"/>
+        <ns0:srgbClr val="EAF4FB"/>
       </ns0:lt2>
       <ns0:accent1>
-        <ns0:srgbClr val="4F46E5"/>
+        <ns0:srgbClr val="176FC1"/>
       </ns0:accent1>
       <ns0:accent2>
-        <ns0:srgbClr val="0EA5E9"/>
+        <ns0:srgbClr val="49A9DF"/>
       </ns0:accent2>
       <ns0:accent3>
-        <ns0:srgbClr val="6366F1"/>
+        <ns0:srgbClr val="119DA4"/>
       </ns0:accent3>
       <ns0:accent4>
-        <ns0:srgbClr val="0284C7"/>
+        <ns0:srgbClr val="8CA9C0"/>
       </ns0:accent4>
       <ns0:accent5>
-        <ns0:srgbClr val="64748B"/>
+        <ns0:srgbClr val="637D94"/>
       </ns0:accent5>
       <ns0:accent6>
-        <ns0:srgbClr val="38BDF8"/>
+        <ns0:srgbClr val="CBE8F9"/>
       </ns0:accent6>
       <ns0:hlink>
-        <ns0:srgbClr val="4F46E5"/>
+        <ns0:srgbClr val="176FC1"/>
       </ns0:hlink>
       <ns0:folHlink>
-        <ns0:srgbClr val="0284C7"/>
+        <ns0:srgbClr val="135D9B"/>
       </ns0:folHlink>
     </ns0:clrScheme>
     <ns0:fontScheme name="Office">

--- a/03-relatorio-qmd/template-referencia.pptx
+++ b/03-relatorio-qmd/template-referencia.pptx
@@ -765,16 +765,89 @@
         </p:nvSpPr>
         <p:spPr>
           <a:xfrm>
-            <a:off x="685800" y="1597819"/>
-            <a:ext cx="7772400" cy="1102519"/>
+            <a:off x="685800" y="1051560"/>
+            <a:ext cx="7772400" cy="1645920"/>
           </a:xfrm>
         </p:spPr>
         <p:txBody>
           <a:bodyPr/>
-          <a:lstStyle/>
+          <a:lstStyle>
+            <a:lvl1pPr>
+              <a:defRPr sz="3600" b="1">
+                <a:solidFill>
+                  <a:srgbClr val="FFFFFF"/>
+                </a:solidFill>
+                <a:latin typeface="Aptos Display"/>
+              </a:defRPr>
+            </a:lvl1pPr>
+            <a:lvl2pPr>
+              <a:defRPr sz="3600" b="1">
+                <a:solidFill>
+                  <a:srgbClr val="FFFFFF"/>
+                </a:solidFill>
+                <a:latin typeface="Aptos Display"/>
+              </a:defRPr>
+            </a:lvl2pPr>
+            <a:lvl3pPr>
+              <a:defRPr sz="3600" b="1">
+                <a:solidFill>
+                  <a:srgbClr val="FFFFFF"/>
+                </a:solidFill>
+                <a:latin typeface="Aptos Display"/>
+              </a:defRPr>
+            </a:lvl3pPr>
+            <a:lvl4pPr>
+              <a:defRPr sz="3600" b="1">
+                <a:solidFill>
+                  <a:srgbClr val="FFFFFF"/>
+                </a:solidFill>
+                <a:latin typeface="Aptos Display"/>
+              </a:defRPr>
+            </a:lvl4pPr>
+            <a:lvl5pPr>
+              <a:defRPr sz="3600" b="1">
+                <a:solidFill>
+                  <a:srgbClr val="FFFFFF"/>
+                </a:solidFill>
+                <a:latin typeface="Aptos Display"/>
+              </a:defRPr>
+            </a:lvl5pPr>
+            <a:lvl6pPr>
+              <a:defRPr sz="3600" b="1">
+                <a:solidFill>
+                  <a:srgbClr val="FFFFFF"/>
+                </a:solidFill>
+                <a:latin typeface="Aptos Display"/>
+              </a:defRPr>
+            </a:lvl6pPr>
+            <a:lvl7pPr>
+              <a:defRPr sz="3600" b="1">
+                <a:solidFill>
+                  <a:srgbClr val="FFFFFF"/>
+                </a:solidFill>
+                <a:latin typeface="Aptos Display"/>
+              </a:defRPr>
+            </a:lvl7pPr>
+            <a:lvl8pPr>
+              <a:defRPr sz="3600" b="1">
+                <a:solidFill>
+                  <a:srgbClr val="FFFFFF"/>
+                </a:solidFill>
+                <a:latin typeface="Aptos Display"/>
+              </a:defRPr>
+            </a:lvl8pPr>
+            <a:lvl9pPr>
+              <a:defRPr sz="3600" b="1">
+                <a:solidFill>
+                  <a:srgbClr val="FFFFFF"/>
+                </a:solidFill>
+                <a:latin typeface="Aptos Display"/>
+              </a:defRPr>
+            </a:lvl9pPr>
+          </a:lstStyle>
           <a:p>
             <a:pPr>
-              <a:defRPr sz="4700" b="1">
+              <a:defRPr sz="3600" b="1">
                 <a:solidFill>
                   <a:srgbClr val="FFFFFF"/>
                 </a:solidFill>
@@ -800,8 +873,8 @@
         </p:nvSpPr>
         <p:spPr>
           <a:xfrm>
-            <a:off x="1371600" y="2914650"/>
-            <a:ext cx="6400800" cy="1314450"/>
+            <a:off x="1371600" y="2971800"/>
+            <a:ext cx="6400800" cy="1645920"/>
           </a:xfrm>
         </p:spPr>
         <p:txBody>
@@ -809,102 +882,93 @@
           <a:lstStyle>
             <a:lvl1pPr marL="0" indent="0" algn="ctr">
               <a:buNone/>
-              <a:defRPr>
-                <a:solidFill>
-                  <a:schemeClr val="tx1">
-                    <a:tint val="75000"/>
-                  </a:schemeClr>
-                </a:solidFill>
+              <a:defRPr sz="2000" b="0">
+                <a:solidFill>
+                  <a:srgbClr val="CBE8F9"/>
+                </a:solidFill>
+                <a:latin typeface="Aptos"/>
               </a:defRPr>
             </a:lvl1pPr>
             <a:lvl2pPr marL="342900" indent="0" algn="ctr">
               <a:buNone/>
-              <a:defRPr>
-                <a:solidFill>
-                  <a:schemeClr val="tx1">
-                    <a:tint val="75000"/>
-                  </a:schemeClr>
-                </a:solidFill>
+              <a:defRPr sz="2000" b="0">
+                <a:solidFill>
+                  <a:srgbClr val="CBE8F9"/>
+                </a:solidFill>
+                <a:latin typeface="Aptos"/>
               </a:defRPr>
             </a:lvl2pPr>
             <a:lvl3pPr marL="685800" indent="0" algn="ctr">
               <a:buNone/>
-              <a:defRPr>
-                <a:solidFill>
-                  <a:schemeClr val="tx1">
-                    <a:tint val="75000"/>
-                  </a:schemeClr>
-                </a:solidFill>
+              <a:defRPr sz="2000" b="0">
+                <a:solidFill>
+                  <a:srgbClr val="CBE8F9"/>
+                </a:solidFill>
+                <a:latin typeface="Aptos"/>
               </a:defRPr>
             </a:lvl3pPr>
             <a:lvl4pPr marL="1028700" indent="0" algn="ctr">
               <a:buNone/>
-              <a:defRPr>
-                <a:solidFill>
-                  <a:schemeClr val="tx1">
-                    <a:tint val="75000"/>
-                  </a:schemeClr>
-                </a:solidFill>
+              <a:defRPr sz="2000" b="0">
+                <a:solidFill>
+                  <a:srgbClr val="CBE8F9"/>
+                </a:solidFill>
+                <a:latin typeface="Aptos"/>
               </a:defRPr>
             </a:lvl4pPr>
             <a:lvl5pPr marL="1371600" indent="0" algn="ctr">
               <a:buNone/>
-              <a:defRPr>
-                <a:solidFill>
-                  <a:schemeClr val="tx1">
-                    <a:tint val="75000"/>
-                  </a:schemeClr>
-                </a:solidFill>
+              <a:defRPr sz="2000" b="0">
+                <a:solidFill>
+                  <a:srgbClr val="CBE8F9"/>
+                </a:solidFill>
+                <a:latin typeface="Aptos"/>
               </a:defRPr>
             </a:lvl5pPr>
             <a:lvl6pPr marL="1714500" indent="0" algn="ctr">
               <a:buNone/>
-              <a:defRPr>
-                <a:solidFill>
-                  <a:schemeClr val="tx1">
-                    <a:tint val="75000"/>
-                  </a:schemeClr>
-                </a:solidFill>
+              <a:defRPr sz="2000" b="0">
+                <a:solidFill>
+                  <a:srgbClr val="CBE8F9"/>
+                </a:solidFill>
+                <a:latin typeface="Aptos"/>
               </a:defRPr>
             </a:lvl6pPr>
             <a:lvl7pPr marL="2057400" indent="0" algn="ctr">
               <a:buNone/>
-              <a:defRPr>
-                <a:solidFill>
-                  <a:schemeClr val="tx1">
-                    <a:tint val="75000"/>
-                  </a:schemeClr>
-                </a:solidFill>
+              <a:defRPr sz="2000" b="0">
+                <a:solidFill>
+                  <a:srgbClr val="CBE8F9"/>
+                </a:solidFill>
+                <a:latin typeface="Aptos"/>
               </a:defRPr>
             </a:lvl7pPr>
             <a:lvl8pPr marL="2400300" indent="0" algn="ctr">
               <a:buNone/>
-              <a:defRPr>
-                <a:solidFill>
-                  <a:schemeClr val="tx1">
-                    <a:tint val="75000"/>
-                  </a:schemeClr>
-                </a:solidFill>
+              <a:defRPr sz="2000" b="0">
+                <a:solidFill>
+                  <a:srgbClr val="CBE8F9"/>
+                </a:solidFill>
+                <a:latin typeface="Aptos"/>
               </a:defRPr>
             </a:lvl8pPr>
             <a:lvl9pPr marL="2743200" indent="0" algn="ctr">
               <a:buNone/>
-              <a:defRPr>
-                <a:solidFill>
-                  <a:schemeClr val="tx1">
-                    <a:tint val="75000"/>
-                  </a:schemeClr>
-                </a:solidFill>
+              <a:defRPr sz="2000" b="0">
+                <a:solidFill>
+                  <a:srgbClr val="CBE8F9"/>
+                </a:solidFill>
+                <a:latin typeface="Aptos"/>
               </a:defRPr>
             </a:lvl9pPr>
           </a:lstStyle>
           <a:p>
             <a:pPr>
-              <a:defRPr sz="4700" b="1">
-                <a:solidFill>
-                  <a:srgbClr val="FFFFFF"/>
-                </a:solidFill>
-                <a:latin typeface="Aptos Display"/>
+              <a:defRPr sz="2000" b="0">
+                <a:solidFill>
+                  <a:srgbClr val="CBE8F9"/>
+                </a:solidFill>
+                <a:latin typeface="Aptos"/>
               </a:defRPr>
             </a:pPr>
             <a:r>
@@ -924,10 +988,88 @@
             <p:ph type="dt" sz="half" idx="10"/>
           </p:nvPr>
         </p:nvSpPr>
-        <p:spPr/>
+        <p:spPr>
+          <a:xfrm>
+            <a:off x="457200" y="0"/>
+            <a:ext cx="2133600" cy="0"/>
+          </a:xfrm>
+        </p:spPr>
         <p:txBody>
           <a:bodyPr/>
-          <a:lstStyle/>
+          <a:lstStyle>
+            <a:lvl1pPr>
+              <a:defRPr sz="900" b="0">
+                <a:solidFill>
+                  <a:srgbClr val="CBE8F9"/>
+                </a:solidFill>
+                <a:latin typeface="Aptos"/>
+              </a:defRPr>
+            </a:lvl1pPr>
+            <a:lvl2pPr>
+              <a:defRPr sz="900" b="0">
+                <a:solidFill>
+                  <a:srgbClr val="CBE8F9"/>
+                </a:solidFill>
+                <a:latin typeface="Aptos"/>
+              </a:defRPr>
+            </a:lvl2pPr>
+            <a:lvl3pPr>
+              <a:defRPr sz="900" b="0">
+                <a:solidFill>
+                  <a:srgbClr val="CBE8F9"/>
+                </a:solidFill>
+                <a:latin typeface="Aptos"/>
+              </a:defRPr>
+            </a:lvl3pPr>
+            <a:lvl4pPr>
+              <a:defRPr sz="900" b="0">
+                <a:solidFill>
+                  <a:srgbClr val="CBE8F9"/>
+                </a:solidFill>
+                <a:latin typeface="Aptos"/>
+              </a:defRPr>
+            </a:lvl4pPr>
+            <a:lvl5pPr>
+              <a:defRPr sz="900" b="0">
+                <a:solidFill>
+                  <a:srgbClr val="CBE8F9"/>
+                </a:solidFill>
+                <a:latin typeface="Aptos"/>
+              </a:defRPr>
+            </a:lvl5pPr>
+            <a:lvl6pPr>
+              <a:defRPr sz="900" b="0">
+                <a:solidFill>
+                  <a:srgbClr val="CBE8F9"/>
+                </a:solidFill>
+                <a:latin typeface="Aptos"/>
+              </a:defRPr>
+            </a:lvl6pPr>
+            <a:lvl7pPr>
+              <a:defRPr sz="900" b="0">
+                <a:solidFill>
+                  <a:srgbClr val="CBE8F9"/>
+                </a:solidFill>
+                <a:latin typeface="Aptos"/>
+              </a:defRPr>
+            </a:lvl7pPr>
+            <a:lvl8pPr>
+              <a:defRPr sz="900" b="0">
+                <a:solidFill>
+                  <a:srgbClr val="CBE8F9"/>
+                </a:solidFill>
+                <a:latin typeface="Aptos"/>
+              </a:defRPr>
+            </a:lvl8pPr>
+            <a:lvl9pPr>
+              <a:defRPr sz="900" b="0">
+                <a:solidFill>
+                  <a:srgbClr val="CBE8F9"/>
+                </a:solidFill>
+                <a:latin typeface="Aptos"/>
+              </a:defRPr>
+            </a:lvl9pPr>
+          </a:lstStyle>
           <a:p>
             <a:pPr>
               <a:defRPr sz="900" b="0">
@@ -955,10 +1097,88 @@
             <p:ph type="ftr" sz="quarter" idx="11"/>
           </p:nvPr>
         </p:nvSpPr>
-        <p:spPr/>
+        <p:spPr>
+          <a:xfrm>
+            <a:off x="3124200" y="0"/>
+            <a:ext cx="2895600" cy="0"/>
+          </a:xfrm>
+        </p:spPr>
         <p:txBody>
           <a:bodyPr/>
-          <a:lstStyle/>
+          <a:lstStyle>
+            <a:lvl1pPr>
+              <a:defRPr sz="900" b="0">
+                <a:solidFill>
+                  <a:srgbClr val="CBE8F9"/>
+                </a:solidFill>
+                <a:latin typeface="Aptos"/>
+              </a:defRPr>
+            </a:lvl1pPr>
+            <a:lvl2pPr>
+              <a:defRPr sz="900" b="0">
+                <a:solidFill>
+                  <a:srgbClr val="CBE8F9"/>
+                </a:solidFill>
+                <a:latin typeface="Aptos"/>
+              </a:defRPr>
+            </a:lvl2pPr>
+            <a:lvl3pPr>
+              <a:defRPr sz="900" b="0">
+                <a:solidFill>
+                  <a:srgbClr val="CBE8F9"/>
+                </a:solidFill>
+                <a:latin typeface="Aptos"/>
+              </a:defRPr>
+            </a:lvl3pPr>
+            <a:lvl4pPr>
+              <a:defRPr sz="900" b="0">
+                <a:solidFill>
+                  <a:srgbClr val="CBE8F9"/>
+                </a:solidFill>
+                <a:latin typeface="Aptos"/>
+              </a:defRPr>
+            </a:lvl4pPr>
+            <a:lvl5pPr>
+              <a:defRPr sz="900" b="0">
+                <a:solidFill>
+                  <a:srgbClr val="CBE8F9"/>
+                </a:solidFill>
+                <a:latin typeface="Aptos"/>
+              </a:defRPr>
+            </a:lvl5pPr>
+            <a:lvl6pPr>
+              <a:defRPr sz="900" b="0">
+                <a:solidFill>
+                  <a:srgbClr val="CBE8F9"/>
+                </a:solidFill>
+                <a:latin typeface="Aptos"/>
+              </a:defRPr>
+            </a:lvl6pPr>
+            <a:lvl7pPr>
+              <a:defRPr sz="900" b="0">
+                <a:solidFill>
+                  <a:srgbClr val="CBE8F9"/>
+                </a:solidFill>
+                <a:latin typeface="Aptos"/>
+              </a:defRPr>
+            </a:lvl7pPr>
+            <a:lvl8pPr>
+              <a:defRPr sz="900" b="0">
+                <a:solidFill>
+                  <a:srgbClr val="CBE8F9"/>
+                </a:solidFill>
+                <a:latin typeface="Aptos"/>
+              </a:defRPr>
+            </a:lvl8pPr>
+            <a:lvl9pPr>
+              <a:defRPr sz="900" b="0">
+                <a:solidFill>
+                  <a:srgbClr val="CBE8F9"/>
+                </a:solidFill>
+                <a:latin typeface="Aptos"/>
+              </a:defRPr>
+            </a:lvl9pPr>
+          </a:lstStyle>
           <a:p>
             <a:pPr>
               <a:defRPr sz="900" b="0">
@@ -982,10 +1202,88 @@
             <p:ph type="sldNum" sz="quarter" idx="12"/>
           </p:nvPr>
         </p:nvSpPr>
-        <p:spPr/>
+        <p:spPr>
+          <a:xfrm>
+            <a:off x="6553200" y="0"/>
+            <a:ext cx="2133600" cy="0"/>
+          </a:xfrm>
+        </p:spPr>
         <p:txBody>
           <a:bodyPr/>
-          <a:lstStyle/>
+          <a:lstStyle>
+            <a:lvl1pPr>
+              <a:defRPr sz="900" b="0">
+                <a:solidFill>
+                  <a:srgbClr val="CBE8F9"/>
+                </a:solidFill>
+                <a:latin typeface="Aptos"/>
+              </a:defRPr>
+            </a:lvl1pPr>
+            <a:lvl2pPr>
+              <a:defRPr sz="900" b="0">
+                <a:solidFill>
+                  <a:srgbClr val="CBE8F9"/>
+                </a:solidFill>
+                <a:latin typeface="Aptos"/>
+              </a:defRPr>
+            </a:lvl2pPr>
+            <a:lvl3pPr>
+              <a:defRPr sz="900" b="0">
+                <a:solidFill>
+                  <a:srgbClr val="CBE8F9"/>
+                </a:solidFill>
+                <a:latin typeface="Aptos"/>
+              </a:defRPr>
+            </a:lvl3pPr>
+            <a:lvl4pPr>
+              <a:defRPr sz="900" b="0">
+                <a:solidFill>
+                  <a:srgbClr val="CBE8F9"/>
+                </a:solidFill>
+                <a:latin typeface="Aptos"/>
+              </a:defRPr>
+            </a:lvl4pPr>
+            <a:lvl5pPr>
+              <a:defRPr sz="900" b="0">
+                <a:solidFill>
+                  <a:srgbClr val="CBE8F9"/>
+                </a:solidFill>
+                <a:latin typeface="Aptos"/>
+              </a:defRPr>
+            </a:lvl5pPr>
+            <a:lvl6pPr>
+              <a:defRPr sz="900" b="0">
+                <a:solidFill>
+                  <a:srgbClr val="CBE8F9"/>
+                </a:solidFill>
+                <a:latin typeface="Aptos"/>
+              </a:defRPr>
+            </a:lvl6pPr>
+            <a:lvl7pPr>
+              <a:defRPr sz="900" b="0">
+                <a:solidFill>
+                  <a:srgbClr val="CBE8F9"/>
+                </a:solidFill>
+                <a:latin typeface="Aptos"/>
+              </a:defRPr>
+            </a:lvl7pPr>
+            <a:lvl8pPr>
+              <a:defRPr sz="900" b="0">
+                <a:solidFill>
+                  <a:srgbClr val="CBE8F9"/>
+                </a:solidFill>
+                <a:latin typeface="Aptos"/>
+              </a:defRPr>
+            </a:lvl8pPr>
+            <a:lvl9pPr>
+              <a:defRPr sz="900" b="0">
+                <a:solidFill>
+                  <a:srgbClr val="CBE8F9"/>
+                </a:solidFill>
+                <a:latin typeface="Aptos"/>
+              </a:defRPr>
+            </a:lvl9pPr>
+          </a:lstStyle>
           <a:p>
             <a:pPr>
               <a:defRPr sz="900" b="0">
@@ -1094,13 +1392,91 @@
             <p:ph type="title"/>
           </p:nvPr>
         </p:nvSpPr>
-        <p:spPr/>
+        <p:spPr>
+          <a:xfrm>
+            <a:off x="457200" y="137160"/>
+            <a:ext cx="8229600" cy="822960"/>
+          </a:xfrm>
+        </p:spPr>
         <p:txBody>
           <a:bodyPr/>
-          <a:lstStyle/>
+          <a:lstStyle>
+            <a:lvl1pPr>
+              <a:defRPr sz="2600" b="1">
+                <a:solidFill>
+                  <a:srgbClr val="0C2440"/>
+                </a:solidFill>
+                <a:latin typeface="Aptos Display"/>
+              </a:defRPr>
+            </a:lvl1pPr>
+            <a:lvl2pPr>
+              <a:defRPr sz="2600" b="1">
+                <a:solidFill>
+                  <a:srgbClr val="0C2440"/>
+                </a:solidFill>
+                <a:latin typeface="Aptos Display"/>
+              </a:defRPr>
+            </a:lvl2pPr>
+            <a:lvl3pPr>
+              <a:defRPr sz="2600" b="1">
+                <a:solidFill>
+                  <a:srgbClr val="0C2440"/>
+                </a:solidFill>
+                <a:latin typeface="Aptos Display"/>
+              </a:defRPr>
+            </a:lvl3pPr>
+            <a:lvl4pPr>
+              <a:defRPr sz="2600" b="1">
+                <a:solidFill>
+                  <a:srgbClr val="0C2440"/>
+                </a:solidFill>
+                <a:latin typeface="Aptos Display"/>
+              </a:defRPr>
+            </a:lvl4pPr>
+            <a:lvl5pPr>
+              <a:defRPr sz="2600" b="1">
+                <a:solidFill>
+                  <a:srgbClr val="0C2440"/>
+                </a:solidFill>
+                <a:latin typeface="Aptos Display"/>
+              </a:defRPr>
+            </a:lvl5pPr>
+            <a:lvl6pPr>
+              <a:defRPr sz="2600" b="1">
+                <a:solidFill>
+                  <a:srgbClr val="0C2440"/>
+                </a:solidFill>
+                <a:latin typeface="Aptos Display"/>
+              </a:defRPr>
+            </a:lvl6pPr>
+            <a:lvl7pPr>
+              <a:defRPr sz="2600" b="1">
+                <a:solidFill>
+                  <a:srgbClr val="0C2440"/>
+                </a:solidFill>
+                <a:latin typeface="Aptos Display"/>
+              </a:defRPr>
+            </a:lvl7pPr>
+            <a:lvl8pPr>
+              <a:defRPr sz="2600" b="1">
+                <a:solidFill>
+                  <a:srgbClr val="0C2440"/>
+                </a:solidFill>
+                <a:latin typeface="Aptos Display"/>
+              </a:defRPr>
+            </a:lvl8pPr>
+            <a:lvl9pPr>
+              <a:defRPr sz="2600" b="1">
+                <a:solidFill>
+                  <a:srgbClr val="0C2440"/>
+                </a:solidFill>
+                <a:latin typeface="Aptos Display"/>
+              </a:defRPr>
+            </a:lvl9pPr>
+          </a:lstStyle>
           <a:p>
             <a:pPr>
-              <a:defRPr sz="3100" b="1">
+              <a:defRPr sz="2600" b="1">
                 <a:solidFill>
                   <a:srgbClr val="0C2440"/>
                 </a:solidFill>
@@ -1124,10 +1500,88 @@
             <p:ph type="body" orient="vert" idx="1"/>
           </p:nvPr>
         </p:nvSpPr>
-        <p:spPr/>
+        <p:spPr>
+          <a:xfrm>
+            <a:off x="457200" y="1234440"/>
+            <a:ext cx="8229600" cy="3657600"/>
+          </a:xfrm>
+        </p:spPr>
         <p:txBody>
           <a:bodyPr vert="eaVert"/>
-          <a:lstStyle/>
+          <a:lstStyle>
+            <a:lvl1pPr>
+              <a:defRPr sz="1900" b="0">
+                <a:solidFill>
+                  <a:srgbClr val="243A50"/>
+                </a:solidFill>
+                <a:latin typeface="Aptos"/>
+              </a:defRPr>
+            </a:lvl1pPr>
+            <a:lvl2pPr>
+              <a:defRPr sz="1900" b="0">
+                <a:solidFill>
+                  <a:srgbClr val="243A50"/>
+                </a:solidFill>
+                <a:latin typeface="Aptos"/>
+              </a:defRPr>
+            </a:lvl2pPr>
+            <a:lvl3pPr>
+              <a:defRPr sz="1900" b="0">
+                <a:solidFill>
+                  <a:srgbClr val="243A50"/>
+                </a:solidFill>
+                <a:latin typeface="Aptos"/>
+              </a:defRPr>
+            </a:lvl3pPr>
+            <a:lvl4pPr>
+              <a:defRPr sz="1900" b="0">
+                <a:solidFill>
+                  <a:srgbClr val="243A50"/>
+                </a:solidFill>
+                <a:latin typeface="Aptos"/>
+              </a:defRPr>
+            </a:lvl4pPr>
+            <a:lvl5pPr>
+              <a:defRPr sz="1900" b="0">
+                <a:solidFill>
+                  <a:srgbClr val="243A50"/>
+                </a:solidFill>
+                <a:latin typeface="Aptos"/>
+              </a:defRPr>
+            </a:lvl5pPr>
+            <a:lvl6pPr>
+              <a:defRPr sz="1900" b="0">
+                <a:solidFill>
+                  <a:srgbClr val="243A50"/>
+                </a:solidFill>
+                <a:latin typeface="Aptos"/>
+              </a:defRPr>
+            </a:lvl6pPr>
+            <a:lvl7pPr>
+              <a:defRPr sz="1900" b="0">
+                <a:solidFill>
+                  <a:srgbClr val="243A50"/>
+                </a:solidFill>
+                <a:latin typeface="Aptos"/>
+              </a:defRPr>
+            </a:lvl7pPr>
+            <a:lvl8pPr>
+              <a:defRPr sz="1900" b="0">
+                <a:solidFill>
+                  <a:srgbClr val="243A50"/>
+                </a:solidFill>
+                <a:latin typeface="Aptos"/>
+              </a:defRPr>
+            </a:lvl8pPr>
+            <a:lvl9pPr>
+              <a:defRPr sz="1900" b="0">
+                <a:solidFill>
+                  <a:srgbClr val="243A50"/>
+                </a:solidFill>
+                <a:latin typeface="Aptos"/>
+              </a:defRPr>
+            </a:lvl9pPr>
+          </a:lstStyle>
           <a:p>
             <a:pPr lvl="0">
               <a:defRPr sz="1900" b="0">
@@ -1182,10 +1636,88 @@
             <p:ph type="dt" sz="half" idx="10"/>
           </p:nvPr>
         </p:nvSpPr>
-        <p:spPr/>
+        <p:spPr>
+          <a:xfrm>
+            <a:off x="457200" y="0"/>
+            <a:ext cx="2133600" cy="0"/>
+          </a:xfrm>
+        </p:spPr>
         <p:txBody>
           <a:bodyPr/>
-          <a:lstStyle/>
+          <a:lstStyle>
+            <a:lvl1pPr>
+              <a:defRPr sz="900" b="0">
+                <a:solidFill>
+                  <a:srgbClr val="637D94"/>
+                </a:solidFill>
+                <a:latin typeface="Aptos"/>
+              </a:defRPr>
+            </a:lvl1pPr>
+            <a:lvl2pPr>
+              <a:defRPr sz="900" b="0">
+                <a:solidFill>
+                  <a:srgbClr val="637D94"/>
+                </a:solidFill>
+                <a:latin typeface="Aptos"/>
+              </a:defRPr>
+            </a:lvl2pPr>
+            <a:lvl3pPr>
+              <a:defRPr sz="900" b="0">
+                <a:solidFill>
+                  <a:srgbClr val="637D94"/>
+                </a:solidFill>
+                <a:latin typeface="Aptos"/>
+              </a:defRPr>
+            </a:lvl3pPr>
+            <a:lvl4pPr>
+              <a:defRPr sz="900" b="0">
+                <a:solidFill>
+                  <a:srgbClr val="637D94"/>
+                </a:solidFill>
+                <a:latin typeface="Aptos"/>
+              </a:defRPr>
+            </a:lvl4pPr>
+            <a:lvl5pPr>
+              <a:defRPr sz="900" b="0">
+                <a:solidFill>
+                  <a:srgbClr val="637D94"/>
+                </a:solidFill>
+                <a:latin typeface="Aptos"/>
+              </a:defRPr>
+            </a:lvl5pPr>
+            <a:lvl6pPr>
+              <a:defRPr sz="900" b="0">
+                <a:solidFill>
+                  <a:srgbClr val="637D94"/>
+                </a:solidFill>
+                <a:latin typeface="Aptos"/>
+              </a:defRPr>
+            </a:lvl6pPr>
+            <a:lvl7pPr>
+              <a:defRPr sz="900" b="0">
+                <a:solidFill>
+                  <a:srgbClr val="637D94"/>
+                </a:solidFill>
+                <a:latin typeface="Aptos"/>
+              </a:defRPr>
+            </a:lvl7pPr>
+            <a:lvl8pPr>
+              <a:defRPr sz="900" b="0">
+                <a:solidFill>
+                  <a:srgbClr val="637D94"/>
+                </a:solidFill>
+                <a:latin typeface="Aptos"/>
+              </a:defRPr>
+            </a:lvl8pPr>
+            <a:lvl9pPr>
+              <a:defRPr sz="900" b="0">
+                <a:solidFill>
+                  <a:srgbClr val="637D94"/>
+                </a:solidFill>
+                <a:latin typeface="Aptos"/>
+              </a:defRPr>
+            </a:lvl9pPr>
+          </a:lstStyle>
           <a:p>
             <a:pPr>
               <a:defRPr sz="900" b="0">
@@ -1213,10 +1745,88 @@
             <p:ph type="ftr" sz="quarter" idx="11"/>
           </p:nvPr>
         </p:nvSpPr>
-        <p:spPr/>
+        <p:spPr>
+          <a:xfrm>
+            <a:off x="3124200" y="0"/>
+            <a:ext cx="2895600" cy="0"/>
+          </a:xfrm>
+        </p:spPr>
         <p:txBody>
           <a:bodyPr/>
-          <a:lstStyle/>
+          <a:lstStyle>
+            <a:lvl1pPr>
+              <a:defRPr sz="900" b="0">
+                <a:solidFill>
+                  <a:srgbClr val="637D94"/>
+                </a:solidFill>
+                <a:latin typeface="Aptos"/>
+              </a:defRPr>
+            </a:lvl1pPr>
+            <a:lvl2pPr>
+              <a:defRPr sz="900" b="0">
+                <a:solidFill>
+                  <a:srgbClr val="637D94"/>
+                </a:solidFill>
+                <a:latin typeface="Aptos"/>
+              </a:defRPr>
+            </a:lvl2pPr>
+            <a:lvl3pPr>
+              <a:defRPr sz="900" b="0">
+                <a:solidFill>
+                  <a:srgbClr val="637D94"/>
+                </a:solidFill>
+                <a:latin typeface="Aptos"/>
+              </a:defRPr>
+            </a:lvl3pPr>
+            <a:lvl4pPr>
+              <a:defRPr sz="900" b="0">
+                <a:solidFill>
+                  <a:srgbClr val="637D94"/>
+                </a:solidFill>
+                <a:latin typeface="Aptos"/>
+              </a:defRPr>
+            </a:lvl4pPr>
+            <a:lvl5pPr>
+              <a:defRPr sz="900" b="0">
+                <a:solidFill>
+                  <a:srgbClr val="637D94"/>
+                </a:solidFill>
+                <a:latin typeface="Aptos"/>
+              </a:defRPr>
+            </a:lvl5pPr>
+            <a:lvl6pPr>
+              <a:defRPr sz="900" b="0">
+                <a:solidFill>
+                  <a:srgbClr val="637D94"/>
+                </a:solidFill>
+                <a:latin typeface="Aptos"/>
+              </a:defRPr>
+            </a:lvl6pPr>
+            <a:lvl7pPr>
+              <a:defRPr sz="900" b="0">
+                <a:solidFill>
+                  <a:srgbClr val="637D94"/>
+                </a:solidFill>
+                <a:latin typeface="Aptos"/>
+              </a:defRPr>
+            </a:lvl7pPr>
+            <a:lvl8pPr>
+              <a:defRPr sz="900" b="0">
+                <a:solidFill>
+                  <a:srgbClr val="637D94"/>
+                </a:solidFill>
+                <a:latin typeface="Aptos"/>
+              </a:defRPr>
+            </a:lvl8pPr>
+            <a:lvl9pPr>
+              <a:defRPr sz="900" b="0">
+                <a:solidFill>
+                  <a:srgbClr val="637D94"/>
+                </a:solidFill>
+                <a:latin typeface="Aptos"/>
+              </a:defRPr>
+            </a:lvl9pPr>
+          </a:lstStyle>
           <a:p>
             <a:pPr>
               <a:defRPr sz="900" b="0">
@@ -1240,10 +1850,88 @@
             <p:ph type="sldNum" sz="quarter" idx="12"/>
           </p:nvPr>
         </p:nvSpPr>
-        <p:spPr/>
+        <p:spPr>
+          <a:xfrm>
+            <a:off x="6553200" y="0"/>
+            <a:ext cx="2133600" cy="0"/>
+          </a:xfrm>
+        </p:spPr>
         <p:txBody>
           <a:bodyPr/>
-          <a:lstStyle/>
+          <a:lstStyle>
+            <a:lvl1pPr>
+              <a:defRPr sz="900" b="0">
+                <a:solidFill>
+                  <a:srgbClr val="637D94"/>
+                </a:solidFill>
+                <a:latin typeface="Aptos"/>
+              </a:defRPr>
+            </a:lvl1pPr>
+            <a:lvl2pPr>
+              <a:defRPr sz="900" b="0">
+                <a:solidFill>
+                  <a:srgbClr val="637D94"/>
+                </a:solidFill>
+                <a:latin typeface="Aptos"/>
+              </a:defRPr>
+            </a:lvl2pPr>
+            <a:lvl3pPr>
+              <a:defRPr sz="900" b="0">
+                <a:solidFill>
+                  <a:srgbClr val="637D94"/>
+                </a:solidFill>
+                <a:latin typeface="Aptos"/>
+              </a:defRPr>
+            </a:lvl3pPr>
+            <a:lvl4pPr>
+              <a:defRPr sz="900" b="0">
+                <a:solidFill>
+                  <a:srgbClr val="637D94"/>
+                </a:solidFill>
+                <a:latin typeface="Aptos"/>
+              </a:defRPr>
+            </a:lvl4pPr>
+            <a:lvl5pPr>
+              <a:defRPr sz="900" b="0">
+                <a:solidFill>
+                  <a:srgbClr val="637D94"/>
+                </a:solidFill>
+                <a:latin typeface="Aptos"/>
+              </a:defRPr>
+            </a:lvl5pPr>
+            <a:lvl6pPr>
+              <a:defRPr sz="900" b="0">
+                <a:solidFill>
+                  <a:srgbClr val="637D94"/>
+                </a:solidFill>
+                <a:latin typeface="Aptos"/>
+              </a:defRPr>
+            </a:lvl6pPr>
+            <a:lvl7pPr>
+              <a:defRPr sz="900" b="0">
+                <a:solidFill>
+                  <a:srgbClr val="637D94"/>
+                </a:solidFill>
+                <a:latin typeface="Aptos"/>
+              </a:defRPr>
+            </a:lvl7pPr>
+            <a:lvl8pPr>
+              <a:defRPr sz="900" b="0">
+                <a:solidFill>
+                  <a:srgbClr val="637D94"/>
+                </a:solidFill>
+                <a:latin typeface="Aptos"/>
+              </a:defRPr>
+            </a:lvl8pPr>
+            <a:lvl9pPr>
+              <a:defRPr sz="900" b="0">
+                <a:solidFill>
+                  <a:srgbClr val="637D94"/>
+                </a:solidFill>
+                <a:latin typeface="Aptos"/>
+              </a:defRPr>
+            </a:lvl9pPr>
+          </a:lstStyle>
           <a:p>
             <a:pPr>
               <a:defRPr sz="900" b="0">
@@ -1354,16 +2042,89 @@
         </p:nvSpPr>
         <p:spPr>
           <a:xfrm>
-            <a:off x="6629400" y="205979"/>
-            <a:ext cx="2057400" cy="4388644"/>
+            <a:off x="6629400" y="137160"/>
+            <a:ext cx="2057400" cy="822960"/>
           </a:xfrm>
         </p:spPr>
         <p:txBody>
           <a:bodyPr vert="eaVert"/>
-          <a:lstStyle/>
+          <a:lstStyle>
+            <a:lvl1pPr>
+              <a:defRPr sz="2600" b="1">
+                <a:solidFill>
+                  <a:srgbClr val="0C2440"/>
+                </a:solidFill>
+                <a:latin typeface="Aptos Display"/>
+              </a:defRPr>
+            </a:lvl1pPr>
+            <a:lvl2pPr>
+              <a:defRPr sz="2600" b="1">
+                <a:solidFill>
+                  <a:srgbClr val="0C2440"/>
+                </a:solidFill>
+                <a:latin typeface="Aptos Display"/>
+              </a:defRPr>
+            </a:lvl2pPr>
+            <a:lvl3pPr>
+              <a:defRPr sz="2600" b="1">
+                <a:solidFill>
+                  <a:srgbClr val="0C2440"/>
+                </a:solidFill>
+                <a:latin typeface="Aptos Display"/>
+              </a:defRPr>
+            </a:lvl3pPr>
+            <a:lvl4pPr>
+              <a:defRPr sz="2600" b="1">
+                <a:solidFill>
+                  <a:srgbClr val="0C2440"/>
+                </a:solidFill>
+                <a:latin typeface="Aptos Display"/>
+              </a:defRPr>
+            </a:lvl4pPr>
+            <a:lvl5pPr>
+              <a:defRPr sz="2600" b="1">
+                <a:solidFill>
+                  <a:srgbClr val="0C2440"/>
+                </a:solidFill>
+                <a:latin typeface="Aptos Display"/>
+              </a:defRPr>
+            </a:lvl5pPr>
+            <a:lvl6pPr>
+              <a:defRPr sz="2600" b="1">
+                <a:solidFill>
+                  <a:srgbClr val="0C2440"/>
+                </a:solidFill>
+                <a:latin typeface="Aptos Display"/>
+              </a:defRPr>
+            </a:lvl6pPr>
+            <a:lvl7pPr>
+              <a:defRPr sz="2600" b="1">
+                <a:solidFill>
+                  <a:srgbClr val="0C2440"/>
+                </a:solidFill>
+                <a:latin typeface="Aptos Display"/>
+              </a:defRPr>
+            </a:lvl7pPr>
+            <a:lvl8pPr>
+              <a:defRPr sz="2600" b="1">
+                <a:solidFill>
+                  <a:srgbClr val="0C2440"/>
+                </a:solidFill>
+                <a:latin typeface="Aptos Display"/>
+              </a:defRPr>
+            </a:lvl8pPr>
+            <a:lvl9pPr>
+              <a:defRPr sz="2600" b="1">
+                <a:solidFill>
+                  <a:srgbClr val="0C2440"/>
+                </a:solidFill>
+                <a:latin typeface="Aptos Display"/>
+              </a:defRPr>
+            </a:lvl9pPr>
+          </a:lstStyle>
           <a:p>
             <a:pPr>
-              <a:defRPr sz="3100" b="1">
+              <a:defRPr sz="2600" b="1">
                 <a:solidFill>
                   <a:srgbClr val="0C2440"/>
                 </a:solidFill>
@@ -1389,13 +2150,86 @@
         </p:nvSpPr>
         <p:spPr>
           <a:xfrm>
-            <a:off x="457200" y="205979"/>
-            <a:ext cx="6019800" cy="4388644"/>
+            <a:off x="457200" y="1234440"/>
+            <a:ext cx="6019800" cy="3657600"/>
           </a:xfrm>
         </p:spPr>
         <p:txBody>
           <a:bodyPr vert="eaVert"/>
-          <a:lstStyle/>
+          <a:lstStyle>
+            <a:lvl1pPr>
+              <a:defRPr sz="1900" b="0">
+                <a:solidFill>
+                  <a:srgbClr val="243A50"/>
+                </a:solidFill>
+                <a:latin typeface="Aptos"/>
+              </a:defRPr>
+            </a:lvl1pPr>
+            <a:lvl2pPr>
+              <a:defRPr sz="1900" b="0">
+                <a:solidFill>
+                  <a:srgbClr val="243A50"/>
+                </a:solidFill>
+                <a:latin typeface="Aptos"/>
+              </a:defRPr>
+            </a:lvl2pPr>
+            <a:lvl3pPr>
+              <a:defRPr sz="1900" b="0">
+                <a:solidFill>
+                  <a:srgbClr val="243A50"/>
+                </a:solidFill>
+                <a:latin typeface="Aptos"/>
+              </a:defRPr>
+            </a:lvl3pPr>
+            <a:lvl4pPr>
+              <a:defRPr sz="1900" b="0">
+                <a:solidFill>
+                  <a:srgbClr val="243A50"/>
+                </a:solidFill>
+                <a:latin typeface="Aptos"/>
+              </a:defRPr>
+            </a:lvl4pPr>
+            <a:lvl5pPr>
+              <a:defRPr sz="1900" b="0">
+                <a:solidFill>
+                  <a:srgbClr val="243A50"/>
+                </a:solidFill>
+                <a:latin typeface="Aptos"/>
+              </a:defRPr>
+            </a:lvl5pPr>
+            <a:lvl6pPr>
+              <a:defRPr sz="1900" b="0">
+                <a:solidFill>
+                  <a:srgbClr val="243A50"/>
+                </a:solidFill>
+                <a:latin typeface="Aptos"/>
+              </a:defRPr>
+            </a:lvl6pPr>
+            <a:lvl7pPr>
+              <a:defRPr sz="1900" b="0">
+                <a:solidFill>
+                  <a:srgbClr val="243A50"/>
+                </a:solidFill>
+                <a:latin typeface="Aptos"/>
+              </a:defRPr>
+            </a:lvl7pPr>
+            <a:lvl8pPr>
+              <a:defRPr sz="1900" b="0">
+                <a:solidFill>
+                  <a:srgbClr val="243A50"/>
+                </a:solidFill>
+                <a:latin typeface="Aptos"/>
+              </a:defRPr>
+            </a:lvl8pPr>
+            <a:lvl9pPr>
+              <a:defRPr sz="1900" b="0">
+                <a:solidFill>
+                  <a:srgbClr val="243A50"/>
+                </a:solidFill>
+                <a:latin typeface="Aptos"/>
+              </a:defRPr>
+            </a:lvl9pPr>
+          </a:lstStyle>
           <a:p>
             <a:pPr lvl="0">
               <a:defRPr sz="1900" b="0">
@@ -1450,10 +2284,88 @@
             <p:ph type="dt" sz="half" idx="10"/>
           </p:nvPr>
         </p:nvSpPr>
-        <p:spPr/>
+        <p:spPr>
+          <a:xfrm>
+            <a:off x="457200" y="0"/>
+            <a:ext cx="2133600" cy="0"/>
+          </a:xfrm>
+        </p:spPr>
         <p:txBody>
           <a:bodyPr/>
-          <a:lstStyle/>
+          <a:lstStyle>
+            <a:lvl1pPr>
+              <a:defRPr sz="900" b="0">
+                <a:solidFill>
+                  <a:srgbClr val="637D94"/>
+                </a:solidFill>
+                <a:latin typeface="Aptos"/>
+              </a:defRPr>
+            </a:lvl1pPr>
+            <a:lvl2pPr>
+              <a:defRPr sz="900" b="0">
+                <a:solidFill>
+                  <a:srgbClr val="637D94"/>
+                </a:solidFill>
+                <a:latin typeface="Aptos"/>
+              </a:defRPr>
+            </a:lvl2pPr>
+            <a:lvl3pPr>
+              <a:defRPr sz="900" b="0">
+                <a:solidFill>
+                  <a:srgbClr val="637D94"/>
+                </a:solidFill>
+                <a:latin typeface="Aptos"/>
+              </a:defRPr>
+            </a:lvl3pPr>
+            <a:lvl4pPr>
+              <a:defRPr sz="900" b="0">
+                <a:solidFill>
+                  <a:srgbClr val="637D94"/>
+                </a:solidFill>
+                <a:latin typeface="Aptos"/>
+              </a:defRPr>
+            </a:lvl4pPr>
+            <a:lvl5pPr>
+              <a:defRPr sz="900" b="0">
+                <a:solidFill>
+                  <a:srgbClr val="637D94"/>
+                </a:solidFill>
+                <a:latin typeface="Aptos"/>
+              </a:defRPr>
+            </a:lvl5pPr>
+            <a:lvl6pPr>
+              <a:defRPr sz="900" b="0">
+                <a:solidFill>
+                  <a:srgbClr val="637D94"/>
+                </a:solidFill>
+                <a:latin typeface="Aptos"/>
+              </a:defRPr>
+            </a:lvl6pPr>
+            <a:lvl7pPr>
+              <a:defRPr sz="900" b="0">
+                <a:solidFill>
+                  <a:srgbClr val="637D94"/>
+                </a:solidFill>
+                <a:latin typeface="Aptos"/>
+              </a:defRPr>
+            </a:lvl7pPr>
+            <a:lvl8pPr>
+              <a:defRPr sz="900" b="0">
+                <a:solidFill>
+                  <a:srgbClr val="637D94"/>
+                </a:solidFill>
+                <a:latin typeface="Aptos"/>
+              </a:defRPr>
+            </a:lvl8pPr>
+            <a:lvl9pPr>
+              <a:defRPr sz="900" b="0">
+                <a:solidFill>
+                  <a:srgbClr val="637D94"/>
+                </a:solidFill>
+                <a:latin typeface="Aptos"/>
+              </a:defRPr>
+            </a:lvl9pPr>
+          </a:lstStyle>
           <a:p>
             <a:pPr>
               <a:defRPr sz="900" b="0">
@@ -1481,10 +2393,88 @@
             <p:ph type="ftr" sz="quarter" idx="11"/>
           </p:nvPr>
         </p:nvSpPr>
-        <p:spPr/>
+        <p:spPr>
+          <a:xfrm>
+            <a:off x="3124200" y="0"/>
+            <a:ext cx="2895600" cy="0"/>
+          </a:xfrm>
+        </p:spPr>
         <p:txBody>
           <a:bodyPr/>
-          <a:lstStyle/>
+          <a:lstStyle>
+            <a:lvl1pPr>
+              <a:defRPr sz="900" b="0">
+                <a:solidFill>
+                  <a:srgbClr val="637D94"/>
+                </a:solidFill>
+                <a:latin typeface="Aptos"/>
+              </a:defRPr>
+            </a:lvl1pPr>
+            <a:lvl2pPr>
+              <a:defRPr sz="900" b="0">
+                <a:solidFill>
+                  <a:srgbClr val="637D94"/>
+                </a:solidFill>
+                <a:latin typeface="Aptos"/>
+              </a:defRPr>
+            </a:lvl2pPr>
+            <a:lvl3pPr>
+              <a:defRPr sz="900" b="0">
+                <a:solidFill>
+                  <a:srgbClr val="637D94"/>
+                </a:solidFill>
+                <a:latin typeface="Aptos"/>
+              </a:defRPr>
+            </a:lvl3pPr>
+            <a:lvl4pPr>
+              <a:defRPr sz="900" b="0">
+                <a:solidFill>
+                  <a:srgbClr val="637D94"/>
+                </a:solidFill>
+                <a:latin typeface="Aptos"/>
+              </a:defRPr>
+            </a:lvl4pPr>
+            <a:lvl5pPr>
+              <a:defRPr sz="900" b="0">
+                <a:solidFill>
+                  <a:srgbClr val="637D94"/>
+                </a:solidFill>
+                <a:latin typeface="Aptos"/>
+              </a:defRPr>
+            </a:lvl5pPr>
+            <a:lvl6pPr>
+              <a:defRPr sz="900" b="0">
+                <a:solidFill>
+                  <a:srgbClr val="637D94"/>
+                </a:solidFill>
+                <a:latin typeface="Aptos"/>
+              </a:defRPr>
+            </a:lvl6pPr>
+            <a:lvl7pPr>
+              <a:defRPr sz="900" b="0">
+                <a:solidFill>
+                  <a:srgbClr val="637D94"/>
+                </a:solidFill>
+                <a:latin typeface="Aptos"/>
+              </a:defRPr>
+            </a:lvl7pPr>
+            <a:lvl8pPr>
+              <a:defRPr sz="900" b="0">
+                <a:solidFill>
+                  <a:srgbClr val="637D94"/>
+                </a:solidFill>
+                <a:latin typeface="Aptos"/>
+              </a:defRPr>
+            </a:lvl8pPr>
+            <a:lvl9pPr>
+              <a:defRPr sz="900" b="0">
+                <a:solidFill>
+                  <a:srgbClr val="637D94"/>
+                </a:solidFill>
+                <a:latin typeface="Aptos"/>
+              </a:defRPr>
+            </a:lvl9pPr>
+          </a:lstStyle>
           <a:p>
             <a:pPr>
               <a:defRPr sz="900" b="0">
@@ -1508,10 +2498,88 @@
             <p:ph type="sldNum" sz="quarter" idx="12"/>
           </p:nvPr>
         </p:nvSpPr>
-        <p:spPr/>
+        <p:spPr>
+          <a:xfrm>
+            <a:off x="6553200" y="0"/>
+            <a:ext cx="2133600" cy="0"/>
+          </a:xfrm>
+        </p:spPr>
         <p:txBody>
           <a:bodyPr/>
-          <a:lstStyle/>
+          <a:lstStyle>
+            <a:lvl1pPr>
+              <a:defRPr sz="900" b="0">
+                <a:solidFill>
+                  <a:srgbClr val="637D94"/>
+                </a:solidFill>
+                <a:latin typeface="Aptos"/>
+              </a:defRPr>
+            </a:lvl1pPr>
+            <a:lvl2pPr>
+              <a:defRPr sz="900" b="0">
+                <a:solidFill>
+                  <a:srgbClr val="637D94"/>
+                </a:solidFill>
+                <a:latin typeface="Aptos"/>
+              </a:defRPr>
+            </a:lvl2pPr>
+            <a:lvl3pPr>
+              <a:defRPr sz="900" b="0">
+                <a:solidFill>
+                  <a:srgbClr val="637D94"/>
+                </a:solidFill>
+                <a:latin typeface="Aptos"/>
+              </a:defRPr>
+            </a:lvl3pPr>
+            <a:lvl4pPr>
+              <a:defRPr sz="900" b="0">
+                <a:solidFill>
+                  <a:srgbClr val="637D94"/>
+                </a:solidFill>
+                <a:latin typeface="Aptos"/>
+              </a:defRPr>
+            </a:lvl4pPr>
+            <a:lvl5pPr>
+              <a:defRPr sz="900" b="0">
+                <a:solidFill>
+                  <a:srgbClr val="637D94"/>
+                </a:solidFill>
+                <a:latin typeface="Aptos"/>
+              </a:defRPr>
+            </a:lvl5pPr>
+            <a:lvl6pPr>
+              <a:defRPr sz="900" b="0">
+                <a:solidFill>
+                  <a:srgbClr val="637D94"/>
+                </a:solidFill>
+                <a:latin typeface="Aptos"/>
+              </a:defRPr>
+            </a:lvl6pPr>
+            <a:lvl7pPr>
+              <a:defRPr sz="900" b="0">
+                <a:solidFill>
+                  <a:srgbClr val="637D94"/>
+                </a:solidFill>
+                <a:latin typeface="Aptos"/>
+              </a:defRPr>
+            </a:lvl7pPr>
+            <a:lvl8pPr>
+              <a:defRPr sz="900" b="0">
+                <a:solidFill>
+                  <a:srgbClr val="637D94"/>
+                </a:solidFill>
+                <a:latin typeface="Aptos"/>
+              </a:defRPr>
+            </a:lvl8pPr>
+            <a:lvl9pPr>
+              <a:defRPr sz="900" b="0">
+                <a:solidFill>
+                  <a:srgbClr val="637D94"/>
+                </a:solidFill>
+                <a:latin typeface="Aptos"/>
+              </a:defRPr>
+            </a:lvl9pPr>
+          </a:lstStyle>
           <a:p>
             <a:pPr>
               <a:defRPr sz="900" b="0">
@@ -1620,13 +2688,91 @@
             <p:ph type="title"/>
           </p:nvPr>
         </p:nvSpPr>
-        <p:spPr/>
+        <p:spPr>
+          <a:xfrm>
+            <a:off x="457200" y="137160"/>
+            <a:ext cx="8229600" cy="822960"/>
+          </a:xfrm>
+        </p:spPr>
         <p:txBody>
           <a:bodyPr/>
-          <a:lstStyle/>
+          <a:lstStyle>
+            <a:lvl1pPr>
+              <a:defRPr sz="2600" b="1">
+                <a:solidFill>
+                  <a:srgbClr val="0C2440"/>
+                </a:solidFill>
+                <a:latin typeface="Aptos Display"/>
+              </a:defRPr>
+            </a:lvl1pPr>
+            <a:lvl2pPr>
+              <a:defRPr sz="2600" b="1">
+                <a:solidFill>
+                  <a:srgbClr val="0C2440"/>
+                </a:solidFill>
+                <a:latin typeface="Aptos Display"/>
+              </a:defRPr>
+            </a:lvl2pPr>
+            <a:lvl3pPr>
+              <a:defRPr sz="2600" b="1">
+                <a:solidFill>
+                  <a:srgbClr val="0C2440"/>
+                </a:solidFill>
+                <a:latin typeface="Aptos Display"/>
+              </a:defRPr>
+            </a:lvl3pPr>
+            <a:lvl4pPr>
+              <a:defRPr sz="2600" b="1">
+                <a:solidFill>
+                  <a:srgbClr val="0C2440"/>
+                </a:solidFill>
+                <a:latin typeface="Aptos Display"/>
+              </a:defRPr>
+            </a:lvl4pPr>
+            <a:lvl5pPr>
+              <a:defRPr sz="2600" b="1">
+                <a:solidFill>
+                  <a:srgbClr val="0C2440"/>
+                </a:solidFill>
+                <a:latin typeface="Aptos Display"/>
+              </a:defRPr>
+            </a:lvl5pPr>
+            <a:lvl6pPr>
+              <a:defRPr sz="2600" b="1">
+                <a:solidFill>
+                  <a:srgbClr val="0C2440"/>
+                </a:solidFill>
+                <a:latin typeface="Aptos Display"/>
+              </a:defRPr>
+            </a:lvl6pPr>
+            <a:lvl7pPr>
+              <a:defRPr sz="2600" b="1">
+                <a:solidFill>
+                  <a:srgbClr val="0C2440"/>
+                </a:solidFill>
+                <a:latin typeface="Aptos Display"/>
+              </a:defRPr>
+            </a:lvl7pPr>
+            <a:lvl8pPr>
+              <a:defRPr sz="2600" b="1">
+                <a:solidFill>
+                  <a:srgbClr val="0C2440"/>
+                </a:solidFill>
+                <a:latin typeface="Aptos Display"/>
+              </a:defRPr>
+            </a:lvl8pPr>
+            <a:lvl9pPr>
+              <a:defRPr sz="2600" b="1">
+                <a:solidFill>
+                  <a:srgbClr val="0C2440"/>
+                </a:solidFill>
+                <a:latin typeface="Aptos Display"/>
+              </a:defRPr>
+            </a:lvl9pPr>
+          </a:lstStyle>
           <a:p>
             <a:pPr>
-              <a:defRPr sz="3100" b="1">
+              <a:defRPr sz="2600" b="1">
                 <a:solidFill>
                   <a:srgbClr val="0C2440"/>
                 </a:solidFill>
@@ -1650,10 +2796,88 @@
             <p:ph idx="1"/>
           </p:nvPr>
         </p:nvSpPr>
-        <p:spPr/>
+        <p:spPr>
+          <a:xfrm>
+            <a:off x="457200" y="1234440"/>
+            <a:ext cx="8229600" cy="3657600"/>
+          </a:xfrm>
+        </p:spPr>
         <p:txBody>
           <a:bodyPr/>
-          <a:lstStyle/>
+          <a:lstStyle>
+            <a:lvl1pPr>
+              <a:defRPr sz="1900" b="0">
+                <a:solidFill>
+                  <a:srgbClr val="243A50"/>
+                </a:solidFill>
+                <a:latin typeface="Aptos"/>
+              </a:defRPr>
+            </a:lvl1pPr>
+            <a:lvl2pPr>
+              <a:defRPr sz="1900" b="0">
+                <a:solidFill>
+                  <a:srgbClr val="243A50"/>
+                </a:solidFill>
+                <a:latin typeface="Aptos"/>
+              </a:defRPr>
+            </a:lvl2pPr>
+            <a:lvl3pPr>
+              <a:defRPr sz="1900" b="0">
+                <a:solidFill>
+                  <a:srgbClr val="243A50"/>
+                </a:solidFill>
+                <a:latin typeface="Aptos"/>
+              </a:defRPr>
+            </a:lvl3pPr>
+            <a:lvl4pPr>
+              <a:defRPr sz="1900" b="0">
+                <a:solidFill>
+                  <a:srgbClr val="243A50"/>
+                </a:solidFill>
+                <a:latin typeface="Aptos"/>
+              </a:defRPr>
+            </a:lvl4pPr>
+            <a:lvl5pPr>
+              <a:defRPr sz="1900" b="0">
+                <a:solidFill>
+                  <a:srgbClr val="243A50"/>
+                </a:solidFill>
+                <a:latin typeface="Aptos"/>
+              </a:defRPr>
+            </a:lvl5pPr>
+            <a:lvl6pPr>
+              <a:defRPr sz="1900" b="0">
+                <a:solidFill>
+                  <a:srgbClr val="243A50"/>
+                </a:solidFill>
+                <a:latin typeface="Aptos"/>
+              </a:defRPr>
+            </a:lvl6pPr>
+            <a:lvl7pPr>
+              <a:defRPr sz="1900" b="0">
+                <a:solidFill>
+                  <a:srgbClr val="243A50"/>
+                </a:solidFill>
+                <a:latin typeface="Aptos"/>
+              </a:defRPr>
+            </a:lvl7pPr>
+            <a:lvl8pPr>
+              <a:defRPr sz="1900" b="0">
+                <a:solidFill>
+                  <a:srgbClr val="243A50"/>
+                </a:solidFill>
+                <a:latin typeface="Aptos"/>
+              </a:defRPr>
+            </a:lvl8pPr>
+            <a:lvl9pPr>
+              <a:defRPr sz="1900" b="0">
+                <a:solidFill>
+                  <a:srgbClr val="243A50"/>
+                </a:solidFill>
+                <a:latin typeface="Aptos"/>
+              </a:defRPr>
+            </a:lvl9pPr>
+          </a:lstStyle>
           <a:p>
             <a:pPr lvl="0">
               <a:defRPr sz="1900" b="0">
@@ -1708,10 +2932,88 @@
             <p:ph type="dt" sz="half" idx="10"/>
           </p:nvPr>
         </p:nvSpPr>
-        <p:spPr/>
+        <p:spPr>
+          <a:xfrm>
+            <a:off x="457200" y="0"/>
+            <a:ext cx="2133600" cy="0"/>
+          </a:xfrm>
+        </p:spPr>
         <p:txBody>
           <a:bodyPr/>
-          <a:lstStyle/>
+          <a:lstStyle>
+            <a:lvl1pPr>
+              <a:defRPr sz="900" b="0">
+                <a:solidFill>
+                  <a:srgbClr val="637D94"/>
+                </a:solidFill>
+                <a:latin typeface="Aptos"/>
+              </a:defRPr>
+            </a:lvl1pPr>
+            <a:lvl2pPr>
+              <a:defRPr sz="900" b="0">
+                <a:solidFill>
+                  <a:srgbClr val="637D94"/>
+                </a:solidFill>
+                <a:latin typeface="Aptos"/>
+              </a:defRPr>
+            </a:lvl2pPr>
+            <a:lvl3pPr>
+              <a:defRPr sz="900" b="0">
+                <a:solidFill>
+                  <a:srgbClr val="637D94"/>
+                </a:solidFill>
+                <a:latin typeface="Aptos"/>
+              </a:defRPr>
+            </a:lvl3pPr>
+            <a:lvl4pPr>
+              <a:defRPr sz="900" b="0">
+                <a:solidFill>
+                  <a:srgbClr val="637D94"/>
+                </a:solidFill>
+                <a:latin typeface="Aptos"/>
+              </a:defRPr>
+            </a:lvl4pPr>
+            <a:lvl5pPr>
+              <a:defRPr sz="900" b="0">
+                <a:solidFill>
+                  <a:srgbClr val="637D94"/>
+                </a:solidFill>
+                <a:latin typeface="Aptos"/>
+              </a:defRPr>
+            </a:lvl5pPr>
+            <a:lvl6pPr>
+              <a:defRPr sz="900" b="0">
+                <a:solidFill>
+                  <a:srgbClr val="637D94"/>
+                </a:solidFill>
+                <a:latin typeface="Aptos"/>
+              </a:defRPr>
+            </a:lvl6pPr>
+            <a:lvl7pPr>
+              <a:defRPr sz="900" b="0">
+                <a:solidFill>
+                  <a:srgbClr val="637D94"/>
+                </a:solidFill>
+                <a:latin typeface="Aptos"/>
+              </a:defRPr>
+            </a:lvl7pPr>
+            <a:lvl8pPr>
+              <a:defRPr sz="900" b="0">
+                <a:solidFill>
+                  <a:srgbClr val="637D94"/>
+                </a:solidFill>
+                <a:latin typeface="Aptos"/>
+              </a:defRPr>
+            </a:lvl8pPr>
+            <a:lvl9pPr>
+              <a:defRPr sz="900" b="0">
+                <a:solidFill>
+                  <a:srgbClr val="637D94"/>
+                </a:solidFill>
+                <a:latin typeface="Aptos"/>
+              </a:defRPr>
+            </a:lvl9pPr>
+          </a:lstStyle>
           <a:p>
             <a:pPr>
               <a:defRPr sz="900" b="0">
@@ -1739,10 +3041,88 @@
             <p:ph type="ftr" sz="quarter" idx="11"/>
           </p:nvPr>
         </p:nvSpPr>
-        <p:spPr/>
+        <p:spPr>
+          <a:xfrm>
+            <a:off x="3124200" y="0"/>
+            <a:ext cx="2895600" cy="0"/>
+          </a:xfrm>
+        </p:spPr>
         <p:txBody>
           <a:bodyPr/>
-          <a:lstStyle/>
+          <a:lstStyle>
+            <a:lvl1pPr>
+              <a:defRPr sz="900" b="0">
+                <a:solidFill>
+                  <a:srgbClr val="637D94"/>
+                </a:solidFill>
+                <a:latin typeface="Aptos"/>
+              </a:defRPr>
+            </a:lvl1pPr>
+            <a:lvl2pPr>
+              <a:defRPr sz="900" b="0">
+                <a:solidFill>
+                  <a:srgbClr val="637D94"/>
+                </a:solidFill>
+                <a:latin typeface="Aptos"/>
+              </a:defRPr>
+            </a:lvl2pPr>
+            <a:lvl3pPr>
+              <a:defRPr sz="900" b="0">
+                <a:solidFill>
+                  <a:srgbClr val="637D94"/>
+                </a:solidFill>
+                <a:latin typeface="Aptos"/>
+              </a:defRPr>
+            </a:lvl3pPr>
+            <a:lvl4pPr>
+              <a:defRPr sz="900" b="0">
+                <a:solidFill>
+                  <a:srgbClr val="637D94"/>
+                </a:solidFill>
+                <a:latin typeface="Aptos"/>
+              </a:defRPr>
+            </a:lvl4pPr>
+            <a:lvl5pPr>
+              <a:defRPr sz="900" b="0">
+                <a:solidFill>
+                  <a:srgbClr val="637D94"/>
+                </a:solidFill>
+                <a:latin typeface="Aptos"/>
+              </a:defRPr>
+            </a:lvl5pPr>
+            <a:lvl6pPr>
+              <a:defRPr sz="900" b="0">
+                <a:solidFill>
+                  <a:srgbClr val="637D94"/>
+                </a:solidFill>
+                <a:latin typeface="Aptos"/>
+              </a:defRPr>
+            </a:lvl6pPr>
+            <a:lvl7pPr>
+              <a:defRPr sz="900" b="0">
+                <a:solidFill>
+                  <a:srgbClr val="637D94"/>
+                </a:solidFill>
+                <a:latin typeface="Aptos"/>
+              </a:defRPr>
+            </a:lvl7pPr>
+            <a:lvl8pPr>
+              <a:defRPr sz="900" b="0">
+                <a:solidFill>
+                  <a:srgbClr val="637D94"/>
+                </a:solidFill>
+                <a:latin typeface="Aptos"/>
+              </a:defRPr>
+            </a:lvl8pPr>
+            <a:lvl9pPr>
+              <a:defRPr sz="900" b="0">
+                <a:solidFill>
+                  <a:srgbClr val="637D94"/>
+                </a:solidFill>
+                <a:latin typeface="Aptos"/>
+              </a:defRPr>
+            </a:lvl9pPr>
+          </a:lstStyle>
           <a:p>
             <a:pPr>
               <a:defRPr sz="900" b="0">
@@ -1766,10 +3146,88 @@
             <p:ph type="sldNum" sz="quarter" idx="12"/>
           </p:nvPr>
         </p:nvSpPr>
-        <p:spPr/>
+        <p:spPr>
+          <a:xfrm>
+            <a:off x="6553200" y="0"/>
+            <a:ext cx="2133600" cy="0"/>
+          </a:xfrm>
+        </p:spPr>
         <p:txBody>
           <a:bodyPr/>
-          <a:lstStyle/>
+          <a:lstStyle>
+            <a:lvl1pPr>
+              <a:defRPr sz="900" b="0">
+                <a:solidFill>
+                  <a:srgbClr val="637D94"/>
+                </a:solidFill>
+                <a:latin typeface="Aptos"/>
+              </a:defRPr>
+            </a:lvl1pPr>
+            <a:lvl2pPr>
+              <a:defRPr sz="900" b="0">
+                <a:solidFill>
+                  <a:srgbClr val="637D94"/>
+                </a:solidFill>
+                <a:latin typeface="Aptos"/>
+              </a:defRPr>
+            </a:lvl2pPr>
+            <a:lvl3pPr>
+              <a:defRPr sz="900" b="0">
+                <a:solidFill>
+                  <a:srgbClr val="637D94"/>
+                </a:solidFill>
+                <a:latin typeface="Aptos"/>
+              </a:defRPr>
+            </a:lvl3pPr>
+            <a:lvl4pPr>
+              <a:defRPr sz="900" b="0">
+                <a:solidFill>
+                  <a:srgbClr val="637D94"/>
+                </a:solidFill>
+                <a:latin typeface="Aptos"/>
+              </a:defRPr>
+            </a:lvl4pPr>
+            <a:lvl5pPr>
+              <a:defRPr sz="900" b="0">
+                <a:solidFill>
+                  <a:srgbClr val="637D94"/>
+                </a:solidFill>
+                <a:latin typeface="Aptos"/>
+              </a:defRPr>
+            </a:lvl5pPr>
+            <a:lvl6pPr>
+              <a:defRPr sz="900" b="0">
+                <a:solidFill>
+                  <a:srgbClr val="637D94"/>
+                </a:solidFill>
+                <a:latin typeface="Aptos"/>
+              </a:defRPr>
+            </a:lvl6pPr>
+            <a:lvl7pPr>
+              <a:defRPr sz="900" b="0">
+                <a:solidFill>
+                  <a:srgbClr val="637D94"/>
+                </a:solidFill>
+                <a:latin typeface="Aptos"/>
+              </a:defRPr>
+            </a:lvl7pPr>
+            <a:lvl8pPr>
+              <a:defRPr sz="900" b="0">
+                <a:solidFill>
+                  <a:srgbClr val="637D94"/>
+                </a:solidFill>
+                <a:latin typeface="Aptos"/>
+              </a:defRPr>
+            </a:lvl8pPr>
+            <a:lvl9pPr>
+              <a:defRPr sz="900" b="0">
+                <a:solidFill>
+                  <a:srgbClr val="637D94"/>
+                </a:solidFill>
+                <a:latin typeface="Aptos"/>
+              </a:defRPr>
+            </a:lvl9pPr>
+          </a:lstStyle>
           <a:p>
             <a:pPr>
               <a:defRPr sz="900" b="0">
@@ -1880,20 +3338,89 @@
         </p:nvSpPr>
         <p:spPr>
           <a:xfrm>
-            <a:off x="722313" y="3305176"/>
-            <a:ext cx="7772400" cy="1021556"/>
+            <a:off x="722313" y="137160"/>
+            <a:ext cx="7772400" cy="822960"/>
           </a:xfrm>
         </p:spPr>
         <p:txBody>
           <a:bodyPr anchor="t"/>
           <a:lstStyle>
             <a:lvl1pPr algn="l">
-              <a:defRPr sz="3000" b="1" cap="all"/>
+              <a:defRPr sz="2600" b="1">
+                <a:solidFill>
+                  <a:srgbClr val="0C2440"/>
+                </a:solidFill>
+                <a:latin typeface="Aptos Display"/>
+              </a:defRPr>
             </a:lvl1pPr>
+            <a:lvl2pPr>
+              <a:defRPr sz="2600" b="1">
+                <a:solidFill>
+                  <a:srgbClr val="0C2440"/>
+                </a:solidFill>
+                <a:latin typeface="Aptos Display"/>
+              </a:defRPr>
+            </a:lvl2pPr>
+            <a:lvl3pPr>
+              <a:defRPr sz="2600" b="1">
+                <a:solidFill>
+                  <a:srgbClr val="0C2440"/>
+                </a:solidFill>
+                <a:latin typeface="Aptos Display"/>
+              </a:defRPr>
+            </a:lvl3pPr>
+            <a:lvl4pPr>
+              <a:defRPr sz="2600" b="1">
+                <a:solidFill>
+                  <a:srgbClr val="0C2440"/>
+                </a:solidFill>
+                <a:latin typeface="Aptos Display"/>
+              </a:defRPr>
+            </a:lvl4pPr>
+            <a:lvl5pPr>
+              <a:defRPr sz="2600" b="1">
+                <a:solidFill>
+                  <a:srgbClr val="0C2440"/>
+                </a:solidFill>
+                <a:latin typeface="Aptos Display"/>
+              </a:defRPr>
+            </a:lvl5pPr>
+            <a:lvl6pPr>
+              <a:defRPr sz="2600" b="1">
+                <a:solidFill>
+                  <a:srgbClr val="0C2440"/>
+                </a:solidFill>
+                <a:latin typeface="Aptos Display"/>
+              </a:defRPr>
+            </a:lvl6pPr>
+            <a:lvl7pPr>
+              <a:defRPr sz="2600" b="1">
+                <a:solidFill>
+                  <a:srgbClr val="0C2440"/>
+                </a:solidFill>
+                <a:latin typeface="Aptos Display"/>
+              </a:defRPr>
+            </a:lvl7pPr>
+            <a:lvl8pPr>
+              <a:defRPr sz="2600" b="1">
+                <a:solidFill>
+                  <a:srgbClr val="0C2440"/>
+                </a:solidFill>
+                <a:latin typeface="Aptos Display"/>
+              </a:defRPr>
+            </a:lvl8pPr>
+            <a:lvl9pPr>
+              <a:defRPr sz="2600" b="1">
+                <a:solidFill>
+                  <a:srgbClr val="0C2440"/>
+                </a:solidFill>
+                <a:latin typeface="Aptos Display"/>
+              </a:defRPr>
+            </a:lvl9pPr>
           </a:lstStyle>
           <a:p>
             <a:pPr>
-              <a:defRPr sz="3100" b="1">
+              <a:defRPr sz="2600" b="1">
                 <a:solidFill>
                   <a:srgbClr val="0C2440"/>
                 </a:solidFill>
@@ -1919,8 +3446,8 @@
         </p:nvSpPr>
         <p:spPr>
           <a:xfrm>
-            <a:off x="722313" y="2180035"/>
-            <a:ext cx="7772400" cy="1125140"/>
+            <a:off x="722313" y="1234440"/>
+            <a:ext cx="7772400" cy="3657600"/>
           </a:xfrm>
         </p:spPr>
         <p:txBody>
@@ -1928,92 +3455,83 @@
           <a:lstStyle>
             <a:lvl1pPr marL="0" indent="0">
               <a:buNone/>
-              <a:defRPr sz="1500">
-                <a:solidFill>
-                  <a:schemeClr val="tx1">
-                    <a:tint val="75000"/>
-                  </a:schemeClr>
-                </a:solidFill>
+              <a:defRPr sz="1900" b="0">
+                <a:solidFill>
+                  <a:srgbClr val="243A50"/>
+                </a:solidFill>
+                <a:latin typeface="Aptos"/>
               </a:defRPr>
             </a:lvl1pPr>
             <a:lvl2pPr marL="342900" indent="0">
               <a:buNone/>
-              <a:defRPr sz="1350">
-                <a:solidFill>
-                  <a:schemeClr val="tx1">
-                    <a:tint val="75000"/>
-                  </a:schemeClr>
-                </a:solidFill>
+              <a:defRPr sz="1900" b="0">
+                <a:solidFill>
+                  <a:srgbClr val="243A50"/>
+                </a:solidFill>
+                <a:latin typeface="Aptos"/>
               </a:defRPr>
             </a:lvl2pPr>
             <a:lvl3pPr marL="685800" indent="0">
               <a:buNone/>
-              <a:defRPr sz="1200">
-                <a:solidFill>
-                  <a:schemeClr val="tx1">
-                    <a:tint val="75000"/>
-                  </a:schemeClr>
-                </a:solidFill>
+              <a:defRPr sz="1900" b="0">
+                <a:solidFill>
+                  <a:srgbClr val="243A50"/>
+                </a:solidFill>
+                <a:latin typeface="Aptos"/>
               </a:defRPr>
             </a:lvl3pPr>
             <a:lvl4pPr marL="1028700" indent="0">
               <a:buNone/>
-              <a:defRPr sz="1050">
-                <a:solidFill>
-                  <a:schemeClr val="tx1">
-                    <a:tint val="75000"/>
-                  </a:schemeClr>
-                </a:solidFill>
+              <a:defRPr sz="1900" b="0">
+                <a:solidFill>
+                  <a:srgbClr val="243A50"/>
+                </a:solidFill>
+                <a:latin typeface="Aptos"/>
               </a:defRPr>
             </a:lvl4pPr>
             <a:lvl5pPr marL="1371600" indent="0">
               <a:buNone/>
-              <a:defRPr sz="1050">
-                <a:solidFill>
-                  <a:schemeClr val="tx1">
-                    <a:tint val="75000"/>
-                  </a:schemeClr>
-                </a:solidFill>
+              <a:defRPr sz="1900" b="0">
+                <a:solidFill>
+                  <a:srgbClr val="243A50"/>
+                </a:solidFill>
+                <a:latin typeface="Aptos"/>
               </a:defRPr>
             </a:lvl5pPr>
             <a:lvl6pPr marL="1714500" indent="0">
               <a:buNone/>
-              <a:defRPr sz="1050">
-                <a:solidFill>
-                  <a:schemeClr val="tx1">
-                    <a:tint val="75000"/>
-                  </a:schemeClr>
-                </a:solidFill>
+              <a:defRPr sz="1900" b="0">
+                <a:solidFill>
+                  <a:srgbClr val="243A50"/>
+                </a:solidFill>
+                <a:latin typeface="Aptos"/>
               </a:defRPr>
             </a:lvl6pPr>
             <a:lvl7pPr marL="2057400" indent="0">
               <a:buNone/>
-              <a:defRPr sz="1050">
-                <a:solidFill>
-                  <a:schemeClr val="tx1">
-                    <a:tint val="75000"/>
-                  </a:schemeClr>
-                </a:solidFill>
+              <a:defRPr sz="1900" b="0">
+                <a:solidFill>
+                  <a:srgbClr val="243A50"/>
+                </a:solidFill>
+                <a:latin typeface="Aptos"/>
               </a:defRPr>
             </a:lvl7pPr>
             <a:lvl8pPr marL="2400300" indent="0">
               <a:buNone/>
-              <a:defRPr sz="1050">
-                <a:solidFill>
-                  <a:schemeClr val="tx1">
-                    <a:tint val="75000"/>
-                  </a:schemeClr>
-                </a:solidFill>
+              <a:defRPr sz="1900" b="0">
+                <a:solidFill>
+                  <a:srgbClr val="243A50"/>
+                </a:solidFill>
+                <a:latin typeface="Aptos"/>
               </a:defRPr>
             </a:lvl8pPr>
             <a:lvl9pPr marL="2743200" indent="0">
               <a:buNone/>
-              <a:defRPr sz="1050">
-                <a:solidFill>
-                  <a:schemeClr val="tx1">
-                    <a:tint val="75000"/>
-                  </a:schemeClr>
-                </a:solidFill>
+              <a:defRPr sz="1900" b="0">
+                <a:solidFill>
+                  <a:srgbClr val="243A50"/>
+                </a:solidFill>
+                <a:latin typeface="Aptos"/>
               </a:defRPr>
             </a:lvl9pPr>
           </a:lstStyle>
@@ -2043,10 +3561,88 @@
             <p:ph type="dt" sz="half" idx="10"/>
           </p:nvPr>
         </p:nvSpPr>
-        <p:spPr/>
+        <p:spPr>
+          <a:xfrm>
+            <a:off x="457200" y="0"/>
+            <a:ext cx="2133600" cy="0"/>
+          </a:xfrm>
+        </p:spPr>
         <p:txBody>
           <a:bodyPr/>
-          <a:lstStyle/>
+          <a:lstStyle>
+            <a:lvl1pPr>
+              <a:defRPr sz="900" b="0">
+                <a:solidFill>
+                  <a:srgbClr val="637D94"/>
+                </a:solidFill>
+                <a:latin typeface="Aptos"/>
+              </a:defRPr>
+            </a:lvl1pPr>
+            <a:lvl2pPr>
+              <a:defRPr sz="900" b="0">
+                <a:solidFill>
+                  <a:srgbClr val="637D94"/>
+                </a:solidFill>
+                <a:latin typeface="Aptos"/>
+              </a:defRPr>
+            </a:lvl2pPr>
+            <a:lvl3pPr>
+              <a:defRPr sz="900" b="0">
+                <a:solidFill>
+                  <a:srgbClr val="637D94"/>
+                </a:solidFill>
+                <a:latin typeface="Aptos"/>
+              </a:defRPr>
+            </a:lvl3pPr>
+            <a:lvl4pPr>
+              <a:defRPr sz="900" b="0">
+                <a:solidFill>
+                  <a:srgbClr val="637D94"/>
+                </a:solidFill>
+                <a:latin typeface="Aptos"/>
+              </a:defRPr>
+            </a:lvl4pPr>
+            <a:lvl5pPr>
+              <a:defRPr sz="900" b="0">
+                <a:solidFill>
+                  <a:srgbClr val="637D94"/>
+                </a:solidFill>
+                <a:latin typeface="Aptos"/>
+              </a:defRPr>
+            </a:lvl5pPr>
+            <a:lvl6pPr>
+              <a:defRPr sz="900" b="0">
+                <a:solidFill>
+                  <a:srgbClr val="637D94"/>
+                </a:solidFill>
+                <a:latin typeface="Aptos"/>
+              </a:defRPr>
+            </a:lvl6pPr>
+            <a:lvl7pPr>
+              <a:defRPr sz="900" b="0">
+                <a:solidFill>
+                  <a:srgbClr val="637D94"/>
+                </a:solidFill>
+                <a:latin typeface="Aptos"/>
+              </a:defRPr>
+            </a:lvl7pPr>
+            <a:lvl8pPr>
+              <a:defRPr sz="900" b="0">
+                <a:solidFill>
+                  <a:srgbClr val="637D94"/>
+                </a:solidFill>
+                <a:latin typeface="Aptos"/>
+              </a:defRPr>
+            </a:lvl8pPr>
+            <a:lvl9pPr>
+              <a:defRPr sz="900" b="0">
+                <a:solidFill>
+                  <a:srgbClr val="637D94"/>
+                </a:solidFill>
+                <a:latin typeface="Aptos"/>
+              </a:defRPr>
+            </a:lvl9pPr>
+          </a:lstStyle>
           <a:p>
             <a:pPr>
               <a:defRPr sz="900" b="0">
@@ -2074,10 +3670,88 @@
             <p:ph type="ftr" sz="quarter" idx="11"/>
           </p:nvPr>
         </p:nvSpPr>
-        <p:spPr/>
+        <p:spPr>
+          <a:xfrm>
+            <a:off x="3124200" y="0"/>
+            <a:ext cx="2895600" cy="0"/>
+          </a:xfrm>
+        </p:spPr>
         <p:txBody>
           <a:bodyPr/>
-          <a:lstStyle/>
+          <a:lstStyle>
+            <a:lvl1pPr>
+              <a:defRPr sz="900" b="0">
+                <a:solidFill>
+                  <a:srgbClr val="637D94"/>
+                </a:solidFill>
+                <a:latin typeface="Aptos"/>
+              </a:defRPr>
+            </a:lvl1pPr>
+            <a:lvl2pPr>
+              <a:defRPr sz="900" b="0">
+                <a:solidFill>
+                  <a:srgbClr val="637D94"/>
+                </a:solidFill>
+                <a:latin typeface="Aptos"/>
+              </a:defRPr>
+            </a:lvl2pPr>
+            <a:lvl3pPr>
+              <a:defRPr sz="900" b="0">
+                <a:solidFill>
+                  <a:srgbClr val="637D94"/>
+                </a:solidFill>
+                <a:latin typeface="Aptos"/>
+              </a:defRPr>
+            </a:lvl3pPr>
+            <a:lvl4pPr>
+              <a:defRPr sz="900" b="0">
+                <a:solidFill>
+                  <a:srgbClr val="637D94"/>
+                </a:solidFill>
+                <a:latin typeface="Aptos"/>
+              </a:defRPr>
+            </a:lvl4pPr>
+            <a:lvl5pPr>
+              <a:defRPr sz="900" b="0">
+                <a:solidFill>
+                  <a:srgbClr val="637D94"/>
+                </a:solidFill>
+                <a:latin typeface="Aptos"/>
+              </a:defRPr>
+            </a:lvl5pPr>
+            <a:lvl6pPr>
+              <a:defRPr sz="900" b="0">
+                <a:solidFill>
+                  <a:srgbClr val="637D94"/>
+                </a:solidFill>
+                <a:latin typeface="Aptos"/>
+              </a:defRPr>
+            </a:lvl6pPr>
+            <a:lvl7pPr>
+              <a:defRPr sz="900" b="0">
+                <a:solidFill>
+                  <a:srgbClr val="637D94"/>
+                </a:solidFill>
+                <a:latin typeface="Aptos"/>
+              </a:defRPr>
+            </a:lvl7pPr>
+            <a:lvl8pPr>
+              <a:defRPr sz="900" b="0">
+                <a:solidFill>
+                  <a:srgbClr val="637D94"/>
+                </a:solidFill>
+                <a:latin typeface="Aptos"/>
+              </a:defRPr>
+            </a:lvl8pPr>
+            <a:lvl9pPr>
+              <a:defRPr sz="900" b="0">
+                <a:solidFill>
+                  <a:srgbClr val="637D94"/>
+                </a:solidFill>
+                <a:latin typeface="Aptos"/>
+              </a:defRPr>
+            </a:lvl9pPr>
+          </a:lstStyle>
           <a:p>
             <a:pPr>
               <a:defRPr sz="900" b="0">
@@ -2101,10 +3775,88 @@
             <p:ph type="sldNum" sz="quarter" idx="12"/>
           </p:nvPr>
         </p:nvSpPr>
-        <p:spPr/>
+        <p:spPr>
+          <a:xfrm>
+            <a:off x="6553200" y="0"/>
+            <a:ext cx="2133600" cy="0"/>
+          </a:xfrm>
+        </p:spPr>
         <p:txBody>
           <a:bodyPr/>
-          <a:lstStyle/>
+          <a:lstStyle>
+            <a:lvl1pPr>
+              <a:defRPr sz="900" b="0">
+                <a:solidFill>
+                  <a:srgbClr val="637D94"/>
+                </a:solidFill>
+                <a:latin typeface="Aptos"/>
+              </a:defRPr>
+            </a:lvl1pPr>
+            <a:lvl2pPr>
+              <a:defRPr sz="900" b="0">
+                <a:solidFill>
+                  <a:srgbClr val="637D94"/>
+                </a:solidFill>
+                <a:latin typeface="Aptos"/>
+              </a:defRPr>
+            </a:lvl2pPr>
+            <a:lvl3pPr>
+              <a:defRPr sz="900" b="0">
+                <a:solidFill>
+                  <a:srgbClr val="637D94"/>
+                </a:solidFill>
+                <a:latin typeface="Aptos"/>
+              </a:defRPr>
+            </a:lvl3pPr>
+            <a:lvl4pPr>
+              <a:defRPr sz="900" b="0">
+                <a:solidFill>
+                  <a:srgbClr val="637D94"/>
+                </a:solidFill>
+                <a:latin typeface="Aptos"/>
+              </a:defRPr>
+            </a:lvl4pPr>
+            <a:lvl5pPr>
+              <a:defRPr sz="900" b="0">
+                <a:solidFill>
+                  <a:srgbClr val="637D94"/>
+                </a:solidFill>
+                <a:latin typeface="Aptos"/>
+              </a:defRPr>
+            </a:lvl5pPr>
+            <a:lvl6pPr>
+              <a:defRPr sz="900" b="0">
+                <a:solidFill>
+                  <a:srgbClr val="637D94"/>
+                </a:solidFill>
+                <a:latin typeface="Aptos"/>
+              </a:defRPr>
+            </a:lvl6pPr>
+            <a:lvl7pPr>
+              <a:defRPr sz="900" b="0">
+                <a:solidFill>
+                  <a:srgbClr val="637D94"/>
+                </a:solidFill>
+                <a:latin typeface="Aptos"/>
+              </a:defRPr>
+            </a:lvl7pPr>
+            <a:lvl8pPr>
+              <a:defRPr sz="900" b="0">
+                <a:solidFill>
+                  <a:srgbClr val="637D94"/>
+                </a:solidFill>
+                <a:latin typeface="Aptos"/>
+              </a:defRPr>
+            </a:lvl8pPr>
+            <a:lvl9pPr>
+              <a:defRPr sz="900" b="0">
+                <a:solidFill>
+                  <a:srgbClr val="637D94"/>
+                </a:solidFill>
+                <a:latin typeface="Aptos"/>
+              </a:defRPr>
+            </a:lvl9pPr>
+          </a:lstStyle>
           <a:p>
             <a:pPr>
               <a:defRPr sz="900" b="0">
@@ -2213,13 +3965,91 @@
             <p:ph type="title"/>
           </p:nvPr>
         </p:nvSpPr>
-        <p:spPr/>
+        <p:spPr>
+          <a:xfrm>
+            <a:off x="457200" y="137160"/>
+            <a:ext cx="8229600" cy="822960"/>
+          </a:xfrm>
+        </p:spPr>
         <p:txBody>
           <a:bodyPr/>
-          <a:lstStyle/>
+          <a:lstStyle>
+            <a:lvl1pPr>
+              <a:defRPr sz="2600" b="1">
+                <a:solidFill>
+                  <a:srgbClr val="0C2440"/>
+                </a:solidFill>
+                <a:latin typeface="Aptos Display"/>
+              </a:defRPr>
+            </a:lvl1pPr>
+            <a:lvl2pPr>
+              <a:defRPr sz="2600" b="1">
+                <a:solidFill>
+                  <a:srgbClr val="0C2440"/>
+                </a:solidFill>
+                <a:latin typeface="Aptos Display"/>
+              </a:defRPr>
+            </a:lvl2pPr>
+            <a:lvl3pPr>
+              <a:defRPr sz="2600" b="1">
+                <a:solidFill>
+                  <a:srgbClr val="0C2440"/>
+                </a:solidFill>
+                <a:latin typeface="Aptos Display"/>
+              </a:defRPr>
+            </a:lvl3pPr>
+            <a:lvl4pPr>
+              <a:defRPr sz="2600" b="1">
+                <a:solidFill>
+                  <a:srgbClr val="0C2440"/>
+                </a:solidFill>
+                <a:latin typeface="Aptos Display"/>
+              </a:defRPr>
+            </a:lvl4pPr>
+            <a:lvl5pPr>
+              <a:defRPr sz="2600" b="1">
+                <a:solidFill>
+                  <a:srgbClr val="0C2440"/>
+                </a:solidFill>
+                <a:latin typeface="Aptos Display"/>
+              </a:defRPr>
+            </a:lvl5pPr>
+            <a:lvl6pPr>
+              <a:defRPr sz="2600" b="1">
+                <a:solidFill>
+                  <a:srgbClr val="0C2440"/>
+                </a:solidFill>
+                <a:latin typeface="Aptos Display"/>
+              </a:defRPr>
+            </a:lvl6pPr>
+            <a:lvl7pPr>
+              <a:defRPr sz="2600" b="1">
+                <a:solidFill>
+                  <a:srgbClr val="0C2440"/>
+                </a:solidFill>
+                <a:latin typeface="Aptos Display"/>
+              </a:defRPr>
+            </a:lvl7pPr>
+            <a:lvl8pPr>
+              <a:defRPr sz="2600" b="1">
+                <a:solidFill>
+                  <a:srgbClr val="0C2440"/>
+                </a:solidFill>
+                <a:latin typeface="Aptos Display"/>
+              </a:defRPr>
+            </a:lvl8pPr>
+            <a:lvl9pPr>
+              <a:defRPr sz="2600" b="1">
+                <a:solidFill>
+                  <a:srgbClr val="0C2440"/>
+                </a:solidFill>
+                <a:latin typeface="Aptos Display"/>
+              </a:defRPr>
+            </a:lvl9pPr>
+          </a:lstStyle>
           <a:p>
             <a:pPr>
-              <a:defRPr sz="3100" b="1">
+              <a:defRPr sz="2600" b="1">
                 <a:solidFill>
                   <a:srgbClr val="0C2440"/>
                 </a:solidFill>
@@ -2245,39 +4075,84 @@
         </p:nvSpPr>
         <p:spPr>
           <a:xfrm>
-            <a:off x="457200" y="1200151"/>
-            <a:ext cx="4038600" cy="3394472"/>
+            <a:off x="457200" y="1234440"/>
+            <a:ext cx="4038600" cy="3657600"/>
           </a:xfrm>
         </p:spPr>
         <p:txBody>
           <a:bodyPr/>
           <a:lstStyle>
             <a:lvl1pPr>
-              <a:defRPr sz="2100"/>
+              <a:defRPr sz="1900" b="0">
+                <a:solidFill>
+                  <a:srgbClr val="243A50"/>
+                </a:solidFill>
+                <a:latin typeface="Aptos"/>
+              </a:defRPr>
             </a:lvl1pPr>
             <a:lvl2pPr>
-              <a:defRPr sz="1800"/>
+              <a:defRPr sz="1900" b="0">
+                <a:solidFill>
+                  <a:srgbClr val="243A50"/>
+                </a:solidFill>
+                <a:latin typeface="Aptos"/>
+              </a:defRPr>
             </a:lvl2pPr>
             <a:lvl3pPr>
-              <a:defRPr sz="1500"/>
+              <a:defRPr sz="1900" b="0">
+                <a:solidFill>
+                  <a:srgbClr val="243A50"/>
+                </a:solidFill>
+                <a:latin typeface="Aptos"/>
+              </a:defRPr>
             </a:lvl3pPr>
             <a:lvl4pPr>
-              <a:defRPr sz="1350"/>
+              <a:defRPr sz="1900" b="0">
+                <a:solidFill>
+                  <a:srgbClr val="243A50"/>
+                </a:solidFill>
+                <a:latin typeface="Aptos"/>
+              </a:defRPr>
             </a:lvl4pPr>
             <a:lvl5pPr>
-              <a:defRPr sz="1350"/>
+              <a:defRPr sz="1900" b="0">
+                <a:solidFill>
+                  <a:srgbClr val="243A50"/>
+                </a:solidFill>
+                <a:latin typeface="Aptos"/>
+              </a:defRPr>
             </a:lvl5pPr>
             <a:lvl6pPr>
-              <a:defRPr sz="1350"/>
+              <a:defRPr sz="1900" b="0">
+                <a:solidFill>
+                  <a:srgbClr val="243A50"/>
+                </a:solidFill>
+                <a:latin typeface="Aptos"/>
+              </a:defRPr>
             </a:lvl6pPr>
             <a:lvl7pPr>
-              <a:defRPr sz="1350"/>
+              <a:defRPr sz="1900" b="0">
+                <a:solidFill>
+                  <a:srgbClr val="243A50"/>
+                </a:solidFill>
+                <a:latin typeface="Aptos"/>
+              </a:defRPr>
             </a:lvl7pPr>
             <a:lvl8pPr>
-              <a:defRPr sz="1350"/>
+              <a:defRPr sz="1900" b="0">
+                <a:solidFill>
+                  <a:srgbClr val="243A50"/>
+                </a:solidFill>
+                <a:latin typeface="Aptos"/>
+              </a:defRPr>
             </a:lvl8pPr>
             <a:lvl9pPr>
-              <a:defRPr sz="1350"/>
+              <a:defRPr sz="1900" b="0">
+                <a:solidFill>
+                  <a:srgbClr val="243A50"/>
+                </a:solidFill>
+                <a:latin typeface="Aptos"/>
+              </a:defRPr>
             </a:lvl9pPr>
           </a:lstStyle>
           <a:p>
@@ -2336,39 +4211,84 @@
         </p:nvSpPr>
         <p:spPr>
           <a:xfrm>
-            <a:off x="4648200" y="1200151"/>
-            <a:ext cx="4038600" cy="3394472"/>
+            <a:off x="4648200" y="1234440"/>
+            <a:ext cx="4038600" cy="3657600"/>
           </a:xfrm>
         </p:spPr>
         <p:txBody>
           <a:bodyPr/>
           <a:lstStyle>
             <a:lvl1pPr>
-              <a:defRPr sz="2100"/>
+              <a:defRPr sz="1900" b="0">
+                <a:solidFill>
+                  <a:srgbClr val="243A50"/>
+                </a:solidFill>
+                <a:latin typeface="Aptos"/>
+              </a:defRPr>
             </a:lvl1pPr>
             <a:lvl2pPr>
-              <a:defRPr sz="1800"/>
+              <a:defRPr sz="1900" b="0">
+                <a:solidFill>
+                  <a:srgbClr val="243A50"/>
+                </a:solidFill>
+                <a:latin typeface="Aptos"/>
+              </a:defRPr>
             </a:lvl2pPr>
             <a:lvl3pPr>
-              <a:defRPr sz="1500"/>
+              <a:defRPr sz="1900" b="0">
+                <a:solidFill>
+                  <a:srgbClr val="243A50"/>
+                </a:solidFill>
+                <a:latin typeface="Aptos"/>
+              </a:defRPr>
             </a:lvl3pPr>
             <a:lvl4pPr>
-              <a:defRPr sz="1350"/>
+              <a:defRPr sz="1900" b="0">
+                <a:solidFill>
+                  <a:srgbClr val="243A50"/>
+                </a:solidFill>
+                <a:latin typeface="Aptos"/>
+              </a:defRPr>
             </a:lvl4pPr>
             <a:lvl5pPr>
-              <a:defRPr sz="1350"/>
+              <a:defRPr sz="1900" b="0">
+                <a:solidFill>
+                  <a:srgbClr val="243A50"/>
+                </a:solidFill>
+                <a:latin typeface="Aptos"/>
+              </a:defRPr>
             </a:lvl5pPr>
             <a:lvl6pPr>
-              <a:defRPr sz="1350"/>
+              <a:defRPr sz="1900" b="0">
+                <a:solidFill>
+                  <a:srgbClr val="243A50"/>
+                </a:solidFill>
+                <a:latin typeface="Aptos"/>
+              </a:defRPr>
             </a:lvl6pPr>
             <a:lvl7pPr>
-              <a:defRPr sz="1350"/>
+              <a:defRPr sz="1900" b="0">
+                <a:solidFill>
+                  <a:srgbClr val="243A50"/>
+                </a:solidFill>
+                <a:latin typeface="Aptos"/>
+              </a:defRPr>
             </a:lvl7pPr>
             <a:lvl8pPr>
-              <a:defRPr sz="1350"/>
+              <a:defRPr sz="1900" b="0">
+                <a:solidFill>
+                  <a:srgbClr val="243A50"/>
+                </a:solidFill>
+                <a:latin typeface="Aptos"/>
+              </a:defRPr>
             </a:lvl8pPr>
             <a:lvl9pPr>
-              <a:defRPr sz="1350"/>
+              <a:defRPr sz="1900" b="0">
+                <a:solidFill>
+                  <a:srgbClr val="243A50"/>
+                </a:solidFill>
+                <a:latin typeface="Aptos"/>
+              </a:defRPr>
             </a:lvl9pPr>
           </a:lstStyle>
           <a:p>
@@ -2425,10 +4345,88 @@
             <p:ph type="dt" sz="half" idx="10"/>
           </p:nvPr>
         </p:nvSpPr>
-        <p:spPr/>
+        <p:spPr>
+          <a:xfrm>
+            <a:off x="457200" y="0"/>
+            <a:ext cx="2133600" cy="0"/>
+          </a:xfrm>
+        </p:spPr>
         <p:txBody>
           <a:bodyPr/>
-          <a:lstStyle/>
+          <a:lstStyle>
+            <a:lvl1pPr>
+              <a:defRPr sz="900" b="0">
+                <a:solidFill>
+                  <a:srgbClr val="637D94"/>
+                </a:solidFill>
+                <a:latin typeface="Aptos"/>
+              </a:defRPr>
+            </a:lvl1pPr>
+            <a:lvl2pPr>
+              <a:defRPr sz="900" b="0">
+                <a:solidFill>
+                  <a:srgbClr val="637D94"/>
+                </a:solidFill>
+                <a:latin typeface="Aptos"/>
+              </a:defRPr>
+            </a:lvl2pPr>
+            <a:lvl3pPr>
+              <a:defRPr sz="900" b="0">
+                <a:solidFill>
+                  <a:srgbClr val="637D94"/>
+                </a:solidFill>
+                <a:latin typeface="Aptos"/>
+              </a:defRPr>
+            </a:lvl3pPr>
+            <a:lvl4pPr>
+              <a:defRPr sz="900" b="0">
+                <a:solidFill>
+                  <a:srgbClr val="637D94"/>
+                </a:solidFill>
+                <a:latin typeface="Aptos"/>
+              </a:defRPr>
+            </a:lvl4pPr>
+            <a:lvl5pPr>
+              <a:defRPr sz="900" b="0">
+                <a:solidFill>
+                  <a:srgbClr val="637D94"/>
+                </a:solidFill>
+                <a:latin typeface="Aptos"/>
+              </a:defRPr>
+            </a:lvl5pPr>
+            <a:lvl6pPr>
+              <a:defRPr sz="900" b="0">
+                <a:solidFill>
+                  <a:srgbClr val="637D94"/>
+                </a:solidFill>
+                <a:latin typeface="Aptos"/>
+              </a:defRPr>
+            </a:lvl6pPr>
+            <a:lvl7pPr>
+              <a:defRPr sz="900" b="0">
+                <a:solidFill>
+                  <a:srgbClr val="637D94"/>
+                </a:solidFill>
+                <a:latin typeface="Aptos"/>
+              </a:defRPr>
+            </a:lvl7pPr>
+            <a:lvl8pPr>
+              <a:defRPr sz="900" b="0">
+                <a:solidFill>
+                  <a:srgbClr val="637D94"/>
+                </a:solidFill>
+                <a:latin typeface="Aptos"/>
+              </a:defRPr>
+            </a:lvl8pPr>
+            <a:lvl9pPr>
+              <a:defRPr sz="900" b="0">
+                <a:solidFill>
+                  <a:srgbClr val="637D94"/>
+                </a:solidFill>
+                <a:latin typeface="Aptos"/>
+              </a:defRPr>
+            </a:lvl9pPr>
+          </a:lstStyle>
           <a:p>
             <a:pPr>
               <a:defRPr sz="900" b="0">
@@ -2456,10 +4454,88 @@
             <p:ph type="ftr" sz="quarter" idx="11"/>
           </p:nvPr>
         </p:nvSpPr>
-        <p:spPr/>
+        <p:spPr>
+          <a:xfrm>
+            <a:off x="3124200" y="0"/>
+            <a:ext cx="2895600" cy="0"/>
+          </a:xfrm>
+        </p:spPr>
         <p:txBody>
           <a:bodyPr/>
-          <a:lstStyle/>
+          <a:lstStyle>
+            <a:lvl1pPr>
+              <a:defRPr sz="900" b="0">
+                <a:solidFill>
+                  <a:srgbClr val="637D94"/>
+                </a:solidFill>
+                <a:latin typeface="Aptos"/>
+              </a:defRPr>
+            </a:lvl1pPr>
+            <a:lvl2pPr>
+              <a:defRPr sz="900" b="0">
+                <a:solidFill>
+                  <a:srgbClr val="637D94"/>
+                </a:solidFill>
+                <a:latin typeface="Aptos"/>
+              </a:defRPr>
+            </a:lvl2pPr>
+            <a:lvl3pPr>
+              <a:defRPr sz="900" b="0">
+                <a:solidFill>
+                  <a:srgbClr val="637D94"/>
+                </a:solidFill>
+                <a:latin typeface="Aptos"/>
+              </a:defRPr>
+            </a:lvl3pPr>
+            <a:lvl4pPr>
+              <a:defRPr sz="900" b="0">
+                <a:solidFill>
+                  <a:srgbClr val="637D94"/>
+                </a:solidFill>
+                <a:latin typeface="Aptos"/>
+              </a:defRPr>
+            </a:lvl4pPr>
+            <a:lvl5pPr>
+              <a:defRPr sz="900" b="0">
+                <a:solidFill>
+                  <a:srgbClr val="637D94"/>
+                </a:solidFill>
+                <a:latin typeface="Aptos"/>
+              </a:defRPr>
+            </a:lvl5pPr>
+            <a:lvl6pPr>
+              <a:defRPr sz="900" b="0">
+                <a:solidFill>
+                  <a:srgbClr val="637D94"/>
+                </a:solidFill>
+                <a:latin typeface="Aptos"/>
+              </a:defRPr>
+            </a:lvl6pPr>
+            <a:lvl7pPr>
+              <a:defRPr sz="900" b="0">
+                <a:solidFill>
+                  <a:srgbClr val="637D94"/>
+                </a:solidFill>
+                <a:latin typeface="Aptos"/>
+              </a:defRPr>
+            </a:lvl7pPr>
+            <a:lvl8pPr>
+              <a:defRPr sz="900" b="0">
+                <a:solidFill>
+                  <a:srgbClr val="637D94"/>
+                </a:solidFill>
+                <a:latin typeface="Aptos"/>
+              </a:defRPr>
+            </a:lvl8pPr>
+            <a:lvl9pPr>
+              <a:defRPr sz="900" b="0">
+                <a:solidFill>
+                  <a:srgbClr val="637D94"/>
+                </a:solidFill>
+                <a:latin typeface="Aptos"/>
+              </a:defRPr>
+            </a:lvl9pPr>
+          </a:lstStyle>
           <a:p>
             <a:pPr>
               <a:defRPr sz="900" b="0">
@@ -2483,10 +4559,88 @@
             <p:ph type="sldNum" sz="quarter" idx="12"/>
           </p:nvPr>
         </p:nvSpPr>
-        <p:spPr/>
+        <p:spPr>
+          <a:xfrm>
+            <a:off x="6553200" y="0"/>
+            <a:ext cx="2133600" cy="0"/>
+          </a:xfrm>
+        </p:spPr>
         <p:txBody>
           <a:bodyPr/>
-          <a:lstStyle/>
+          <a:lstStyle>
+            <a:lvl1pPr>
+              <a:defRPr sz="900" b="0">
+                <a:solidFill>
+                  <a:srgbClr val="637D94"/>
+                </a:solidFill>
+                <a:latin typeface="Aptos"/>
+              </a:defRPr>
+            </a:lvl1pPr>
+            <a:lvl2pPr>
+              <a:defRPr sz="900" b="0">
+                <a:solidFill>
+                  <a:srgbClr val="637D94"/>
+                </a:solidFill>
+                <a:latin typeface="Aptos"/>
+              </a:defRPr>
+            </a:lvl2pPr>
+            <a:lvl3pPr>
+              <a:defRPr sz="900" b="0">
+                <a:solidFill>
+                  <a:srgbClr val="637D94"/>
+                </a:solidFill>
+                <a:latin typeface="Aptos"/>
+              </a:defRPr>
+            </a:lvl3pPr>
+            <a:lvl4pPr>
+              <a:defRPr sz="900" b="0">
+                <a:solidFill>
+                  <a:srgbClr val="637D94"/>
+                </a:solidFill>
+                <a:latin typeface="Aptos"/>
+              </a:defRPr>
+            </a:lvl4pPr>
+            <a:lvl5pPr>
+              <a:defRPr sz="900" b="0">
+                <a:solidFill>
+                  <a:srgbClr val="637D94"/>
+                </a:solidFill>
+                <a:latin typeface="Aptos"/>
+              </a:defRPr>
+            </a:lvl5pPr>
+            <a:lvl6pPr>
+              <a:defRPr sz="900" b="0">
+                <a:solidFill>
+                  <a:srgbClr val="637D94"/>
+                </a:solidFill>
+                <a:latin typeface="Aptos"/>
+              </a:defRPr>
+            </a:lvl6pPr>
+            <a:lvl7pPr>
+              <a:defRPr sz="900" b="0">
+                <a:solidFill>
+                  <a:srgbClr val="637D94"/>
+                </a:solidFill>
+                <a:latin typeface="Aptos"/>
+              </a:defRPr>
+            </a:lvl7pPr>
+            <a:lvl8pPr>
+              <a:defRPr sz="900" b="0">
+                <a:solidFill>
+                  <a:srgbClr val="637D94"/>
+                </a:solidFill>
+                <a:latin typeface="Aptos"/>
+              </a:defRPr>
+            </a:lvl8pPr>
+            <a:lvl9pPr>
+              <a:defRPr sz="900" b="0">
+                <a:solidFill>
+                  <a:srgbClr val="637D94"/>
+                </a:solidFill>
+                <a:latin typeface="Aptos"/>
+              </a:defRPr>
+            </a:lvl9pPr>
+          </a:lstStyle>
           <a:p>
             <a:pPr>
               <a:defRPr sz="900" b="0">
@@ -2595,17 +4749,91 @@
             <p:ph type="title"/>
           </p:nvPr>
         </p:nvSpPr>
-        <p:spPr/>
+        <p:spPr>
+          <a:xfrm>
+            <a:off x="457200" y="137160"/>
+            <a:ext cx="8229600" cy="822960"/>
+          </a:xfrm>
+        </p:spPr>
         <p:txBody>
           <a:bodyPr/>
           <a:lstStyle>
             <a:lvl1pPr>
-              <a:defRPr/>
+              <a:defRPr sz="2600" b="1">
+                <a:solidFill>
+                  <a:srgbClr val="0C2440"/>
+                </a:solidFill>
+                <a:latin typeface="Aptos Display"/>
+              </a:defRPr>
             </a:lvl1pPr>
+            <a:lvl2pPr>
+              <a:defRPr sz="2600" b="1">
+                <a:solidFill>
+                  <a:srgbClr val="0C2440"/>
+                </a:solidFill>
+                <a:latin typeface="Aptos Display"/>
+              </a:defRPr>
+            </a:lvl2pPr>
+            <a:lvl3pPr>
+              <a:defRPr sz="2600" b="1">
+                <a:solidFill>
+                  <a:srgbClr val="0C2440"/>
+                </a:solidFill>
+                <a:latin typeface="Aptos Display"/>
+              </a:defRPr>
+            </a:lvl3pPr>
+            <a:lvl4pPr>
+              <a:defRPr sz="2600" b="1">
+                <a:solidFill>
+                  <a:srgbClr val="0C2440"/>
+                </a:solidFill>
+                <a:latin typeface="Aptos Display"/>
+              </a:defRPr>
+            </a:lvl4pPr>
+            <a:lvl5pPr>
+              <a:defRPr sz="2600" b="1">
+                <a:solidFill>
+                  <a:srgbClr val="0C2440"/>
+                </a:solidFill>
+                <a:latin typeface="Aptos Display"/>
+              </a:defRPr>
+            </a:lvl5pPr>
+            <a:lvl6pPr>
+              <a:defRPr sz="2600" b="1">
+                <a:solidFill>
+                  <a:srgbClr val="0C2440"/>
+                </a:solidFill>
+                <a:latin typeface="Aptos Display"/>
+              </a:defRPr>
+            </a:lvl6pPr>
+            <a:lvl7pPr>
+              <a:defRPr sz="2600" b="1">
+                <a:solidFill>
+                  <a:srgbClr val="0C2440"/>
+                </a:solidFill>
+                <a:latin typeface="Aptos Display"/>
+              </a:defRPr>
+            </a:lvl7pPr>
+            <a:lvl8pPr>
+              <a:defRPr sz="2600" b="1">
+                <a:solidFill>
+                  <a:srgbClr val="0C2440"/>
+                </a:solidFill>
+                <a:latin typeface="Aptos Display"/>
+              </a:defRPr>
+            </a:lvl8pPr>
+            <a:lvl9pPr>
+              <a:defRPr sz="2600" b="1">
+                <a:solidFill>
+                  <a:srgbClr val="0C2440"/>
+                </a:solidFill>
+                <a:latin typeface="Aptos Display"/>
+              </a:defRPr>
+            </a:lvl9pPr>
           </a:lstStyle>
           <a:p>
             <a:pPr>
-              <a:defRPr sz="3100" b="1">
+              <a:defRPr sz="2600" b="1">
                 <a:solidFill>
                   <a:srgbClr val="0C2440"/>
                 </a:solidFill>
@@ -2631,8 +4859,8 @@
         </p:nvSpPr>
         <p:spPr>
           <a:xfrm>
-            <a:off x="457200" y="1151335"/>
-            <a:ext cx="4040188" cy="479822"/>
+            <a:off x="457200" y="1234440"/>
+            <a:ext cx="4040188" cy="3657600"/>
           </a:xfrm>
         </p:spPr>
         <p:txBody>
@@ -2640,39 +4868,84 @@
           <a:lstStyle>
             <a:lvl1pPr marL="0" indent="0">
               <a:buNone/>
-              <a:defRPr sz="1800" b="1"/>
+              <a:defRPr sz="1900" b="0">
+                <a:solidFill>
+                  <a:srgbClr val="243A50"/>
+                </a:solidFill>
+                <a:latin typeface="Aptos"/>
+              </a:defRPr>
             </a:lvl1pPr>
             <a:lvl2pPr marL="342900" indent="0">
               <a:buNone/>
-              <a:defRPr sz="1500" b="1"/>
+              <a:defRPr sz="1900" b="0">
+                <a:solidFill>
+                  <a:srgbClr val="243A50"/>
+                </a:solidFill>
+                <a:latin typeface="Aptos"/>
+              </a:defRPr>
             </a:lvl2pPr>
             <a:lvl3pPr marL="685800" indent="0">
               <a:buNone/>
-              <a:defRPr sz="1350" b="1"/>
+              <a:defRPr sz="1900" b="0">
+                <a:solidFill>
+                  <a:srgbClr val="243A50"/>
+                </a:solidFill>
+                <a:latin typeface="Aptos"/>
+              </a:defRPr>
             </a:lvl3pPr>
             <a:lvl4pPr marL="1028700" indent="0">
               <a:buNone/>
-              <a:defRPr sz="1200" b="1"/>
+              <a:defRPr sz="1900" b="0">
+                <a:solidFill>
+                  <a:srgbClr val="243A50"/>
+                </a:solidFill>
+                <a:latin typeface="Aptos"/>
+              </a:defRPr>
             </a:lvl4pPr>
             <a:lvl5pPr marL="1371600" indent="0">
               <a:buNone/>
-              <a:defRPr sz="1200" b="1"/>
+              <a:defRPr sz="1900" b="0">
+                <a:solidFill>
+                  <a:srgbClr val="243A50"/>
+                </a:solidFill>
+                <a:latin typeface="Aptos"/>
+              </a:defRPr>
             </a:lvl5pPr>
             <a:lvl6pPr marL="1714500" indent="0">
               <a:buNone/>
-              <a:defRPr sz="1200" b="1"/>
+              <a:defRPr sz="1900" b="0">
+                <a:solidFill>
+                  <a:srgbClr val="243A50"/>
+                </a:solidFill>
+                <a:latin typeface="Aptos"/>
+              </a:defRPr>
             </a:lvl6pPr>
             <a:lvl7pPr marL="2057400" indent="0">
               <a:buNone/>
-              <a:defRPr sz="1200" b="1"/>
+              <a:defRPr sz="1900" b="0">
+                <a:solidFill>
+                  <a:srgbClr val="243A50"/>
+                </a:solidFill>
+                <a:latin typeface="Aptos"/>
+              </a:defRPr>
             </a:lvl7pPr>
             <a:lvl8pPr marL="2400300" indent="0">
               <a:buNone/>
-              <a:defRPr sz="1200" b="1"/>
+              <a:defRPr sz="1900" b="0">
+                <a:solidFill>
+                  <a:srgbClr val="243A50"/>
+                </a:solidFill>
+                <a:latin typeface="Aptos"/>
+              </a:defRPr>
             </a:lvl8pPr>
             <a:lvl9pPr marL="2743200" indent="0">
               <a:buNone/>
-              <a:defRPr sz="1200" b="1"/>
+              <a:defRPr sz="1900" b="0">
+                <a:solidFill>
+                  <a:srgbClr val="243A50"/>
+                </a:solidFill>
+                <a:latin typeface="Aptos"/>
+              </a:defRPr>
             </a:lvl9pPr>
           </a:lstStyle>
           <a:p>
@@ -2703,39 +4976,84 @@
         </p:nvSpPr>
         <p:spPr>
           <a:xfrm>
-            <a:off x="457200" y="1631156"/>
-            <a:ext cx="4040188" cy="2963466"/>
+            <a:off x="457200" y="1234440"/>
+            <a:ext cx="4040188" cy="3657600"/>
           </a:xfrm>
         </p:spPr>
         <p:txBody>
           <a:bodyPr/>
           <a:lstStyle>
             <a:lvl1pPr>
-              <a:defRPr sz="1800"/>
+              <a:defRPr sz="1900" b="0">
+                <a:solidFill>
+                  <a:srgbClr val="243A50"/>
+                </a:solidFill>
+                <a:latin typeface="Aptos"/>
+              </a:defRPr>
             </a:lvl1pPr>
             <a:lvl2pPr>
-              <a:defRPr sz="1500"/>
+              <a:defRPr sz="1900" b="0">
+                <a:solidFill>
+                  <a:srgbClr val="243A50"/>
+                </a:solidFill>
+                <a:latin typeface="Aptos"/>
+              </a:defRPr>
             </a:lvl2pPr>
             <a:lvl3pPr>
-              <a:defRPr sz="1350"/>
+              <a:defRPr sz="1900" b="0">
+                <a:solidFill>
+                  <a:srgbClr val="243A50"/>
+                </a:solidFill>
+                <a:latin typeface="Aptos"/>
+              </a:defRPr>
             </a:lvl3pPr>
             <a:lvl4pPr>
-              <a:defRPr sz="1200"/>
+              <a:defRPr sz="1900" b="0">
+                <a:solidFill>
+                  <a:srgbClr val="243A50"/>
+                </a:solidFill>
+                <a:latin typeface="Aptos"/>
+              </a:defRPr>
             </a:lvl4pPr>
             <a:lvl5pPr>
-              <a:defRPr sz="1200"/>
+              <a:defRPr sz="1900" b="0">
+                <a:solidFill>
+                  <a:srgbClr val="243A50"/>
+                </a:solidFill>
+                <a:latin typeface="Aptos"/>
+              </a:defRPr>
             </a:lvl5pPr>
             <a:lvl6pPr>
-              <a:defRPr sz="1200"/>
+              <a:defRPr sz="1900" b="0">
+                <a:solidFill>
+                  <a:srgbClr val="243A50"/>
+                </a:solidFill>
+                <a:latin typeface="Aptos"/>
+              </a:defRPr>
             </a:lvl6pPr>
             <a:lvl7pPr>
-              <a:defRPr sz="1200"/>
+              <a:defRPr sz="1900" b="0">
+                <a:solidFill>
+                  <a:srgbClr val="243A50"/>
+                </a:solidFill>
+                <a:latin typeface="Aptos"/>
+              </a:defRPr>
             </a:lvl7pPr>
             <a:lvl8pPr>
-              <a:defRPr sz="1200"/>
+              <a:defRPr sz="1900" b="0">
+                <a:solidFill>
+                  <a:srgbClr val="243A50"/>
+                </a:solidFill>
+                <a:latin typeface="Aptos"/>
+              </a:defRPr>
             </a:lvl8pPr>
             <a:lvl9pPr>
-              <a:defRPr sz="1200"/>
+              <a:defRPr sz="1900" b="0">
+                <a:solidFill>
+                  <a:srgbClr val="243A50"/>
+                </a:solidFill>
+                <a:latin typeface="Aptos"/>
+              </a:defRPr>
             </a:lvl9pPr>
           </a:lstStyle>
           <a:p>
@@ -2794,8 +5112,8 @@
         </p:nvSpPr>
         <p:spPr>
           <a:xfrm>
-            <a:off x="4645026" y="1151335"/>
-            <a:ext cx="4041775" cy="479822"/>
+            <a:off x="4645026" y="1234440"/>
+            <a:ext cx="4041775" cy="3657600"/>
           </a:xfrm>
         </p:spPr>
         <p:txBody>
@@ -2803,39 +5121,84 @@
           <a:lstStyle>
             <a:lvl1pPr marL="0" indent="0">
               <a:buNone/>
-              <a:defRPr sz="1800" b="1"/>
+              <a:defRPr sz="1900" b="0">
+                <a:solidFill>
+                  <a:srgbClr val="243A50"/>
+                </a:solidFill>
+                <a:latin typeface="Aptos"/>
+              </a:defRPr>
             </a:lvl1pPr>
             <a:lvl2pPr marL="342900" indent="0">
               <a:buNone/>
-              <a:defRPr sz="1500" b="1"/>
+              <a:defRPr sz="1900" b="0">
+                <a:solidFill>
+                  <a:srgbClr val="243A50"/>
+                </a:solidFill>
+                <a:latin typeface="Aptos"/>
+              </a:defRPr>
             </a:lvl2pPr>
             <a:lvl3pPr marL="685800" indent="0">
               <a:buNone/>
-              <a:defRPr sz="1350" b="1"/>
+              <a:defRPr sz="1900" b="0">
+                <a:solidFill>
+                  <a:srgbClr val="243A50"/>
+                </a:solidFill>
+                <a:latin typeface="Aptos"/>
+              </a:defRPr>
             </a:lvl3pPr>
             <a:lvl4pPr marL="1028700" indent="0">
               <a:buNone/>
-              <a:defRPr sz="1200" b="1"/>
+              <a:defRPr sz="1900" b="0">
+                <a:solidFill>
+                  <a:srgbClr val="243A50"/>
+                </a:solidFill>
+                <a:latin typeface="Aptos"/>
+              </a:defRPr>
             </a:lvl4pPr>
             <a:lvl5pPr marL="1371600" indent="0">
               <a:buNone/>
-              <a:defRPr sz="1200" b="1"/>
+              <a:defRPr sz="1900" b="0">
+                <a:solidFill>
+                  <a:srgbClr val="243A50"/>
+                </a:solidFill>
+                <a:latin typeface="Aptos"/>
+              </a:defRPr>
             </a:lvl5pPr>
             <a:lvl6pPr marL="1714500" indent="0">
               <a:buNone/>
-              <a:defRPr sz="1200" b="1"/>
+              <a:defRPr sz="1900" b="0">
+                <a:solidFill>
+                  <a:srgbClr val="243A50"/>
+                </a:solidFill>
+                <a:latin typeface="Aptos"/>
+              </a:defRPr>
             </a:lvl6pPr>
             <a:lvl7pPr marL="2057400" indent="0">
               <a:buNone/>
-              <a:defRPr sz="1200" b="1"/>
+              <a:defRPr sz="1900" b="0">
+                <a:solidFill>
+                  <a:srgbClr val="243A50"/>
+                </a:solidFill>
+                <a:latin typeface="Aptos"/>
+              </a:defRPr>
             </a:lvl7pPr>
             <a:lvl8pPr marL="2400300" indent="0">
               <a:buNone/>
-              <a:defRPr sz="1200" b="1"/>
+              <a:defRPr sz="1900" b="0">
+                <a:solidFill>
+                  <a:srgbClr val="243A50"/>
+                </a:solidFill>
+                <a:latin typeface="Aptos"/>
+              </a:defRPr>
             </a:lvl8pPr>
             <a:lvl9pPr marL="2743200" indent="0">
               <a:buNone/>
-              <a:defRPr sz="1200" b="1"/>
+              <a:defRPr sz="1900" b="0">
+                <a:solidFill>
+                  <a:srgbClr val="243A50"/>
+                </a:solidFill>
+                <a:latin typeface="Aptos"/>
+              </a:defRPr>
             </a:lvl9pPr>
           </a:lstStyle>
           <a:p>
@@ -2866,39 +5229,84 @@
         </p:nvSpPr>
         <p:spPr>
           <a:xfrm>
-            <a:off x="4645026" y="1631156"/>
-            <a:ext cx="4041775" cy="2963466"/>
+            <a:off x="4645026" y="1234440"/>
+            <a:ext cx="4041775" cy="3657600"/>
           </a:xfrm>
         </p:spPr>
         <p:txBody>
           <a:bodyPr/>
           <a:lstStyle>
             <a:lvl1pPr>
-              <a:defRPr sz="1800"/>
+              <a:defRPr sz="1900" b="0">
+                <a:solidFill>
+                  <a:srgbClr val="243A50"/>
+                </a:solidFill>
+                <a:latin typeface="Aptos"/>
+              </a:defRPr>
             </a:lvl1pPr>
             <a:lvl2pPr>
-              <a:defRPr sz="1500"/>
+              <a:defRPr sz="1900" b="0">
+                <a:solidFill>
+                  <a:srgbClr val="243A50"/>
+                </a:solidFill>
+                <a:latin typeface="Aptos"/>
+              </a:defRPr>
             </a:lvl2pPr>
             <a:lvl3pPr>
-              <a:defRPr sz="1350"/>
+              <a:defRPr sz="1900" b="0">
+                <a:solidFill>
+                  <a:srgbClr val="243A50"/>
+                </a:solidFill>
+                <a:latin typeface="Aptos"/>
+              </a:defRPr>
             </a:lvl3pPr>
             <a:lvl4pPr>
-              <a:defRPr sz="1200"/>
+              <a:defRPr sz="1900" b="0">
+                <a:solidFill>
+                  <a:srgbClr val="243A50"/>
+                </a:solidFill>
+                <a:latin typeface="Aptos"/>
+              </a:defRPr>
             </a:lvl4pPr>
             <a:lvl5pPr>
-              <a:defRPr sz="1200"/>
+              <a:defRPr sz="1900" b="0">
+                <a:solidFill>
+                  <a:srgbClr val="243A50"/>
+                </a:solidFill>
+                <a:latin typeface="Aptos"/>
+              </a:defRPr>
             </a:lvl5pPr>
             <a:lvl6pPr>
-              <a:defRPr sz="1200"/>
+              <a:defRPr sz="1900" b="0">
+                <a:solidFill>
+                  <a:srgbClr val="243A50"/>
+                </a:solidFill>
+                <a:latin typeface="Aptos"/>
+              </a:defRPr>
             </a:lvl6pPr>
             <a:lvl7pPr>
-              <a:defRPr sz="1200"/>
+              <a:defRPr sz="1900" b="0">
+                <a:solidFill>
+                  <a:srgbClr val="243A50"/>
+                </a:solidFill>
+                <a:latin typeface="Aptos"/>
+              </a:defRPr>
             </a:lvl7pPr>
             <a:lvl8pPr>
-              <a:defRPr sz="1200"/>
+              <a:defRPr sz="1900" b="0">
+                <a:solidFill>
+                  <a:srgbClr val="243A50"/>
+                </a:solidFill>
+                <a:latin typeface="Aptos"/>
+              </a:defRPr>
             </a:lvl8pPr>
             <a:lvl9pPr>
-              <a:defRPr sz="1200"/>
+              <a:defRPr sz="1900" b="0">
+                <a:solidFill>
+                  <a:srgbClr val="243A50"/>
+                </a:solidFill>
+                <a:latin typeface="Aptos"/>
+              </a:defRPr>
             </a:lvl9pPr>
           </a:lstStyle>
           <a:p>
@@ -2955,10 +5363,88 @@
             <p:ph type="dt" sz="half" idx="10"/>
           </p:nvPr>
         </p:nvSpPr>
-        <p:spPr/>
+        <p:spPr>
+          <a:xfrm>
+            <a:off x="457200" y="0"/>
+            <a:ext cx="2133600" cy="0"/>
+          </a:xfrm>
+        </p:spPr>
         <p:txBody>
           <a:bodyPr/>
-          <a:lstStyle/>
+          <a:lstStyle>
+            <a:lvl1pPr>
+              <a:defRPr sz="900" b="0">
+                <a:solidFill>
+                  <a:srgbClr val="637D94"/>
+                </a:solidFill>
+                <a:latin typeface="Aptos"/>
+              </a:defRPr>
+            </a:lvl1pPr>
+            <a:lvl2pPr>
+              <a:defRPr sz="900" b="0">
+                <a:solidFill>
+                  <a:srgbClr val="637D94"/>
+                </a:solidFill>
+                <a:latin typeface="Aptos"/>
+              </a:defRPr>
+            </a:lvl2pPr>
+            <a:lvl3pPr>
+              <a:defRPr sz="900" b="0">
+                <a:solidFill>
+                  <a:srgbClr val="637D94"/>
+                </a:solidFill>
+                <a:latin typeface="Aptos"/>
+              </a:defRPr>
+            </a:lvl3pPr>
+            <a:lvl4pPr>
+              <a:defRPr sz="900" b="0">
+                <a:solidFill>
+                  <a:srgbClr val="637D94"/>
+                </a:solidFill>
+                <a:latin typeface="Aptos"/>
+              </a:defRPr>
+            </a:lvl4pPr>
+            <a:lvl5pPr>
+              <a:defRPr sz="900" b="0">
+                <a:solidFill>
+                  <a:srgbClr val="637D94"/>
+                </a:solidFill>
+                <a:latin typeface="Aptos"/>
+              </a:defRPr>
+            </a:lvl5pPr>
+            <a:lvl6pPr>
+              <a:defRPr sz="900" b="0">
+                <a:solidFill>
+                  <a:srgbClr val="637D94"/>
+                </a:solidFill>
+                <a:latin typeface="Aptos"/>
+              </a:defRPr>
+            </a:lvl6pPr>
+            <a:lvl7pPr>
+              <a:defRPr sz="900" b="0">
+                <a:solidFill>
+                  <a:srgbClr val="637D94"/>
+                </a:solidFill>
+                <a:latin typeface="Aptos"/>
+              </a:defRPr>
+            </a:lvl7pPr>
+            <a:lvl8pPr>
+              <a:defRPr sz="900" b="0">
+                <a:solidFill>
+                  <a:srgbClr val="637D94"/>
+                </a:solidFill>
+                <a:latin typeface="Aptos"/>
+              </a:defRPr>
+            </a:lvl8pPr>
+            <a:lvl9pPr>
+              <a:defRPr sz="900" b="0">
+                <a:solidFill>
+                  <a:srgbClr val="637D94"/>
+                </a:solidFill>
+                <a:latin typeface="Aptos"/>
+              </a:defRPr>
+            </a:lvl9pPr>
+          </a:lstStyle>
           <a:p>
             <a:pPr>
               <a:defRPr sz="900" b="0">
@@ -2986,10 +5472,88 @@
             <p:ph type="ftr" sz="quarter" idx="11"/>
           </p:nvPr>
         </p:nvSpPr>
-        <p:spPr/>
+        <p:spPr>
+          <a:xfrm>
+            <a:off x="3124200" y="0"/>
+            <a:ext cx="2895600" cy="0"/>
+          </a:xfrm>
+        </p:spPr>
         <p:txBody>
           <a:bodyPr/>
-          <a:lstStyle/>
+          <a:lstStyle>
+            <a:lvl1pPr>
+              <a:defRPr sz="900" b="0">
+                <a:solidFill>
+                  <a:srgbClr val="637D94"/>
+                </a:solidFill>
+                <a:latin typeface="Aptos"/>
+              </a:defRPr>
+            </a:lvl1pPr>
+            <a:lvl2pPr>
+              <a:defRPr sz="900" b="0">
+                <a:solidFill>
+                  <a:srgbClr val="637D94"/>
+                </a:solidFill>
+                <a:latin typeface="Aptos"/>
+              </a:defRPr>
+            </a:lvl2pPr>
+            <a:lvl3pPr>
+              <a:defRPr sz="900" b="0">
+                <a:solidFill>
+                  <a:srgbClr val="637D94"/>
+                </a:solidFill>
+                <a:latin typeface="Aptos"/>
+              </a:defRPr>
+            </a:lvl3pPr>
+            <a:lvl4pPr>
+              <a:defRPr sz="900" b="0">
+                <a:solidFill>
+                  <a:srgbClr val="637D94"/>
+                </a:solidFill>
+                <a:latin typeface="Aptos"/>
+              </a:defRPr>
+            </a:lvl4pPr>
+            <a:lvl5pPr>
+              <a:defRPr sz="900" b="0">
+                <a:solidFill>
+                  <a:srgbClr val="637D94"/>
+                </a:solidFill>
+                <a:latin typeface="Aptos"/>
+              </a:defRPr>
+            </a:lvl5pPr>
+            <a:lvl6pPr>
+              <a:defRPr sz="900" b="0">
+                <a:solidFill>
+                  <a:srgbClr val="637D94"/>
+                </a:solidFill>
+                <a:latin typeface="Aptos"/>
+              </a:defRPr>
+            </a:lvl6pPr>
+            <a:lvl7pPr>
+              <a:defRPr sz="900" b="0">
+                <a:solidFill>
+                  <a:srgbClr val="637D94"/>
+                </a:solidFill>
+                <a:latin typeface="Aptos"/>
+              </a:defRPr>
+            </a:lvl7pPr>
+            <a:lvl8pPr>
+              <a:defRPr sz="900" b="0">
+                <a:solidFill>
+                  <a:srgbClr val="637D94"/>
+                </a:solidFill>
+                <a:latin typeface="Aptos"/>
+              </a:defRPr>
+            </a:lvl8pPr>
+            <a:lvl9pPr>
+              <a:defRPr sz="900" b="0">
+                <a:solidFill>
+                  <a:srgbClr val="637D94"/>
+                </a:solidFill>
+                <a:latin typeface="Aptos"/>
+              </a:defRPr>
+            </a:lvl9pPr>
+          </a:lstStyle>
           <a:p>
             <a:pPr>
               <a:defRPr sz="900" b="0">
@@ -3013,10 +5577,88 @@
             <p:ph type="sldNum" sz="quarter" idx="12"/>
           </p:nvPr>
         </p:nvSpPr>
-        <p:spPr/>
+        <p:spPr>
+          <a:xfrm>
+            <a:off x="6553200" y="0"/>
+            <a:ext cx="2133600" cy="0"/>
+          </a:xfrm>
+        </p:spPr>
         <p:txBody>
           <a:bodyPr/>
-          <a:lstStyle/>
+          <a:lstStyle>
+            <a:lvl1pPr>
+              <a:defRPr sz="900" b="0">
+                <a:solidFill>
+                  <a:srgbClr val="637D94"/>
+                </a:solidFill>
+                <a:latin typeface="Aptos"/>
+              </a:defRPr>
+            </a:lvl1pPr>
+            <a:lvl2pPr>
+              <a:defRPr sz="900" b="0">
+                <a:solidFill>
+                  <a:srgbClr val="637D94"/>
+                </a:solidFill>
+                <a:latin typeface="Aptos"/>
+              </a:defRPr>
+            </a:lvl2pPr>
+            <a:lvl3pPr>
+              <a:defRPr sz="900" b="0">
+                <a:solidFill>
+                  <a:srgbClr val="637D94"/>
+                </a:solidFill>
+                <a:latin typeface="Aptos"/>
+              </a:defRPr>
+            </a:lvl3pPr>
+            <a:lvl4pPr>
+              <a:defRPr sz="900" b="0">
+                <a:solidFill>
+                  <a:srgbClr val="637D94"/>
+                </a:solidFill>
+                <a:latin typeface="Aptos"/>
+              </a:defRPr>
+            </a:lvl4pPr>
+            <a:lvl5pPr>
+              <a:defRPr sz="900" b="0">
+                <a:solidFill>
+                  <a:srgbClr val="637D94"/>
+                </a:solidFill>
+                <a:latin typeface="Aptos"/>
+              </a:defRPr>
+            </a:lvl5pPr>
+            <a:lvl6pPr>
+              <a:defRPr sz="900" b="0">
+                <a:solidFill>
+                  <a:srgbClr val="637D94"/>
+                </a:solidFill>
+                <a:latin typeface="Aptos"/>
+              </a:defRPr>
+            </a:lvl6pPr>
+            <a:lvl7pPr>
+              <a:defRPr sz="900" b="0">
+                <a:solidFill>
+                  <a:srgbClr val="637D94"/>
+                </a:solidFill>
+                <a:latin typeface="Aptos"/>
+              </a:defRPr>
+            </a:lvl7pPr>
+            <a:lvl8pPr>
+              <a:defRPr sz="900" b="0">
+                <a:solidFill>
+                  <a:srgbClr val="637D94"/>
+                </a:solidFill>
+                <a:latin typeface="Aptos"/>
+              </a:defRPr>
+            </a:lvl8pPr>
+            <a:lvl9pPr>
+              <a:defRPr sz="900" b="0">
+                <a:solidFill>
+                  <a:srgbClr val="637D94"/>
+                </a:solidFill>
+                <a:latin typeface="Aptos"/>
+              </a:defRPr>
+            </a:lvl9pPr>
+          </a:lstStyle>
           <a:p>
             <a:pPr>
               <a:defRPr sz="900" b="0">
@@ -3125,13 +5767,91 @@
             <p:ph type="title"/>
           </p:nvPr>
         </p:nvSpPr>
-        <p:spPr/>
+        <p:spPr>
+          <a:xfrm>
+            <a:off x="457200" y="137160"/>
+            <a:ext cx="8229600" cy="822960"/>
+          </a:xfrm>
+        </p:spPr>
         <p:txBody>
           <a:bodyPr/>
-          <a:lstStyle/>
+          <a:lstStyle>
+            <a:lvl1pPr>
+              <a:defRPr sz="2600" b="1">
+                <a:solidFill>
+                  <a:srgbClr val="0C2440"/>
+                </a:solidFill>
+                <a:latin typeface="Aptos Display"/>
+              </a:defRPr>
+            </a:lvl1pPr>
+            <a:lvl2pPr>
+              <a:defRPr sz="2600" b="1">
+                <a:solidFill>
+                  <a:srgbClr val="0C2440"/>
+                </a:solidFill>
+                <a:latin typeface="Aptos Display"/>
+              </a:defRPr>
+            </a:lvl2pPr>
+            <a:lvl3pPr>
+              <a:defRPr sz="2600" b="1">
+                <a:solidFill>
+                  <a:srgbClr val="0C2440"/>
+                </a:solidFill>
+                <a:latin typeface="Aptos Display"/>
+              </a:defRPr>
+            </a:lvl3pPr>
+            <a:lvl4pPr>
+              <a:defRPr sz="2600" b="1">
+                <a:solidFill>
+                  <a:srgbClr val="0C2440"/>
+                </a:solidFill>
+                <a:latin typeface="Aptos Display"/>
+              </a:defRPr>
+            </a:lvl4pPr>
+            <a:lvl5pPr>
+              <a:defRPr sz="2600" b="1">
+                <a:solidFill>
+                  <a:srgbClr val="0C2440"/>
+                </a:solidFill>
+                <a:latin typeface="Aptos Display"/>
+              </a:defRPr>
+            </a:lvl5pPr>
+            <a:lvl6pPr>
+              <a:defRPr sz="2600" b="1">
+                <a:solidFill>
+                  <a:srgbClr val="0C2440"/>
+                </a:solidFill>
+                <a:latin typeface="Aptos Display"/>
+              </a:defRPr>
+            </a:lvl6pPr>
+            <a:lvl7pPr>
+              <a:defRPr sz="2600" b="1">
+                <a:solidFill>
+                  <a:srgbClr val="0C2440"/>
+                </a:solidFill>
+                <a:latin typeface="Aptos Display"/>
+              </a:defRPr>
+            </a:lvl7pPr>
+            <a:lvl8pPr>
+              <a:defRPr sz="2600" b="1">
+                <a:solidFill>
+                  <a:srgbClr val="0C2440"/>
+                </a:solidFill>
+                <a:latin typeface="Aptos Display"/>
+              </a:defRPr>
+            </a:lvl8pPr>
+            <a:lvl9pPr>
+              <a:defRPr sz="2600" b="1">
+                <a:solidFill>
+                  <a:srgbClr val="0C2440"/>
+                </a:solidFill>
+                <a:latin typeface="Aptos Display"/>
+              </a:defRPr>
+            </a:lvl9pPr>
+          </a:lstStyle>
           <a:p>
             <a:pPr>
-              <a:defRPr sz="3100" b="1">
+              <a:defRPr sz="2600" b="1">
                 <a:solidFill>
                   <a:srgbClr val="0C2440"/>
                 </a:solidFill>
@@ -3155,10 +5875,88 @@
             <p:ph type="dt" sz="half" idx="10"/>
           </p:nvPr>
         </p:nvSpPr>
-        <p:spPr/>
+        <p:spPr>
+          <a:xfrm>
+            <a:off x="457200" y="0"/>
+            <a:ext cx="2133600" cy="0"/>
+          </a:xfrm>
+        </p:spPr>
         <p:txBody>
           <a:bodyPr/>
-          <a:lstStyle/>
+          <a:lstStyle>
+            <a:lvl1pPr>
+              <a:defRPr sz="900" b="0">
+                <a:solidFill>
+                  <a:srgbClr val="637D94"/>
+                </a:solidFill>
+                <a:latin typeface="Aptos"/>
+              </a:defRPr>
+            </a:lvl1pPr>
+            <a:lvl2pPr>
+              <a:defRPr sz="900" b="0">
+                <a:solidFill>
+                  <a:srgbClr val="637D94"/>
+                </a:solidFill>
+                <a:latin typeface="Aptos"/>
+              </a:defRPr>
+            </a:lvl2pPr>
+            <a:lvl3pPr>
+              <a:defRPr sz="900" b="0">
+                <a:solidFill>
+                  <a:srgbClr val="637D94"/>
+                </a:solidFill>
+                <a:latin typeface="Aptos"/>
+              </a:defRPr>
+            </a:lvl3pPr>
+            <a:lvl4pPr>
+              <a:defRPr sz="900" b="0">
+                <a:solidFill>
+                  <a:srgbClr val="637D94"/>
+                </a:solidFill>
+                <a:latin typeface="Aptos"/>
+              </a:defRPr>
+            </a:lvl4pPr>
+            <a:lvl5pPr>
+              <a:defRPr sz="900" b="0">
+                <a:solidFill>
+                  <a:srgbClr val="637D94"/>
+                </a:solidFill>
+                <a:latin typeface="Aptos"/>
+              </a:defRPr>
+            </a:lvl5pPr>
+            <a:lvl6pPr>
+              <a:defRPr sz="900" b="0">
+                <a:solidFill>
+                  <a:srgbClr val="637D94"/>
+                </a:solidFill>
+                <a:latin typeface="Aptos"/>
+              </a:defRPr>
+            </a:lvl6pPr>
+            <a:lvl7pPr>
+              <a:defRPr sz="900" b="0">
+                <a:solidFill>
+                  <a:srgbClr val="637D94"/>
+                </a:solidFill>
+                <a:latin typeface="Aptos"/>
+              </a:defRPr>
+            </a:lvl7pPr>
+            <a:lvl8pPr>
+              <a:defRPr sz="900" b="0">
+                <a:solidFill>
+                  <a:srgbClr val="637D94"/>
+                </a:solidFill>
+                <a:latin typeface="Aptos"/>
+              </a:defRPr>
+            </a:lvl8pPr>
+            <a:lvl9pPr>
+              <a:defRPr sz="900" b="0">
+                <a:solidFill>
+                  <a:srgbClr val="637D94"/>
+                </a:solidFill>
+                <a:latin typeface="Aptos"/>
+              </a:defRPr>
+            </a:lvl9pPr>
+          </a:lstStyle>
           <a:p>
             <a:pPr>
               <a:defRPr sz="900" b="0">
@@ -3186,10 +5984,88 @@
             <p:ph type="ftr" sz="quarter" idx="11"/>
           </p:nvPr>
         </p:nvSpPr>
-        <p:spPr/>
+        <p:spPr>
+          <a:xfrm>
+            <a:off x="3124200" y="0"/>
+            <a:ext cx="2895600" cy="0"/>
+          </a:xfrm>
+        </p:spPr>
         <p:txBody>
           <a:bodyPr/>
-          <a:lstStyle/>
+          <a:lstStyle>
+            <a:lvl1pPr>
+              <a:defRPr sz="900" b="0">
+                <a:solidFill>
+                  <a:srgbClr val="637D94"/>
+                </a:solidFill>
+                <a:latin typeface="Aptos"/>
+              </a:defRPr>
+            </a:lvl1pPr>
+            <a:lvl2pPr>
+              <a:defRPr sz="900" b="0">
+                <a:solidFill>
+                  <a:srgbClr val="637D94"/>
+                </a:solidFill>
+                <a:latin typeface="Aptos"/>
+              </a:defRPr>
+            </a:lvl2pPr>
+            <a:lvl3pPr>
+              <a:defRPr sz="900" b="0">
+                <a:solidFill>
+                  <a:srgbClr val="637D94"/>
+                </a:solidFill>
+                <a:latin typeface="Aptos"/>
+              </a:defRPr>
+            </a:lvl3pPr>
+            <a:lvl4pPr>
+              <a:defRPr sz="900" b="0">
+                <a:solidFill>
+                  <a:srgbClr val="637D94"/>
+                </a:solidFill>
+                <a:latin typeface="Aptos"/>
+              </a:defRPr>
+            </a:lvl4pPr>
+            <a:lvl5pPr>
+              <a:defRPr sz="900" b="0">
+                <a:solidFill>
+                  <a:srgbClr val="637D94"/>
+                </a:solidFill>
+                <a:latin typeface="Aptos"/>
+              </a:defRPr>
+            </a:lvl5pPr>
+            <a:lvl6pPr>
+              <a:defRPr sz="900" b="0">
+                <a:solidFill>
+                  <a:srgbClr val="637D94"/>
+                </a:solidFill>
+                <a:latin typeface="Aptos"/>
+              </a:defRPr>
+            </a:lvl6pPr>
+            <a:lvl7pPr>
+              <a:defRPr sz="900" b="0">
+                <a:solidFill>
+                  <a:srgbClr val="637D94"/>
+                </a:solidFill>
+                <a:latin typeface="Aptos"/>
+              </a:defRPr>
+            </a:lvl7pPr>
+            <a:lvl8pPr>
+              <a:defRPr sz="900" b="0">
+                <a:solidFill>
+                  <a:srgbClr val="637D94"/>
+                </a:solidFill>
+                <a:latin typeface="Aptos"/>
+              </a:defRPr>
+            </a:lvl8pPr>
+            <a:lvl9pPr>
+              <a:defRPr sz="900" b="0">
+                <a:solidFill>
+                  <a:srgbClr val="637D94"/>
+                </a:solidFill>
+                <a:latin typeface="Aptos"/>
+              </a:defRPr>
+            </a:lvl9pPr>
+          </a:lstStyle>
           <a:p>
             <a:pPr>
               <a:defRPr sz="900" b="0">
@@ -3213,10 +6089,88 @@
             <p:ph type="sldNum" sz="quarter" idx="12"/>
           </p:nvPr>
         </p:nvSpPr>
-        <p:spPr/>
+        <p:spPr>
+          <a:xfrm>
+            <a:off x="6553200" y="0"/>
+            <a:ext cx="2133600" cy="0"/>
+          </a:xfrm>
+        </p:spPr>
         <p:txBody>
           <a:bodyPr/>
-          <a:lstStyle/>
+          <a:lstStyle>
+            <a:lvl1pPr>
+              <a:defRPr sz="900" b="0">
+                <a:solidFill>
+                  <a:srgbClr val="637D94"/>
+                </a:solidFill>
+                <a:latin typeface="Aptos"/>
+              </a:defRPr>
+            </a:lvl1pPr>
+            <a:lvl2pPr>
+              <a:defRPr sz="900" b="0">
+                <a:solidFill>
+                  <a:srgbClr val="637D94"/>
+                </a:solidFill>
+                <a:latin typeface="Aptos"/>
+              </a:defRPr>
+            </a:lvl2pPr>
+            <a:lvl3pPr>
+              <a:defRPr sz="900" b="0">
+                <a:solidFill>
+                  <a:srgbClr val="637D94"/>
+                </a:solidFill>
+                <a:latin typeface="Aptos"/>
+              </a:defRPr>
+            </a:lvl3pPr>
+            <a:lvl4pPr>
+              <a:defRPr sz="900" b="0">
+                <a:solidFill>
+                  <a:srgbClr val="637D94"/>
+                </a:solidFill>
+                <a:latin typeface="Aptos"/>
+              </a:defRPr>
+            </a:lvl4pPr>
+            <a:lvl5pPr>
+              <a:defRPr sz="900" b="0">
+                <a:solidFill>
+                  <a:srgbClr val="637D94"/>
+                </a:solidFill>
+                <a:latin typeface="Aptos"/>
+              </a:defRPr>
+            </a:lvl5pPr>
+            <a:lvl6pPr>
+              <a:defRPr sz="900" b="0">
+                <a:solidFill>
+                  <a:srgbClr val="637D94"/>
+                </a:solidFill>
+                <a:latin typeface="Aptos"/>
+              </a:defRPr>
+            </a:lvl6pPr>
+            <a:lvl7pPr>
+              <a:defRPr sz="900" b="0">
+                <a:solidFill>
+                  <a:srgbClr val="637D94"/>
+                </a:solidFill>
+                <a:latin typeface="Aptos"/>
+              </a:defRPr>
+            </a:lvl7pPr>
+            <a:lvl8pPr>
+              <a:defRPr sz="900" b="0">
+                <a:solidFill>
+                  <a:srgbClr val="637D94"/>
+                </a:solidFill>
+                <a:latin typeface="Aptos"/>
+              </a:defRPr>
+            </a:lvl8pPr>
+            <a:lvl9pPr>
+              <a:defRPr sz="900" b="0">
+                <a:solidFill>
+                  <a:srgbClr val="637D94"/>
+                </a:solidFill>
+                <a:latin typeface="Aptos"/>
+              </a:defRPr>
+            </a:lvl9pPr>
+          </a:lstStyle>
           <a:p>
             <a:pPr>
               <a:defRPr sz="900" b="0">
@@ -3325,10 +6279,88 @@
             <p:ph type="dt" sz="half" idx="10"/>
           </p:nvPr>
         </p:nvSpPr>
-        <p:spPr/>
+        <p:spPr>
+          <a:xfrm>
+            <a:off x="457200" y="0"/>
+            <a:ext cx="2133600" cy="0"/>
+          </a:xfrm>
+        </p:spPr>
         <p:txBody>
           <a:bodyPr/>
-          <a:lstStyle/>
+          <a:lstStyle>
+            <a:lvl1pPr>
+              <a:defRPr sz="900" b="0">
+                <a:solidFill>
+                  <a:srgbClr val="637D94"/>
+                </a:solidFill>
+                <a:latin typeface="Aptos"/>
+              </a:defRPr>
+            </a:lvl1pPr>
+            <a:lvl2pPr>
+              <a:defRPr sz="900" b="0">
+                <a:solidFill>
+                  <a:srgbClr val="637D94"/>
+                </a:solidFill>
+                <a:latin typeface="Aptos"/>
+              </a:defRPr>
+            </a:lvl2pPr>
+            <a:lvl3pPr>
+              <a:defRPr sz="900" b="0">
+                <a:solidFill>
+                  <a:srgbClr val="637D94"/>
+                </a:solidFill>
+                <a:latin typeface="Aptos"/>
+              </a:defRPr>
+            </a:lvl3pPr>
+            <a:lvl4pPr>
+              <a:defRPr sz="900" b="0">
+                <a:solidFill>
+                  <a:srgbClr val="637D94"/>
+                </a:solidFill>
+                <a:latin typeface="Aptos"/>
+              </a:defRPr>
+            </a:lvl4pPr>
+            <a:lvl5pPr>
+              <a:defRPr sz="900" b="0">
+                <a:solidFill>
+                  <a:srgbClr val="637D94"/>
+                </a:solidFill>
+                <a:latin typeface="Aptos"/>
+              </a:defRPr>
+            </a:lvl5pPr>
+            <a:lvl6pPr>
+              <a:defRPr sz="900" b="0">
+                <a:solidFill>
+                  <a:srgbClr val="637D94"/>
+                </a:solidFill>
+                <a:latin typeface="Aptos"/>
+              </a:defRPr>
+            </a:lvl6pPr>
+            <a:lvl7pPr>
+              <a:defRPr sz="900" b="0">
+                <a:solidFill>
+                  <a:srgbClr val="637D94"/>
+                </a:solidFill>
+                <a:latin typeface="Aptos"/>
+              </a:defRPr>
+            </a:lvl7pPr>
+            <a:lvl8pPr>
+              <a:defRPr sz="900" b="0">
+                <a:solidFill>
+                  <a:srgbClr val="637D94"/>
+                </a:solidFill>
+                <a:latin typeface="Aptos"/>
+              </a:defRPr>
+            </a:lvl8pPr>
+            <a:lvl9pPr>
+              <a:defRPr sz="900" b="0">
+                <a:solidFill>
+                  <a:srgbClr val="637D94"/>
+                </a:solidFill>
+                <a:latin typeface="Aptos"/>
+              </a:defRPr>
+            </a:lvl9pPr>
+          </a:lstStyle>
           <a:p>
             <a:pPr>
               <a:defRPr sz="900" b="0">
@@ -3356,10 +6388,88 @@
             <p:ph type="ftr" sz="quarter" idx="11"/>
           </p:nvPr>
         </p:nvSpPr>
-        <p:spPr/>
+        <p:spPr>
+          <a:xfrm>
+            <a:off x="3124200" y="0"/>
+            <a:ext cx="2895600" cy="0"/>
+          </a:xfrm>
+        </p:spPr>
         <p:txBody>
           <a:bodyPr/>
-          <a:lstStyle/>
+          <a:lstStyle>
+            <a:lvl1pPr>
+              <a:defRPr sz="900" b="0">
+                <a:solidFill>
+                  <a:srgbClr val="637D94"/>
+                </a:solidFill>
+                <a:latin typeface="Aptos"/>
+              </a:defRPr>
+            </a:lvl1pPr>
+            <a:lvl2pPr>
+              <a:defRPr sz="900" b="0">
+                <a:solidFill>
+                  <a:srgbClr val="637D94"/>
+                </a:solidFill>
+                <a:latin typeface="Aptos"/>
+              </a:defRPr>
+            </a:lvl2pPr>
+            <a:lvl3pPr>
+              <a:defRPr sz="900" b="0">
+                <a:solidFill>
+                  <a:srgbClr val="637D94"/>
+                </a:solidFill>
+                <a:latin typeface="Aptos"/>
+              </a:defRPr>
+            </a:lvl3pPr>
+            <a:lvl4pPr>
+              <a:defRPr sz="900" b="0">
+                <a:solidFill>
+                  <a:srgbClr val="637D94"/>
+                </a:solidFill>
+                <a:latin typeface="Aptos"/>
+              </a:defRPr>
+            </a:lvl4pPr>
+            <a:lvl5pPr>
+              <a:defRPr sz="900" b="0">
+                <a:solidFill>
+                  <a:srgbClr val="637D94"/>
+                </a:solidFill>
+                <a:latin typeface="Aptos"/>
+              </a:defRPr>
+            </a:lvl5pPr>
+            <a:lvl6pPr>
+              <a:defRPr sz="900" b="0">
+                <a:solidFill>
+                  <a:srgbClr val="637D94"/>
+                </a:solidFill>
+                <a:latin typeface="Aptos"/>
+              </a:defRPr>
+            </a:lvl6pPr>
+            <a:lvl7pPr>
+              <a:defRPr sz="900" b="0">
+                <a:solidFill>
+                  <a:srgbClr val="637D94"/>
+                </a:solidFill>
+                <a:latin typeface="Aptos"/>
+              </a:defRPr>
+            </a:lvl7pPr>
+            <a:lvl8pPr>
+              <a:defRPr sz="900" b="0">
+                <a:solidFill>
+                  <a:srgbClr val="637D94"/>
+                </a:solidFill>
+                <a:latin typeface="Aptos"/>
+              </a:defRPr>
+            </a:lvl8pPr>
+            <a:lvl9pPr>
+              <a:defRPr sz="900" b="0">
+                <a:solidFill>
+                  <a:srgbClr val="637D94"/>
+                </a:solidFill>
+                <a:latin typeface="Aptos"/>
+              </a:defRPr>
+            </a:lvl9pPr>
+          </a:lstStyle>
           <a:p>
             <a:pPr>
               <a:defRPr sz="900" b="0">
@@ -3383,10 +6493,88 @@
             <p:ph type="sldNum" sz="quarter" idx="12"/>
           </p:nvPr>
         </p:nvSpPr>
-        <p:spPr/>
+        <p:spPr>
+          <a:xfrm>
+            <a:off x="6553200" y="0"/>
+            <a:ext cx="2133600" cy="0"/>
+          </a:xfrm>
+        </p:spPr>
         <p:txBody>
           <a:bodyPr/>
-          <a:lstStyle/>
+          <a:lstStyle>
+            <a:lvl1pPr>
+              <a:defRPr sz="900" b="0">
+                <a:solidFill>
+                  <a:srgbClr val="637D94"/>
+                </a:solidFill>
+                <a:latin typeface="Aptos"/>
+              </a:defRPr>
+            </a:lvl1pPr>
+            <a:lvl2pPr>
+              <a:defRPr sz="900" b="0">
+                <a:solidFill>
+                  <a:srgbClr val="637D94"/>
+                </a:solidFill>
+                <a:latin typeface="Aptos"/>
+              </a:defRPr>
+            </a:lvl2pPr>
+            <a:lvl3pPr>
+              <a:defRPr sz="900" b="0">
+                <a:solidFill>
+                  <a:srgbClr val="637D94"/>
+                </a:solidFill>
+                <a:latin typeface="Aptos"/>
+              </a:defRPr>
+            </a:lvl3pPr>
+            <a:lvl4pPr>
+              <a:defRPr sz="900" b="0">
+                <a:solidFill>
+                  <a:srgbClr val="637D94"/>
+                </a:solidFill>
+                <a:latin typeface="Aptos"/>
+              </a:defRPr>
+            </a:lvl4pPr>
+            <a:lvl5pPr>
+              <a:defRPr sz="900" b="0">
+                <a:solidFill>
+                  <a:srgbClr val="637D94"/>
+                </a:solidFill>
+                <a:latin typeface="Aptos"/>
+              </a:defRPr>
+            </a:lvl5pPr>
+            <a:lvl6pPr>
+              <a:defRPr sz="900" b="0">
+                <a:solidFill>
+                  <a:srgbClr val="637D94"/>
+                </a:solidFill>
+                <a:latin typeface="Aptos"/>
+              </a:defRPr>
+            </a:lvl6pPr>
+            <a:lvl7pPr>
+              <a:defRPr sz="900" b="0">
+                <a:solidFill>
+                  <a:srgbClr val="637D94"/>
+                </a:solidFill>
+                <a:latin typeface="Aptos"/>
+              </a:defRPr>
+            </a:lvl7pPr>
+            <a:lvl8pPr>
+              <a:defRPr sz="900" b="0">
+                <a:solidFill>
+                  <a:srgbClr val="637D94"/>
+                </a:solidFill>
+                <a:latin typeface="Aptos"/>
+              </a:defRPr>
+            </a:lvl8pPr>
+            <a:lvl9pPr>
+              <a:defRPr sz="900" b="0">
+                <a:solidFill>
+                  <a:srgbClr val="637D94"/>
+                </a:solidFill>
+                <a:latin typeface="Aptos"/>
+              </a:defRPr>
+            </a:lvl9pPr>
+          </a:lstStyle>
           <a:p>
             <a:pPr>
               <a:defRPr sz="900" b="0">
@@ -3497,20 +6685,89 @@
         </p:nvSpPr>
         <p:spPr>
           <a:xfrm>
-            <a:off x="457201" y="204787"/>
-            <a:ext cx="3008313" cy="871538"/>
+            <a:off x="457201" y="137160"/>
+            <a:ext cx="3008313" cy="822960"/>
           </a:xfrm>
         </p:spPr>
         <p:txBody>
           <a:bodyPr anchor="b"/>
           <a:lstStyle>
             <a:lvl1pPr algn="l">
-              <a:defRPr sz="1500" b="1"/>
+              <a:defRPr sz="2600" b="1">
+                <a:solidFill>
+                  <a:srgbClr val="0C2440"/>
+                </a:solidFill>
+                <a:latin typeface="Aptos Display"/>
+              </a:defRPr>
             </a:lvl1pPr>
+            <a:lvl2pPr>
+              <a:defRPr sz="2600" b="1">
+                <a:solidFill>
+                  <a:srgbClr val="0C2440"/>
+                </a:solidFill>
+                <a:latin typeface="Aptos Display"/>
+              </a:defRPr>
+            </a:lvl2pPr>
+            <a:lvl3pPr>
+              <a:defRPr sz="2600" b="1">
+                <a:solidFill>
+                  <a:srgbClr val="0C2440"/>
+                </a:solidFill>
+                <a:latin typeface="Aptos Display"/>
+              </a:defRPr>
+            </a:lvl3pPr>
+            <a:lvl4pPr>
+              <a:defRPr sz="2600" b="1">
+                <a:solidFill>
+                  <a:srgbClr val="0C2440"/>
+                </a:solidFill>
+                <a:latin typeface="Aptos Display"/>
+              </a:defRPr>
+            </a:lvl4pPr>
+            <a:lvl5pPr>
+              <a:defRPr sz="2600" b="1">
+                <a:solidFill>
+                  <a:srgbClr val="0C2440"/>
+                </a:solidFill>
+                <a:latin typeface="Aptos Display"/>
+              </a:defRPr>
+            </a:lvl5pPr>
+            <a:lvl6pPr>
+              <a:defRPr sz="2600" b="1">
+                <a:solidFill>
+                  <a:srgbClr val="0C2440"/>
+                </a:solidFill>
+                <a:latin typeface="Aptos Display"/>
+              </a:defRPr>
+            </a:lvl6pPr>
+            <a:lvl7pPr>
+              <a:defRPr sz="2600" b="1">
+                <a:solidFill>
+                  <a:srgbClr val="0C2440"/>
+                </a:solidFill>
+                <a:latin typeface="Aptos Display"/>
+              </a:defRPr>
+            </a:lvl7pPr>
+            <a:lvl8pPr>
+              <a:defRPr sz="2600" b="1">
+                <a:solidFill>
+                  <a:srgbClr val="0C2440"/>
+                </a:solidFill>
+                <a:latin typeface="Aptos Display"/>
+              </a:defRPr>
+            </a:lvl8pPr>
+            <a:lvl9pPr>
+              <a:defRPr sz="2600" b="1">
+                <a:solidFill>
+                  <a:srgbClr val="0C2440"/>
+                </a:solidFill>
+                <a:latin typeface="Aptos Display"/>
+              </a:defRPr>
+            </a:lvl9pPr>
           </a:lstStyle>
           <a:p>
             <a:pPr>
-              <a:defRPr sz="3100" b="1">
+              <a:defRPr sz="2600" b="1">
                 <a:solidFill>
                   <a:srgbClr val="0C2440"/>
                 </a:solidFill>
@@ -3536,39 +6793,84 @@
         </p:nvSpPr>
         <p:spPr>
           <a:xfrm>
-            <a:off x="3575050" y="204788"/>
-            <a:ext cx="5111750" cy="4389835"/>
+            <a:off x="3575050" y="1234440"/>
+            <a:ext cx="5111750" cy="3657600"/>
           </a:xfrm>
         </p:spPr>
         <p:txBody>
           <a:bodyPr/>
           <a:lstStyle>
             <a:lvl1pPr>
-              <a:defRPr sz="2400"/>
+              <a:defRPr sz="1900" b="0">
+                <a:solidFill>
+                  <a:srgbClr val="243A50"/>
+                </a:solidFill>
+                <a:latin typeface="Aptos"/>
+              </a:defRPr>
             </a:lvl1pPr>
             <a:lvl2pPr>
-              <a:defRPr sz="2100"/>
+              <a:defRPr sz="1900" b="0">
+                <a:solidFill>
+                  <a:srgbClr val="243A50"/>
+                </a:solidFill>
+                <a:latin typeface="Aptos"/>
+              </a:defRPr>
             </a:lvl2pPr>
             <a:lvl3pPr>
-              <a:defRPr sz="1800"/>
+              <a:defRPr sz="1900" b="0">
+                <a:solidFill>
+                  <a:srgbClr val="243A50"/>
+                </a:solidFill>
+                <a:latin typeface="Aptos"/>
+              </a:defRPr>
             </a:lvl3pPr>
             <a:lvl4pPr>
-              <a:defRPr sz="1500"/>
+              <a:defRPr sz="1900" b="0">
+                <a:solidFill>
+                  <a:srgbClr val="243A50"/>
+                </a:solidFill>
+                <a:latin typeface="Aptos"/>
+              </a:defRPr>
             </a:lvl4pPr>
             <a:lvl5pPr>
-              <a:defRPr sz="1500"/>
+              <a:defRPr sz="1900" b="0">
+                <a:solidFill>
+                  <a:srgbClr val="243A50"/>
+                </a:solidFill>
+                <a:latin typeface="Aptos"/>
+              </a:defRPr>
             </a:lvl5pPr>
             <a:lvl6pPr>
-              <a:defRPr sz="1500"/>
+              <a:defRPr sz="1900" b="0">
+                <a:solidFill>
+                  <a:srgbClr val="243A50"/>
+                </a:solidFill>
+                <a:latin typeface="Aptos"/>
+              </a:defRPr>
             </a:lvl6pPr>
             <a:lvl7pPr>
-              <a:defRPr sz="1500"/>
+              <a:defRPr sz="1900" b="0">
+                <a:solidFill>
+                  <a:srgbClr val="243A50"/>
+                </a:solidFill>
+                <a:latin typeface="Aptos"/>
+              </a:defRPr>
             </a:lvl7pPr>
             <a:lvl8pPr>
-              <a:defRPr sz="1500"/>
+              <a:defRPr sz="1900" b="0">
+                <a:solidFill>
+                  <a:srgbClr val="243A50"/>
+                </a:solidFill>
+                <a:latin typeface="Aptos"/>
+              </a:defRPr>
             </a:lvl8pPr>
             <a:lvl9pPr>
-              <a:defRPr sz="1500"/>
+              <a:defRPr sz="1900" b="0">
+                <a:solidFill>
+                  <a:srgbClr val="243A50"/>
+                </a:solidFill>
+                <a:latin typeface="Aptos"/>
+              </a:defRPr>
             </a:lvl9pPr>
           </a:lstStyle>
           <a:p>
@@ -3627,8 +6929,8 @@
         </p:nvSpPr>
         <p:spPr>
           <a:xfrm>
-            <a:off x="457201" y="1076326"/>
-            <a:ext cx="3008313" cy="3518297"/>
+            <a:off x="457201" y="1234440"/>
+            <a:ext cx="3008313" cy="3657600"/>
           </a:xfrm>
         </p:spPr>
         <p:txBody>
@@ -3636,39 +6938,84 @@
           <a:lstStyle>
             <a:lvl1pPr marL="0" indent="0">
               <a:buNone/>
-              <a:defRPr sz="1050"/>
+              <a:defRPr sz="1900" b="0">
+                <a:solidFill>
+                  <a:srgbClr val="243A50"/>
+                </a:solidFill>
+                <a:latin typeface="Aptos"/>
+              </a:defRPr>
             </a:lvl1pPr>
             <a:lvl2pPr marL="342900" indent="0">
               <a:buNone/>
-              <a:defRPr sz="900"/>
+              <a:defRPr sz="1900" b="0">
+                <a:solidFill>
+                  <a:srgbClr val="243A50"/>
+                </a:solidFill>
+                <a:latin typeface="Aptos"/>
+              </a:defRPr>
             </a:lvl2pPr>
             <a:lvl3pPr marL="685800" indent="0">
               <a:buNone/>
-              <a:defRPr sz="750"/>
+              <a:defRPr sz="1900" b="0">
+                <a:solidFill>
+                  <a:srgbClr val="243A50"/>
+                </a:solidFill>
+                <a:latin typeface="Aptos"/>
+              </a:defRPr>
             </a:lvl3pPr>
             <a:lvl4pPr marL="1028700" indent="0">
               <a:buNone/>
-              <a:defRPr sz="675"/>
+              <a:defRPr sz="1900" b="0">
+                <a:solidFill>
+                  <a:srgbClr val="243A50"/>
+                </a:solidFill>
+                <a:latin typeface="Aptos"/>
+              </a:defRPr>
             </a:lvl4pPr>
             <a:lvl5pPr marL="1371600" indent="0">
               <a:buNone/>
-              <a:defRPr sz="675"/>
+              <a:defRPr sz="1900" b="0">
+                <a:solidFill>
+                  <a:srgbClr val="243A50"/>
+                </a:solidFill>
+                <a:latin typeface="Aptos"/>
+              </a:defRPr>
             </a:lvl5pPr>
             <a:lvl6pPr marL="1714500" indent="0">
               <a:buNone/>
-              <a:defRPr sz="675"/>
+              <a:defRPr sz="1900" b="0">
+                <a:solidFill>
+                  <a:srgbClr val="243A50"/>
+                </a:solidFill>
+                <a:latin typeface="Aptos"/>
+              </a:defRPr>
             </a:lvl6pPr>
             <a:lvl7pPr marL="2057400" indent="0">
               <a:buNone/>
-              <a:defRPr sz="675"/>
+              <a:defRPr sz="1900" b="0">
+                <a:solidFill>
+                  <a:srgbClr val="243A50"/>
+                </a:solidFill>
+                <a:latin typeface="Aptos"/>
+              </a:defRPr>
             </a:lvl7pPr>
             <a:lvl8pPr marL="2400300" indent="0">
               <a:buNone/>
-              <a:defRPr sz="675"/>
+              <a:defRPr sz="1900" b="0">
+                <a:solidFill>
+                  <a:srgbClr val="243A50"/>
+                </a:solidFill>
+                <a:latin typeface="Aptos"/>
+              </a:defRPr>
             </a:lvl8pPr>
             <a:lvl9pPr marL="2743200" indent="0">
               <a:buNone/>
-              <a:defRPr sz="675"/>
+              <a:defRPr sz="1900" b="0">
+                <a:solidFill>
+                  <a:srgbClr val="243A50"/>
+                </a:solidFill>
+                <a:latin typeface="Aptos"/>
+              </a:defRPr>
             </a:lvl9pPr>
           </a:lstStyle>
           <a:p>
@@ -3697,10 +7044,88 @@
             <p:ph type="dt" sz="half" idx="10"/>
           </p:nvPr>
         </p:nvSpPr>
-        <p:spPr/>
+        <p:spPr>
+          <a:xfrm>
+            <a:off x="457200" y="0"/>
+            <a:ext cx="2133600" cy="0"/>
+          </a:xfrm>
+        </p:spPr>
         <p:txBody>
           <a:bodyPr/>
-          <a:lstStyle/>
+          <a:lstStyle>
+            <a:lvl1pPr>
+              <a:defRPr sz="900" b="0">
+                <a:solidFill>
+                  <a:srgbClr val="637D94"/>
+                </a:solidFill>
+                <a:latin typeface="Aptos"/>
+              </a:defRPr>
+            </a:lvl1pPr>
+            <a:lvl2pPr>
+              <a:defRPr sz="900" b="0">
+                <a:solidFill>
+                  <a:srgbClr val="637D94"/>
+                </a:solidFill>
+                <a:latin typeface="Aptos"/>
+              </a:defRPr>
+            </a:lvl2pPr>
+            <a:lvl3pPr>
+              <a:defRPr sz="900" b="0">
+                <a:solidFill>
+                  <a:srgbClr val="637D94"/>
+                </a:solidFill>
+                <a:latin typeface="Aptos"/>
+              </a:defRPr>
+            </a:lvl3pPr>
+            <a:lvl4pPr>
+              <a:defRPr sz="900" b="0">
+                <a:solidFill>
+                  <a:srgbClr val="637D94"/>
+                </a:solidFill>
+                <a:latin typeface="Aptos"/>
+              </a:defRPr>
+            </a:lvl4pPr>
+            <a:lvl5pPr>
+              <a:defRPr sz="900" b="0">
+                <a:solidFill>
+                  <a:srgbClr val="637D94"/>
+                </a:solidFill>
+                <a:latin typeface="Aptos"/>
+              </a:defRPr>
+            </a:lvl5pPr>
+            <a:lvl6pPr>
+              <a:defRPr sz="900" b="0">
+                <a:solidFill>
+                  <a:srgbClr val="637D94"/>
+                </a:solidFill>
+                <a:latin typeface="Aptos"/>
+              </a:defRPr>
+            </a:lvl6pPr>
+            <a:lvl7pPr>
+              <a:defRPr sz="900" b="0">
+                <a:solidFill>
+                  <a:srgbClr val="637D94"/>
+                </a:solidFill>
+                <a:latin typeface="Aptos"/>
+              </a:defRPr>
+            </a:lvl7pPr>
+            <a:lvl8pPr>
+              <a:defRPr sz="900" b="0">
+                <a:solidFill>
+                  <a:srgbClr val="637D94"/>
+                </a:solidFill>
+                <a:latin typeface="Aptos"/>
+              </a:defRPr>
+            </a:lvl8pPr>
+            <a:lvl9pPr>
+              <a:defRPr sz="900" b="0">
+                <a:solidFill>
+                  <a:srgbClr val="637D94"/>
+                </a:solidFill>
+                <a:latin typeface="Aptos"/>
+              </a:defRPr>
+            </a:lvl9pPr>
+          </a:lstStyle>
           <a:p>
             <a:pPr>
               <a:defRPr sz="900" b="0">
@@ -3728,10 +7153,88 @@
             <p:ph type="ftr" sz="quarter" idx="11"/>
           </p:nvPr>
         </p:nvSpPr>
-        <p:spPr/>
+        <p:spPr>
+          <a:xfrm>
+            <a:off x="3124200" y="0"/>
+            <a:ext cx="2895600" cy="0"/>
+          </a:xfrm>
+        </p:spPr>
         <p:txBody>
           <a:bodyPr/>
-          <a:lstStyle/>
+          <a:lstStyle>
+            <a:lvl1pPr>
+              <a:defRPr sz="900" b="0">
+                <a:solidFill>
+                  <a:srgbClr val="637D94"/>
+                </a:solidFill>
+                <a:latin typeface="Aptos"/>
+              </a:defRPr>
+            </a:lvl1pPr>
+            <a:lvl2pPr>
+              <a:defRPr sz="900" b="0">
+                <a:solidFill>
+                  <a:srgbClr val="637D94"/>
+                </a:solidFill>
+                <a:latin typeface="Aptos"/>
+              </a:defRPr>
+            </a:lvl2pPr>
+            <a:lvl3pPr>
+              <a:defRPr sz="900" b="0">
+                <a:solidFill>
+                  <a:srgbClr val="637D94"/>
+                </a:solidFill>
+                <a:latin typeface="Aptos"/>
+              </a:defRPr>
+            </a:lvl3pPr>
+            <a:lvl4pPr>
+              <a:defRPr sz="900" b="0">
+                <a:solidFill>
+                  <a:srgbClr val="637D94"/>
+                </a:solidFill>
+                <a:latin typeface="Aptos"/>
+              </a:defRPr>
+            </a:lvl4pPr>
+            <a:lvl5pPr>
+              <a:defRPr sz="900" b="0">
+                <a:solidFill>
+                  <a:srgbClr val="637D94"/>
+                </a:solidFill>
+                <a:latin typeface="Aptos"/>
+              </a:defRPr>
+            </a:lvl5pPr>
+            <a:lvl6pPr>
+              <a:defRPr sz="900" b="0">
+                <a:solidFill>
+                  <a:srgbClr val="637D94"/>
+                </a:solidFill>
+                <a:latin typeface="Aptos"/>
+              </a:defRPr>
+            </a:lvl6pPr>
+            <a:lvl7pPr>
+              <a:defRPr sz="900" b="0">
+                <a:solidFill>
+                  <a:srgbClr val="637D94"/>
+                </a:solidFill>
+                <a:latin typeface="Aptos"/>
+              </a:defRPr>
+            </a:lvl7pPr>
+            <a:lvl8pPr>
+              <a:defRPr sz="900" b="0">
+                <a:solidFill>
+                  <a:srgbClr val="637D94"/>
+                </a:solidFill>
+                <a:latin typeface="Aptos"/>
+              </a:defRPr>
+            </a:lvl8pPr>
+            <a:lvl9pPr>
+              <a:defRPr sz="900" b="0">
+                <a:solidFill>
+                  <a:srgbClr val="637D94"/>
+                </a:solidFill>
+                <a:latin typeface="Aptos"/>
+              </a:defRPr>
+            </a:lvl9pPr>
+          </a:lstStyle>
           <a:p>
             <a:pPr>
               <a:defRPr sz="900" b="0">
@@ -3755,10 +7258,88 @@
             <p:ph type="sldNum" sz="quarter" idx="12"/>
           </p:nvPr>
         </p:nvSpPr>
-        <p:spPr/>
+        <p:spPr>
+          <a:xfrm>
+            <a:off x="6553200" y="0"/>
+            <a:ext cx="2133600" cy="0"/>
+          </a:xfrm>
+        </p:spPr>
         <p:txBody>
           <a:bodyPr/>
-          <a:lstStyle/>
+          <a:lstStyle>
+            <a:lvl1pPr>
+              <a:defRPr sz="900" b="0">
+                <a:solidFill>
+                  <a:srgbClr val="637D94"/>
+                </a:solidFill>
+                <a:latin typeface="Aptos"/>
+              </a:defRPr>
+            </a:lvl1pPr>
+            <a:lvl2pPr>
+              <a:defRPr sz="900" b="0">
+                <a:solidFill>
+                  <a:srgbClr val="637D94"/>
+                </a:solidFill>
+                <a:latin typeface="Aptos"/>
+              </a:defRPr>
+            </a:lvl2pPr>
+            <a:lvl3pPr>
+              <a:defRPr sz="900" b="0">
+                <a:solidFill>
+                  <a:srgbClr val="637D94"/>
+                </a:solidFill>
+                <a:latin typeface="Aptos"/>
+              </a:defRPr>
+            </a:lvl3pPr>
+            <a:lvl4pPr>
+              <a:defRPr sz="900" b="0">
+                <a:solidFill>
+                  <a:srgbClr val="637D94"/>
+                </a:solidFill>
+                <a:latin typeface="Aptos"/>
+              </a:defRPr>
+            </a:lvl4pPr>
+            <a:lvl5pPr>
+              <a:defRPr sz="900" b="0">
+                <a:solidFill>
+                  <a:srgbClr val="637D94"/>
+                </a:solidFill>
+                <a:latin typeface="Aptos"/>
+              </a:defRPr>
+            </a:lvl5pPr>
+            <a:lvl6pPr>
+              <a:defRPr sz="900" b="0">
+                <a:solidFill>
+                  <a:srgbClr val="637D94"/>
+                </a:solidFill>
+                <a:latin typeface="Aptos"/>
+              </a:defRPr>
+            </a:lvl6pPr>
+            <a:lvl7pPr>
+              <a:defRPr sz="900" b="0">
+                <a:solidFill>
+                  <a:srgbClr val="637D94"/>
+                </a:solidFill>
+                <a:latin typeface="Aptos"/>
+              </a:defRPr>
+            </a:lvl7pPr>
+            <a:lvl8pPr>
+              <a:defRPr sz="900" b="0">
+                <a:solidFill>
+                  <a:srgbClr val="637D94"/>
+                </a:solidFill>
+                <a:latin typeface="Aptos"/>
+              </a:defRPr>
+            </a:lvl8pPr>
+            <a:lvl9pPr>
+              <a:defRPr sz="900" b="0">
+                <a:solidFill>
+                  <a:srgbClr val="637D94"/>
+                </a:solidFill>
+                <a:latin typeface="Aptos"/>
+              </a:defRPr>
+            </a:lvl9pPr>
+          </a:lstStyle>
           <a:p>
             <a:pPr>
               <a:defRPr sz="900" b="0">
@@ -3869,20 +7450,89 @@
         </p:nvSpPr>
         <p:spPr>
           <a:xfrm>
-            <a:off x="1792288" y="3600450"/>
-            <a:ext cx="5486400" cy="425054"/>
+            <a:off x="1792288" y="137160"/>
+            <a:ext cx="5486400" cy="822960"/>
           </a:xfrm>
         </p:spPr>
         <p:txBody>
           <a:bodyPr anchor="b"/>
           <a:lstStyle>
             <a:lvl1pPr algn="l">
-              <a:defRPr sz="1500" b="1"/>
+              <a:defRPr sz="2600" b="1">
+                <a:solidFill>
+                  <a:srgbClr val="0C2440"/>
+                </a:solidFill>
+                <a:latin typeface="Aptos Display"/>
+              </a:defRPr>
             </a:lvl1pPr>
+            <a:lvl2pPr>
+              <a:defRPr sz="2600" b="1">
+                <a:solidFill>
+                  <a:srgbClr val="0C2440"/>
+                </a:solidFill>
+                <a:latin typeface="Aptos Display"/>
+              </a:defRPr>
+            </a:lvl2pPr>
+            <a:lvl3pPr>
+              <a:defRPr sz="2600" b="1">
+                <a:solidFill>
+                  <a:srgbClr val="0C2440"/>
+                </a:solidFill>
+                <a:latin typeface="Aptos Display"/>
+              </a:defRPr>
+            </a:lvl3pPr>
+            <a:lvl4pPr>
+              <a:defRPr sz="2600" b="1">
+                <a:solidFill>
+                  <a:srgbClr val="0C2440"/>
+                </a:solidFill>
+                <a:latin typeface="Aptos Display"/>
+              </a:defRPr>
+            </a:lvl4pPr>
+            <a:lvl5pPr>
+              <a:defRPr sz="2600" b="1">
+                <a:solidFill>
+                  <a:srgbClr val="0C2440"/>
+                </a:solidFill>
+                <a:latin typeface="Aptos Display"/>
+              </a:defRPr>
+            </a:lvl5pPr>
+            <a:lvl6pPr>
+              <a:defRPr sz="2600" b="1">
+                <a:solidFill>
+                  <a:srgbClr val="0C2440"/>
+                </a:solidFill>
+                <a:latin typeface="Aptos Display"/>
+              </a:defRPr>
+            </a:lvl6pPr>
+            <a:lvl7pPr>
+              <a:defRPr sz="2600" b="1">
+                <a:solidFill>
+                  <a:srgbClr val="0C2440"/>
+                </a:solidFill>
+                <a:latin typeface="Aptos Display"/>
+              </a:defRPr>
+            </a:lvl7pPr>
+            <a:lvl8pPr>
+              <a:defRPr sz="2600" b="1">
+                <a:solidFill>
+                  <a:srgbClr val="0C2440"/>
+                </a:solidFill>
+                <a:latin typeface="Aptos Display"/>
+              </a:defRPr>
+            </a:lvl8pPr>
+            <a:lvl9pPr>
+              <a:defRPr sz="2600" b="1">
+                <a:solidFill>
+                  <a:srgbClr val="0C2440"/>
+                </a:solidFill>
+                <a:latin typeface="Aptos Display"/>
+              </a:defRPr>
+            </a:lvl9pPr>
           </a:lstStyle>
           <a:p>
             <a:pPr>
-              <a:defRPr sz="3100" b="1">
+              <a:defRPr sz="2600" b="1">
                 <a:solidFill>
                   <a:srgbClr val="0C2440"/>
                 </a:solidFill>
@@ -3908,8 +7558,8 @@
         </p:nvSpPr>
         <p:spPr>
           <a:xfrm>
-            <a:off x="1792288" y="459581"/>
-            <a:ext cx="5486400" cy="3086100"/>
+            <a:off x="1792288" y="1234440"/>
+            <a:ext cx="5486400" cy="3657600"/>
           </a:xfrm>
         </p:spPr>
         <p:txBody>
@@ -3917,39 +7567,84 @@
           <a:lstStyle>
             <a:lvl1pPr marL="0" indent="0">
               <a:buNone/>
-              <a:defRPr sz="2400"/>
+              <a:defRPr sz="1900" b="0">
+                <a:solidFill>
+                  <a:srgbClr val="243A50"/>
+                </a:solidFill>
+                <a:latin typeface="Aptos"/>
+              </a:defRPr>
             </a:lvl1pPr>
             <a:lvl2pPr marL="342900" indent="0">
               <a:buNone/>
-              <a:defRPr sz="2100"/>
+              <a:defRPr sz="1900" b="0">
+                <a:solidFill>
+                  <a:srgbClr val="243A50"/>
+                </a:solidFill>
+                <a:latin typeface="Aptos"/>
+              </a:defRPr>
             </a:lvl2pPr>
             <a:lvl3pPr marL="685800" indent="0">
               <a:buNone/>
-              <a:defRPr sz="1800"/>
+              <a:defRPr sz="1900" b="0">
+                <a:solidFill>
+                  <a:srgbClr val="243A50"/>
+                </a:solidFill>
+                <a:latin typeface="Aptos"/>
+              </a:defRPr>
             </a:lvl3pPr>
             <a:lvl4pPr marL="1028700" indent="0">
               <a:buNone/>
-              <a:defRPr sz="1500"/>
+              <a:defRPr sz="1900" b="0">
+                <a:solidFill>
+                  <a:srgbClr val="243A50"/>
+                </a:solidFill>
+                <a:latin typeface="Aptos"/>
+              </a:defRPr>
             </a:lvl4pPr>
             <a:lvl5pPr marL="1371600" indent="0">
               <a:buNone/>
-              <a:defRPr sz="1500"/>
+              <a:defRPr sz="1900" b="0">
+                <a:solidFill>
+                  <a:srgbClr val="243A50"/>
+                </a:solidFill>
+                <a:latin typeface="Aptos"/>
+              </a:defRPr>
             </a:lvl5pPr>
             <a:lvl6pPr marL="1714500" indent="0">
               <a:buNone/>
-              <a:defRPr sz="1500"/>
+              <a:defRPr sz="1900" b="0">
+                <a:solidFill>
+                  <a:srgbClr val="243A50"/>
+                </a:solidFill>
+                <a:latin typeface="Aptos"/>
+              </a:defRPr>
             </a:lvl6pPr>
             <a:lvl7pPr marL="2057400" indent="0">
               <a:buNone/>
-              <a:defRPr sz="1500"/>
+              <a:defRPr sz="1900" b="0">
+                <a:solidFill>
+                  <a:srgbClr val="243A50"/>
+                </a:solidFill>
+                <a:latin typeface="Aptos"/>
+              </a:defRPr>
             </a:lvl7pPr>
             <a:lvl8pPr marL="2400300" indent="0">
               <a:buNone/>
-              <a:defRPr sz="1500"/>
+              <a:defRPr sz="1900" b="0">
+                <a:solidFill>
+                  <a:srgbClr val="243A50"/>
+                </a:solidFill>
+                <a:latin typeface="Aptos"/>
+              </a:defRPr>
             </a:lvl8pPr>
             <a:lvl9pPr marL="2743200" indent="0">
               <a:buNone/>
-              <a:defRPr sz="1500"/>
+              <a:defRPr sz="1900" b="0">
+                <a:solidFill>
+                  <a:srgbClr val="243A50"/>
+                </a:solidFill>
+                <a:latin typeface="Aptos"/>
+              </a:defRPr>
             </a:lvl9pPr>
           </a:lstStyle>
           <a:p>
@@ -3977,8 +7672,8 @@
         </p:nvSpPr>
         <p:spPr>
           <a:xfrm>
-            <a:off x="1792288" y="4025503"/>
-            <a:ext cx="5486400" cy="603647"/>
+            <a:off x="1792288" y="1234440"/>
+            <a:ext cx="5486400" cy="3657600"/>
           </a:xfrm>
         </p:spPr>
         <p:txBody>
@@ -3986,39 +7681,84 @@
           <a:lstStyle>
             <a:lvl1pPr marL="0" indent="0">
               <a:buNone/>
-              <a:defRPr sz="1050"/>
+              <a:defRPr sz="1900" b="0">
+                <a:solidFill>
+                  <a:srgbClr val="243A50"/>
+                </a:solidFill>
+                <a:latin typeface="Aptos"/>
+              </a:defRPr>
             </a:lvl1pPr>
             <a:lvl2pPr marL="342900" indent="0">
               <a:buNone/>
-              <a:defRPr sz="900"/>
+              <a:defRPr sz="1900" b="0">
+                <a:solidFill>
+                  <a:srgbClr val="243A50"/>
+                </a:solidFill>
+                <a:latin typeface="Aptos"/>
+              </a:defRPr>
             </a:lvl2pPr>
             <a:lvl3pPr marL="685800" indent="0">
               <a:buNone/>
-              <a:defRPr sz="750"/>
+              <a:defRPr sz="1900" b="0">
+                <a:solidFill>
+                  <a:srgbClr val="243A50"/>
+                </a:solidFill>
+                <a:latin typeface="Aptos"/>
+              </a:defRPr>
             </a:lvl3pPr>
             <a:lvl4pPr marL="1028700" indent="0">
               <a:buNone/>
-              <a:defRPr sz="675"/>
+              <a:defRPr sz="1900" b="0">
+                <a:solidFill>
+                  <a:srgbClr val="243A50"/>
+                </a:solidFill>
+                <a:latin typeface="Aptos"/>
+              </a:defRPr>
             </a:lvl4pPr>
             <a:lvl5pPr marL="1371600" indent="0">
               <a:buNone/>
-              <a:defRPr sz="675"/>
+              <a:defRPr sz="1900" b="0">
+                <a:solidFill>
+                  <a:srgbClr val="243A50"/>
+                </a:solidFill>
+                <a:latin typeface="Aptos"/>
+              </a:defRPr>
             </a:lvl5pPr>
             <a:lvl6pPr marL="1714500" indent="0">
               <a:buNone/>
-              <a:defRPr sz="675"/>
+              <a:defRPr sz="1900" b="0">
+                <a:solidFill>
+                  <a:srgbClr val="243A50"/>
+                </a:solidFill>
+                <a:latin typeface="Aptos"/>
+              </a:defRPr>
             </a:lvl6pPr>
             <a:lvl7pPr marL="2057400" indent="0">
               <a:buNone/>
-              <a:defRPr sz="675"/>
+              <a:defRPr sz="1900" b="0">
+                <a:solidFill>
+                  <a:srgbClr val="243A50"/>
+                </a:solidFill>
+                <a:latin typeface="Aptos"/>
+              </a:defRPr>
             </a:lvl7pPr>
             <a:lvl8pPr marL="2400300" indent="0">
               <a:buNone/>
-              <a:defRPr sz="675"/>
+              <a:defRPr sz="1900" b="0">
+                <a:solidFill>
+                  <a:srgbClr val="243A50"/>
+                </a:solidFill>
+                <a:latin typeface="Aptos"/>
+              </a:defRPr>
             </a:lvl8pPr>
             <a:lvl9pPr marL="2743200" indent="0">
               <a:buNone/>
-              <a:defRPr sz="675"/>
+              <a:defRPr sz="1900" b="0">
+                <a:solidFill>
+                  <a:srgbClr val="243A50"/>
+                </a:solidFill>
+                <a:latin typeface="Aptos"/>
+              </a:defRPr>
             </a:lvl9pPr>
           </a:lstStyle>
           <a:p>
@@ -4047,10 +7787,88 @@
             <p:ph type="dt" sz="half" idx="10"/>
           </p:nvPr>
         </p:nvSpPr>
-        <p:spPr/>
+        <p:spPr>
+          <a:xfrm>
+            <a:off x="457200" y="0"/>
+            <a:ext cx="2133600" cy="0"/>
+          </a:xfrm>
+        </p:spPr>
         <p:txBody>
           <a:bodyPr/>
-          <a:lstStyle/>
+          <a:lstStyle>
+            <a:lvl1pPr>
+              <a:defRPr sz="900" b="0">
+                <a:solidFill>
+                  <a:srgbClr val="637D94"/>
+                </a:solidFill>
+                <a:latin typeface="Aptos"/>
+              </a:defRPr>
+            </a:lvl1pPr>
+            <a:lvl2pPr>
+              <a:defRPr sz="900" b="0">
+                <a:solidFill>
+                  <a:srgbClr val="637D94"/>
+                </a:solidFill>
+                <a:latin typeface="Aptos"/>
+              </a:defRPr>
+            </a:lvl2pPr>
+            <a:lvl3pPr>
+              <a:defRPr sz="900" b="0">
+                <a:solidFill>
+                  <a:srgbClr val="637D94"/>
+                </a:solidFill>
+                <a:latin typeface="Aptos"/>
+              </a:defRPr>
+            </a:lvl3pPr>
+            <a:lvl4pPr>
+              <a:defRPr sz="900" b="0">
+                <a:solidFill>
+                  <a:srgbClr val="637D94"/>
+                </a:solidFill>
+                <a:latin typeface="Aptos"/>
+              </a:defRPr>
+            </a:lvl4pPr>
+            <a:lvl5pPr>
+              <a:defRPr sz="900" b="0">
+                <a:solidFill>
+                  <a:srgbClr val="637D94"/>
+                </a:solidFill>
+                <a:latin typeface="Aptos"/>
+              </a:defRPr>
+            </a:lvl5pPr>
+            <a:lvl6pPr>
+              <a:defRPr sz="900" b="0">
+                <a:solidFill>
+                  <a:srgbClr val="637D94"/>
+                </a:solidFill>
+                <a:latin typeface="Aptos"/>
+              </a:defRPr>
+            </a:lvl6pPr>
+            <a:lvl7pPr>
+              <a:defRPr sz="900" b="0">
+                <a:solidFill>
+                  <a:srgbClr val="637D94"/>
+                </a:solidFill>
+                <a:latin typeface="Aptos"/>
+              </a:defRPr>
+            </a:lvl7pPr>
+            <a:lvl8pPr>
+              <a:defRPr sz="900" b="0">
+                <a:solidFill>
+                  <a:srgbClr val="637D94"/>
+                </a:solidFill>
+                <a:latin typeface="Aptos"/>
+              </a:defRPr>
+            </a:lvl8pPr>
+            <a:lvl9pPr>
+              <a:defRPr sz="900" b="0">
+                <a:solidFill>
+                  <a:srgbClr val="637D94"/>
+                </a:solidFill>
+                <a:latin typeface="Aptos"/>
+              </a:defRPr>
+            </a:lvl9pPr>
+          </a:lstStyle>
           <a:p>
             <a:pPr>
               <a:defRPr sz="900" b="0">
@@ -4078,10 +7896,88 @@
             <p:ph type="ftr" sz="quarter" idx="11"/>
           </p:nvPr>
         </p:nvSpPr>
-        <p:spPr/>
+        <p:spPr>
+          <a:xfrm>
+            <a:off x="3124200" y="0"/>
+            <a:ext cx="2895600" cy="0"/>
+          </a:xfrm>
+        </p:spPr>
         <p:txBody>
           <a:bodyPr/>
-          <a:lstStyle/>
+          <a:lstStyle>
+            <a:lvl1pPr>
+              <a:defRPr sz="900" b="0">
+                <a:solidFill>
+                  <a:srgbClr val="637D94"/>
+                </a:solidFill>
+                <a:latin typeface="Aptos"/>
+              </a:defRPr>
+            </a:lvl1pPr>
+            <a:lvl2pPr>
+              <a:defRPr sz="900" b="0">
+                <a:solidFill>
+                  <a:srgbClr val="637D94"/>
+                </a:solidFill>
+                <a:latin typeface="Aptos"/>
+              </a:defRPr>
+            </a:lvl2pPr>
+            <a:lvl3pPr>
+              <a:defRPr sz="900" b="0">
+                <a:solidFill>
+                  <a:srgbClr val="637D94"/>
+                </a:solidFill>
+                <a:latin typeface="Aptos"/>
+              </a:defRPr>
+            </a:lvl3pPr>
+            <a:lvl4pPr>
+              <a:defRPr sz="900" b="0">
+                <a:solidFill>
+                  <a:srgbClr val="637D94"/>
+                </a:solidFill>
+                <a:latin typeface="Aptos"/>
+              </a:defRPr>
+            </a:lvl4pPr>
+            <a:lvl5pPr>
+              <a:defRPr sz="900" b="0">
+                <a:solidFill>
+                  <a:srgbClr val="637D94"/>
+                </a:solidFill>
+                <a:latin typeface="Aptos"/>
+              </a:defRPr>
+            </a:lvl5pPr>
+            <a:lvl6pPr>
+              <a:defRPr sz="900" b="0">
+                <a:solidFill>
+                  <a:srgbClr val="637D94"/>
+                </a:solidFill>
+                <a:latin typeface="Aptos"/>
+              </a:defRPr>
+            </a:lvl6pPr>
+            <a:lvl7pPr>
+              <a:defRPr sz="900" b="0">
+                <a:solidFill>
+                  <a:srgbClr val="637D94"/>
+                </a:solidFill>
+                <a:latin typeface="Aptos"/>
+              </a:defRPr>
+            </a:lvl7pPr>
+            <a:lvl8pPr>
+              <a:defRPr sz="900" b="0">
+                <a:solidFill>
+                  <a:srgbClr val="637D94"/>
+                </a:solidFill>
+                <a:latin typeface="Aptos"/>
+              </a:defRPr>
+            </a:lvl8pPr>
+            <a:lvl9pPr>
+              <a:defRPr sz="900" b="0">
+                <a:solidFill>
+                  <a:srgbClr val="637D94"/>
+                </a:solidFill>
+                <a:latin typeface="Aptos"/>
+              </a:defRPr>
+            </a:lvl9pPr>
+          </a:lstStyle>
           <a:p>
             <a:pPr>
               <a:defRPr sz="900" b="0">
@@ -4105,10 +8001,88 @@
             <p:ph type="sldNum" sz="quarter" idx="12"/>
           </p:nvPr>
         </p:nvSpPr>
-        <p:spPr/>
+        <p:spPr>
+          <a:xfrm>
+            <a:off x="6553200" y="0"/>
+            <a:ext cx="2133600" cy="0"/>
+          </a:xfrm>
+        </p:spPr>
         <p:txBody>
           <a:bodyPr/>
-          <a:lstStyle/>
+          <a:lstStyle>
+            <a:lvl1pPr>
+              <a:defRPr sz="900" b="0">
+                <a:solidFill>
+                  <a:srgbClr val="637D94"/>
+                </a:solidFill>
+                <a:latin typeface="Aptos"/>
+              </a:defRPr>
+            </a:lvl1pPr>
+            <a:lvl2pPr>
+              <a:defRPr sz="900" b="0">
+                <a:solidFill>
+                  <a:srgbClr val="637D94"/>
+                </a:solidFill>
+                <a:latin typeface="Aptos"/>
+              </a:defRPr>
+            </a:lvl2pPr>
+            <a:lvl3pPr>
+              <a:defRPr sz="900" b="0">
+                <a:solidFill>
+                  <a:srgbClr val="637D94"/>
+                </a:solidFill>
+                <a:latin typeface="Aptos"/>
+              </a:defRPr>
+            </a:lvl3pPr>
+            <a:lvl4pPr>
+              <a:defRPr sz="900" b="0">
+                <a:solidFill>
+                  <a:srgbClr val="637D94"/>
+                </a:solidFill>
+                <a:latin typeface="Aptos"/>
+              </a:defRPr>
+            </a:lvl4pPr>
+            <a:lvl5pPr>
+              <a:defRPr sz="900" b="0">
+                <a:solidFill>
+                  <a:srgbClr val="637D94"/>
+                </a:solidFill>
+                <a:latin typeface="Aptos"/>
+              </a:defRPr>
+            </a:lvl5pPr>
+            <a:lvl6pPr>
+              <a:defRPr sz="900" b="0">
+                <a:solidFill>
+                  <a:srgbClr val="637D94"/>
+                </a:solidFill>
+                <a:latin typeface="Aptos"/>
+              </a:defRPr>
+            </a:lvl6pPr>
+            <a:lvl7pPr>
+              <a:defRPr sz="900" b="0">
+                <a:solidFill>
+                  <a:srgbClr val="637D94"/>
+                </a:solidFill>
+                <a:latin typeface="Aptos"/>
+              </a:defRPr>
+            </a:lvl7pPr>
+            <a:lvl8pPr>
+              <a:defRPr sz="900" b="0">
+                <a:solidFill>
+                  <a:srgbClr val="637D94"/>
+                </a:solidFill>
+                <a:latin typeface="Aptos"/>
+              </a:defRPr>
+            </a:lvl8pPr>
+            <a:lvl9pPr>
+              <a:defRPr sz="900" b="0">
+                <a:solidFill>
+                  <a:srgbClr val="637D94"/>
+                </a:solidFill>
+                <a:latin typeface="Aptos"/>
+              </a:defRPr>
+            </a:lvl9pPr>
+          </a:lstStyle>
           <a:p>
             <a:pPr>
               <a:defRPr sz="900" b="0">
